--- a/day1_material/slides/day1.pptx
+++ b/day1_material/slides/day1.pptx
@@ -5,29 +5,33 @@
     <p:sldMasterId id="2147483648" r:id="rId1"/>
   </p:sldMasterIdLst>
   <p:notesMasterIdLst>
-    <p:notesMasterId r:id="rId22"/>
+    <p:notesMasterId r:id="rId26"/>
   </p:notesMasterIdLst>
   <p:sldIdLst>
     <p:sldId id="256" r:id="rId2"/>
     <p:sldId id="273" r:id="rId3"/>
     <p:sldId id="274" r:id="rId4"/>
-    <p:sldId id="257" r:id="rId5"/>
-    <p:sldId id="287" r:id="rId6"/>
-    <p:sldId id="259" r:id="rId7"/>
+    <p:sldId id="260" r:id="rId5"/>
+    <p:sldId id="257" r:id="rId6"/>
+    <p:sldId id="287" r:id="rId7"/>
     <p:sldId id="258" r:id="rId8"/>
-    <p:sldId id="260" r:id="rId9"/>
-    <p:sldId id="271" r:id="rId10"/>
-    <p:sldId id="270" r:id="rId11"/>
-    <p:sldId id="272" r:id="rId12"/>
-    <p:sldId id="276" r:id="rId13"/>
-    <p:sldId id="282" r:id="rId14"/>
-    <p:sldId id="283" r:id="rId15"/>
-    <p:sldId id="275" r:id="rId16"/>
-    <p:sldId id="285" r:id="rId17"/>
-    <p:sldId id="284" r:id="rId18"/>
-    <p:sldId id="286" r:id="rId19"/>
-    <p:sldId id="281" r:id="rId20"/>
-    <p:sldId id="277" r:id="rId21"/>
+    <p:sldId id="271" r:id="rId9"/>
+    <p:sldId id="270" r:id="rId10"/>
+    <p:sldId id="272" r:id="rId11"/>
+    <p:sldId id="276" r:id="rId12"/>
+    <p:sldId id="282" r:id="rId13"/>
+    <p:sldId id="283" r:id="rId14"/>
+    <p:sldId id="275" r:id="rId15"/>
+    <p:sldId id="285" r:id="rId16"/>
+    <p:sldId id="284" r:id="rId17"/>
+    <p:sldId id="286" r:id="rId18"/>
+    <p:sldId id="281" r:id="rId19"/>
+    <p:sldId id="277" r:id="rId20"/>
+    <p:sldId id="290" r:id="rId21"/>
+    <p:sldId id="291" r:id="rId22"/>
+    <p:sldId id="303" r:id="rId23"/>
+    <p:sldId id="305" r:id="rId24"/>
+    <p:sldId id="309" r:id="rId25"/>
   </p:sldIdLst>
   <p:sldSz cx="12192000" cy="6858000"/>
   <p:notesSz cx="6858000" cy="9144000"/>
@@ -216,7 +220,7 @@
           <a:p>
             <a:fld id="{09C84A49-CA76-E84D-B4CB-59BA5B0597A2}" type="datetimeFigureOut">
               <a:rPr lang="en-US" smtClean="0"/>
-              <a:t>9/1/26</a:t>
+              <a:t>9/29/26</a:t>
             </a:fld>
             <a:endParaRPr lang="en-US"/>
           </a:p>
@@ -548,7 +552,7 @@
           <a:p>
             <a:fld id="{F57EA08E-C47D-AB46-A93F-BAC6507A654E}" type="slidenum">
               <a:rPr lang="en-US" smtClean="0"/>
-              <a:t>4</a:t>
+              <a:t>5</a:t>
             </a:fld>
             <a:endParaRPr lang="en-US"/>
           </a:p>
@@ -629,6 +633,197 @@
           <a:bodyPr/>
           <a:lstStyle/>
           <a:p>
+            <a:pPr rtl="0"/>
+            <a:r>
+              <a:rPr lang="en-US" b="1" dirty="0"/>
+              <a:t>Reproducibility</a:t>
+            </a:r>
+            <a:br>
+              <a:rPr lang="en-US" dirty="0"/>
+            </a:br>
+            <a:r>
+              <a:rPr lang="en-US" dirty="0"/>
+              <a:t>Box: </a:t>
+            </a:r>
+            <a:r>
+              <a:rPr lang="en-US" i="1" dirty="0"/>
+              <a:t>Same inputs, same software, same results, every time you run it.</a:t>
+            </a:r>
+            <a:br>
+              <a:rPr lang="en-US" dirty="0"/>
+            </a:br>
+            <a:r>
+              <a:rPr lang="en-US" dirty="0"/>
+              <a:t>Speaker note: Pinned tool versions in containers (Day 2 §4) mean you and a colleague get identical results months apart.</a:t>
+            </a:r>
+          </a:p>
+          <a:p>
+            <a:pPr rtl="0"/>
+            <a:r>
+              <a:rPr lang="en-US" b="1" dirty="0"/>
+              <a:t>Resumability</a:t>
+            </a:r>
+            <a:br>
+              <a:rPr lang="en-US" dirty="0"/>
+            </a:br>
+            <a:r>
+              <a:rPr lang="en-US" dirty="0"/>
+              <a:t>Box: </a:t>
+            </a:r>
+            <a:r>
+              <a:rPr lang="en-US" i="1" dirty="0"/>
+              <a:t>If a step fails, fix it and pick up where you left off.</a:t>
+            </a:r>
+            <a:br>
+              <a:rPr lang="en-US" dirty="0"/>
+            </a:br>
+            <a:r>
+              <a:rPr lang="en-US" dirty="0"/>
+              <a:t>Speaker note: </a:t>
+            </a:r>
+            <a:r>
+              <a:rPr lang="en-US" dirty="0" err="1"/>
+              <a:t>Nextflow</a:t>
+            </a:r>
+            <a:r>
+              <a:rPr lang="en-US" dirty="0"/>
+              <a:t> caches finished tasks in </a:t>
+            </a:r>
+            <a:r>
+              <a:rPr lang="en-US" sz="1200" kern="1200" dirty="0">
+                <a:solidFill>
+                  <a:schemeClr val="tx1"/>
+                </a:solidFill>
+                <a:latin typeface="+mn-lt"/>
+                <a:ea typeface="+mn-ea"/>
+                <a:cs typeface="+mn-cs"/>
+              </a:rPr>
+              <a:t>work/</a:t>
+            </a:r>
+            <a:r>
+              <a:rPr lang="en-US" dirty="0"/>
+              <a:t>; </a:t>
+            </a:r>
+            <a:r>
+              <a:rPr lang="en-US" sz="1200" kern="1200" dirty="0">
+                <a:solidFill>
+                  <a:schemeClr val="tx1"/>
+                </a:solidFill>
+                <a:latin typeface="+mn-lt"/>
+                <a:ea typeface="+mn-ea"/>
+                <a:cs typeface="+mn-cs"/>
+              </a:rPr>
+              <a:t>-resume</a:t>
+            </a:r>
+            <a:r>
+              <a:rPr lang="en-US" dirty="0"/>
+              <a:t> reruns only what changed or failed.</a:t>
+            </a:r>
+          </a:p>
+          <a:p>
+            <a:pPr rtl="0"/>
+            <a:r>
+              <a:rPr lang="en-US" b="1" dirty="0"/>
+              <a:t>Scalability</a:t>
+            </a:r>
+            <a:br>
+              <a:rPr lang="en-US" dirty="0"/>
+            </a:br>
+            <a:r>
+              <a:rPr lang="en-US" dirty="0"/>
+              <a:t>Box: </a:t>
+            </a:r>
+            <a:r>
+              <a:rPr lang="en-US" i="1" dirty="0"/>
+              <a:t>One sample or one thousand: the pipeline code doesn't change.</a:t>
+            </a:r>
+            <a:br>
+              <a:rPr lang="en-US" dirty="0"/>
+            </a:br>
+            <a:r>
+              <a:rPr lang="en-US" dirty="0"/>
+              <a:t>Speaker note: Channels fan out work per sample automatically (Day 1), and the scheduler runs tasks in parallel.</a:t>
+            </a:r>
+          </a:p>
+          <a:p>
+            <a:pPr rtl="0"/>
+            <a:r>
+              <a:rPr lang="en-US" b="1" dirty="0"/>
+              <a:t>Portability</a:t>
+            </a:r>
+            <a:br>
+              <a:rPr lang="en-US" dirty="0"/>
+            </a:br>
+            <a:r>
+              <a:rPr lang="en-US" dirty="0"/>
+              <a:t>Box: </a:t>
+            </a:r>
+            <a:r>
+              <a:rPr lang="en-US" i="1" dirty="0"/>
+              <a:t>Run on a laptop, HPC, or cloud by changing config, not code.</a:t>
+            </a:r>
+            <a:br>
+              <a:rPr lang="en-US" dirty="0"/>
+            </a:br>
+            <a:r>
+              <a:rPr lang="en-US" dirty="0"/>
+              <a:t>Speaker note: </a:t>
+            </a:r>
+            <a:r>
+              <a:rPr lang="en-US" sz="1200" kern="1200" dirty="0">
+                <a:solidFill>
+                  <a:schemeClr val="tx1"/>
+                </a:solidFill>
+                <a:latin typeface="+mn-lt"/>
+                <a:ea typeface="+mn-ea"/>
+                <a:cs typeface="+mn-cs"/>
+              </a:rPr>
+              <a:t>-profile local</a:t>
+            </a:r>
+            <a:r>
+              <a:rPr lang="en-US" dirty="0"/>
+              <a:t> vs. </a:t>
+            </a:r>
+            <a:r>
+              <a:rPr lang="en-US" sz="1200" kern="1200" dirty="0">
+                <a:solidFill>
+                  <a:schemeClr val="tx1"/>
+                </a:solidFill>
+                <a:latin typeface="+mn-lt"/>
+                <a:ea typeface="+mn-ea"/>
+                <a:cs typeface="+mn-cs"/>
+              </a:rPr>
+              <a:t>-profile hazel</a:t>
+            </a:r>
+            <a:r>
+              <a:rPr lang="en-US" dirty="0"/>
+              <a:t> (Day 2), where the same </a:t>
+            </a:r>
+            <a:r>
+              <a:rPr lang="en-US" sz="1200" kern="1200" dirty="0" err="1">
+                <a:solidFill>
+                  <a:schemeClr val="tx1"/>
+                </a:solidFill>
+                <a:latin typeface="+mn-lt"/>
+                <a:ea typeface="+mn-ea"/>
+                <a:cs typeface="+mn-cs"/>
+              </a:rPr>
+              <a:t>main.nf</a:t>
+            </a:r>
+            <a:r>
+              <a:rPr lang="en-US" dirty="0"/>
+              <a:t> switches from your machine to SLURM + </a:t>
+            </a:r>
+            <a:r>
+              <a:rPr lang="en-US" dirty="0" err="1"/>
+              <a:t>Apptainer</a:t>
+            </a:r>
+            <a:r>
+              <a:rPr lang="en-US" dirty="0"/>
+              <a:t>.</a:t>
+            </a:r>
+          </a:p>
+          <a:p>
             <a:endParaRPr lang="en-US" dirty="0"/>
           </a:p>
         </p:txBody>
@@ -656,7 +851,7 @@
           <a:p>
             <a:fld id="{F57EA08E-C47D-AB46-A93F-BAC6507A654E}" type="slidenum">
               <a:rPr lang="en-US" smtClean="0"/>
-              <a:t>5</a:t>
+              <a:t>6</a:t>
             </a:fld>
             <a:endParaRPr lang="en-US"/>
           </a:p>
@@ -666,6 +861,515 @@
     <p:extLst>
       <p:ext uri="{BB962C8B-B14F-4D97-AF65-F5344CB8AC3E}">
         <p14:creationId xmlns:p14="http://schemas.microsoft.com/office/powerpoint/2010/main" val="2793444167"/>
+      </p:ext>
+    </p:extLst>
+  </p:cSld>
+  <p:clrMapOvr>
+    <a:masterClrMapping/>
+  </p:clrMapOvr>
+</p:notes>
+</file>
+
+<file path=ppt/notesSlides/notesSlide3.xml><?xml version="1.0" encoding="utf-8"?>
+<p:notes xmlns:a="http://schemas.openxmlformats.org/drawingml/2006/main" xmlns:r="http://schemas.openxmlformats.org/officeDocument/2006/relationships" xmlns:p="http://schemas.openxmlformats.org/presentationml/2006/main">
+  <p:cSld>
+    <p:spTree>
+      <p:nvGrpSpPr>
+        <p:cNvPr id="1" name=""/>
+        <p:cNvGrpSpPr/>
+        <p:nvPr/>
+      </p:nvGrpSpPr>
+      <p:grpSpPr>
+        <a:xfrm>
+          <a:off x="0" y="0"/>
+          <a:ext cx="0" cy="0"/>
+          <a:chOff x="0" y="0"/>
+          <a:chExt cx="0" cy="0"/>
+        </a:xfrm>
+      </p:grpSpPr>
+      <p:sp>
+        <p:nvSpPr>
+          <p:cNvPr id="2" name="Slide Image Placeholder 1"/>
+          <p:cNvSpPr>
+            <a:spLocks noGrp="1" noRot="1" noChangeAspect="1"/>
+          </p:cNvSpPr>
+          <p:nvPr>
+            <p:ph type="sldImg"/>
+          </p:nvPr>
+        </p:nvSpPr>
+        <p:spPr/>
+      </p:sp>
+      <p:sp>
+        <p:nvSpPr>
+          <p:cNvPr id="3" name="Notes Placeholder 2"/>
+          <p:cNvSpPr>
+            <a:spLocks noGrp="1"/>
+          </p:cNvSpPr>
+          <p:nvPr>
+            <p:ph type="body" idx="1"/>
+          </p:nvPr>
+        </p:nvSpPr>
+        <p:spPr/>
+        <p:txBody>
+          <a:bodyPr/>
+          <a:lstStyle/>
+          <a:p>
+            <a:r>
+              <a:rPr lang="en-US" dirty="0"/>
+              <a:t>Each point maps to a part of the workshop. Bash in processes (Day 1 process anatomy), channels (Day 1), executors and containers (Day 2), and </a:t>
+            </a:r>
+            <a:r>
+              <a:rPr lang="en-US" dirty="0" err="1"/>
+              <a:t>nf</a:t>
+            </a:r>
+            <a:r>
+              <a:rPr lang="en-US" dirty="0"/>
+              <a:t>-core is where students go after the course.</a:t>
+            </a:r>
+          </a:p>
+          <a:p>
+            <a:endParaRPr lang="en-US" dirty="0"/>
+          </a:p>
+          <a:p>
+            <a:endParaRPr lang="en-US" dirty="0"/>
+          </a:p>
+        </p:txBody>
+      </p:sp>
+      <p:sp>
+        <p:nvSpPr>
+          <p:cNvPr id="4" name="Slide Number Placeholder 3"/>
+          <p:cNvSpPr>
+            <a:spLocks noGrp="1"/>
+          </p:cNvSpPr>
+          <p:nvPr>
+            <p:ph type="sldNum" sz="quarter" idx="5"/>
+          </p:nvPr>
+        </p:nvSpPr>
+        <p:spPr/>
+        <p:txBody>
+          <a:bodyPr/>
+          <a:lstStyle/>
+          <a:p>
+            <a:fld id="{F57EA08E-C47D-AB46-A93F-BAC6507A654E}" type="slidenum">
+              <a:rPr lang="en-US" smtClean="0"/>
+              <a:t>7</a:t>
+            </a:fld>
+            <a:endParaRPr lang="en-US"/>
+          </a:p>
+        </p:txBody>
+      </p:sp>
+    </p:spTree>
+    <p:extLst>
+      <p:ext uri="{BB962C8B-B14F-4D97-AF65-F5344CB8AC3E}">
+        <p14:creationId xmlns:p14="http://schemas.microsoft.com/office/powerpoint/2010/main" val="1576896395"/>
+      </p:ext>
+    </p:extLst>
+  </p:cSld>
+  <p:clrMapOvr>
+    <a:masterClrMapping/>
+  </p:clrMapOvr>
+</p:notes>
+</file>
+
+<file path=ppt/notesSlides/notesSlide4.xml><?xml version="1.0" encoding="utf-8"?>
+<p:notes xmlns:a="http://schemas.openxmlformats.org/drawingml/2006/main" xmlns:r="http://schemas.openxmlformats.org/officeDocument/2006/relationships" xmlns:p="http://schemas.openxmlformats.org/presentationml/2006/main">
+  <p:cSld>
+    <p:spTree>
+      <p:nvGrpSpPr>
+        <p:cNvPr id="1" name=""/>
+        <p:cNvGrpSpPr/>
+        <p:nvPr/>
+      </p:nvGrpSpPr>
+      <p:grpSpPr>
+        <a:xfrm>
+          <a:off x="0" y="0"/>
+          <a:ext cx="0" cy="0"/>
+          <a:chOff x="0" y="0"/>
+          <a:chExt cx="0" cy="0"/>
+        </a:xfrm>
+      </p:grpSpPr>
+      <p:sp>
+        <p:nvSpPr>
+          <p:cNvPr id="2" name="Slide Image Placeholder 1"/>
+          <p:cNvSpPr>
+            <a:spLocks noGrp="1" noRot="1" noChangeAspect="1"/>
+          </p:cNvSpPr>
+          <p:nvPr>
+            <p:ph type="sldImg"/>
+          </p:nvPr>
+        </p:nvSpPr>
+        <p:spPr/>
+      </p:sp>
+      <p:sp>
+        <p:nvSpPr>
+          <p:cNvPr id="3" name="Notes Placeholder 2"/>
+          <p:cNvSpPr>
+            <a:spLocks noGrp="1"/>
+          </p:cNvSpPr>
+          <p:nvPr>
+            <p:ph type="body" idx="1"/>
+          </p:nvPr>
+        </p:nvSpPr>
+        <p:spPr/>
+        <p:txBody>
+          <a:bodyPr/>
+          <a:lstStyle/>
+          <a:p>
+            <a:endParaRPr lang="en-US" dirty="0"/>
+          </a:p>
+        </p:txBody>
+      </p:sp>
+      <p:sp>
+        <p:nvSpPr>
+          <p:cNvPr id="4" name="Slide Number Placeholder 3"/>
+          <p:cNvSpPr>
+            <a:spLocks noGrp="1"/>
+          </p:cNvSpPr>
+          <p:nvPr>
+            <p:ph type="sldNum" sz="quarter" idx="5"/>
+          </p:nvPr>
+        </p:nvSpPr>
+        <p:spPr/>
+        <p:txBody>
+          <a:bodyPr/>
+          <a:lstStyle/>
+          <a:p>
+            <a:fld id="{02ECDC5F-13D1-1842-B2D4-75E829F601D1}" type="slidenum">
+              <a:rPr lang="en-US" smtClean="0"/>
+              <a:t>21</a:t>
+            </a:fld>
+            <a:endParaRPr lang="en-US"/>
+          </a:p>
+        </p:txBody>
+      </p:sp>
+    </p:spTree>
+    <p:extLst>
+      <p:ext uri="{BB962C8B-B14F-4D97-AF65-F5344CB8AC3E}">
+        <p14:creationId xmlns:p14="http://schemas.microsoft.com/office/powerpoint/2010/main" val="2244543178"/>
+      </p:ext>
+    </p:extLst>
+  </p:cSld>
+  <p:clrMapOvr>
+    <a:masterClrMapping/>
+  </p:clrMapOvr>
+</p:notes>
+</file>
+
+<file path=ppt/notesSlides/notesSlide5.xml><?xml version="1.0" encoding="utf-8"?>
+<p:notes xmlns:a="http://schemas.openxmlformats.org/drawingml/2006/main" xmlns:r="http://schemas.openxmlformats.org/officeDocument/2006/relationships" xmlns:p="http://schemas.openxmlformats.org/presentationml/2006/main">
+  <p:cSld>
+    <p:spTree>
+      <p:nvGrpSpPr>
+        <p:cNvPr id="1" name="">
+          <a:extLst>
+            <a:ext uri="{FF2B5EF4-FFF2-40B4-BE49-F238E27FC236}">
+              <a16:creationId xmlns:a16="http://schemas.microsoft.com/office/drawing/2014/main" id="{A83635D4-F734-C573-2A24-CD94C09A3302}"/>
+            </a:ext>
+          </a:extLst>
+        </p:cNvPr>
+        <p:cNvGrpSpPr/>
+        <p:nvPr/>
+      </p:nvGrpSpPr>
+      <p:grpSpPr>
+        <a:xfrm>
+          <a:off x="0" y="0"/>
+          <a:ext cx="0" cy="0"/>
+          <a:chOff x="0" y="0"/>
+          <a:chExt cx="0" cy="0"/>
+        </a:xfrm>
+      </p:grpSpPr>
+      <p:sp>
+        <p:nvSpPr>
+          <p:cNvPr id="2" name="Slide Image Placeholder 1">
+            <a:extLst>
+              <a:ext uri="{FF2B5EF4-FFF2-40B4-BE49-F238E27FC236}">
+                <a16:creationId xmlns:a16="http://schemas.microsoft.com/office/drawing/2014/main" id="{4BEB2439-E69F-F5C4-9126-5E66298AF71A}"/>
+              </a:ext>
+            </a:extLst>
+          </p:cNvPr>
+          <p:cNvSpPr>
+            <a:spLocks noGrp="1" noRot="1" noChangeAspect="1"/>
+          </p:cNvSpPr>
+          <p:nvPr>
+            <p:ph type="sldImg"/>
+          </p:nvPr>
+        </p:nvSpPr>
+        <p:spPr/>
+      </p:sp>
+      <p:sp>
+        <p:nvSpPr>
+          <p:cNvPr id="3" name="Notes Placeholder 2">
+            <a:extLst>
+              <a:ext uri="{FF2B5EF4-FFF2-40B4-BE49-F238E27FC236}">
+                <a16:creationId xmlns:a16="http://schemas.microsoft.com/office/drawing/2014/main" id="{9968540D-111F-DAA4-E2E6-7A34FFD2A028}"/>
+              </a:ext>
+            </a:extLst>
+          </p:cNvPr>
+          <p:cNvSpPr>
+            <a:spLocks noGrp="1"/>
+          </p:cNvSpPr>
+          <p:nvPr>
+            <p:ph type="body" idx="1"/>
+          </p:nvPr>
+        </p:nvSpPr>
+        <p:spPr/>
+        <p:txBody>
+          <a:bodyPr/>
+          <a:lstStyle/>
+          <a:p>
+            <a:endParaRPr lang="en-US" dirty="0"/>
+          </a:p>
+        </p:txBody>
+      </p:sp>
+      <p:sp>
+        <p:nvSpPr>
+          <p:cNvPr id="4" name="Slide Number Placeholder 3">
+            <a:extLst>
+              <a:ext uri="{FF2B5EF4-FFF2-40B4-BE49-F238E27FC236}">
+                <a16:creationId xmlns:a16="http://schemas.microsoft.com/office/drawing/2014/main" id="{F45614E0-5C3B-5B0E-C407-AC2A8145148C}"/>
+              </a:ext>
+            </a:extLst>
+          </p:cNvPr>
+          <p:cNvSpPr>
+            <a:spLocks noGrp="1"/>
+          </p:cNvSpPr>
+          <p:nvPr>
+            <p:ph type="sldNum" sz="quarter" idx="5"/>
+          </p:nvPr>
+        </p:nvSpPr>
+        <p:spPr/>
+        <p:txBody>
+          <a:bodyPr/>
+          <a:lstStyle/>
+          <a:p>
+            <a:fld id="{13FC26C8-C37B-D543-9AB9-4FE91B5DFE38}" type="slidenum">
+              <a:rPr lang="en-US" smtClean="0"/>
+              <a:t>22</a:t>
+            </a:fld>
+            <a:endParaRPr lang="en-US"/>
+          </a:p>
+        </p:txBody>
+      </p:sp>
+    </p:spTree>
+    <p:extLst>
+      <p:ext uri="{BB962C8B-B14F-4D97-AF65-F5344CB8AC3E}">
+        <p14:creationId xmlns:p14="http://schemas.microsoft.com/office/powerpoint/2010/main" val="2795224797"/>
+      </p:ext>
+    </p:extLst>
+  </p:cSld>
+  <p:clrMapOvr>
+    <a:masterClrMapping/>
+  </p:clrMapOvr>
+</p:notes>
+</file>
+
+<file path=ppt/notesSlides/notesSlide6.xml><?xml version="1.0" encoding="utf-8"?>
+<p:notes xmlns:a="http://schemas.openxmlformats.org/drawingml/2006/main" xmlns:r="http://schemas.openxmlformats.org/officeDocument/2006/relationships" xmlns:p="http://schemas.openxmlformats.org/presentationml/2006/main">
+  <p:cSld>
+    <p:spTree>
+      <p:nvGrpSpPr>
+        <p:cNvPr id="1" name="">
+          <a:extLst>
+            <a:ext uri="{FF2B5EF4-FFF2-40B4-BE49-F238E27FC236}">
+              <a16:creationId xmlns:a16="http://schemas.microsoft.com/office/drawing/2014/main" id="{AA0FCC0C-E0D9-F3F0-5FAB-084E6BCE815F}"/>
+            </a:ext>
+          </a:extLst>
+        </p:cNvPr>
+        <p:cNvGrpSpPr/>
+        <p:nvPr/>
+      </p:nvGrpSpPr>
+      <p:grpSpPr>
+        <a:xfrm>
+          <a:off x="0" y="0"/>
+          <a:ext cx="0" cy="0"/>
+          <a:chOff x="0" y="0"/>
+          <a:chExt cx="0" cy="0"/>
+        </a:xfrm>
+      </p:grpSpPr>
+      <p:sp>
+        <p:nvSpPr>
+          <p:cNvPr id="2" name="Slide Image Placeholder 1">
+            <a:extLst>
+              <a:ext uri="{FF2B5EF4-FFF2-40B4-BE49-F238E27FC236}">
+                <a16:creationId xmlns:a16="http://schemas.microsoft.com/office/drawing/2014/main" id="{8DBC3E39-CBCB-34D5-5F6B-BCAA79058238}"/>
+              </a:ext>
+            </a:extLst>
+          </p:cNvPr>
+          <p:cNvSpPr>
+            <a:spLocks noGrp="1" noRot="1" noChangeAspect="1"/>
+          </p:cNvSpPr>
+          <p:nvPr>
+            <p:ph type="sldImg"/>
+          </p:nvPr>
+        </p:nvSpPr>
+        <p:spPr/>
+      </p:sp>
+      <p:sp>
+        <p:nvSpPr>
+          <p:cNvPr id="3" name="Notes Placeholder 2">
+            <a:extLst>
+              <a:ext uri="{FF2B5EF4-FFF2-40B4-BE49-F238E27FC236}">
+                <a16:creationId xmlns:a16="http://schemas.microsoft.com/office/drawing/2014/main" id="{934E61E1-4FFC-B3AC-A1C3-A0B772F4EEAE}"/>
+              </a:ext>
+            </a:extLst>
+          </p:cNvPr>
+          <p:cNvSpPr>
+            <a:spLocks noGrp="1"/>
+          </p:cNvSpPr>
+          <p:nvPr>
+            <p:ph type="body" idx="1"/>
+          </p:nvPr>
+        </p:nvSpPr>
+        <p:spPr/>
+        <p:txBody>
+          <a:bodyPr/>
+          <a:lstStyle/>
+          <a:p>
+            <a:endParaRPr lang="en-US" dirty="0"/>
+          </a:p>
+        </p:txBody>
+      </p:sp>
+      <p:sp>
+        <p:nvSpPr>
+          <p:cNvPr id="4" name="Slide Number Placeholder 3">
+            <a:extLst>
+              <a:ext uri="{FF2B5EF4-FFF2-40B4-BE49-F238E27FC236}">
+                <a16:creationId xmlns:a16="http://schemas.microsoft.com/office/drawing/2014/main" id="{6FDA5970-D072-FD1F-21FF-0BD6BF068E3F}"/>
+              </a:ext>
+            </a:extLst>
+          </p:cNvPr>
+          <p:cNvSpPr>
+            <a:spLocks noGrp="1"/>
+          </p:cNvSpPr>
+          <p:nvPr>
+            <p:ph type="sldNum" sz="quarter" idx="5"/>
+          </p:nvPr>
+        </p:nvSpPr>
+        <p:spPr/>
+        <p:txBody>
+          <a:bodyPr/>
+          <a:lstStyle/>
+          <a:p>
+            <a:fld id="{13FC26C8-C37B-D543-9AB9-4FE91B5DFE38}" type="slidenum">
+              <a:rPr lang="en-US" smtClean="0"/>
+              <a:t>23</a:t>
+            </a:fld>
+            <a:endParaRPr lang="en-US"/>
+          </a:p>
+        </p:txBody>
+      </p:sp>
+    </p:spTree>
+    <p:extLst>
+      <p:ext uri="{BB962C8B-B14F-4D97-AF65-F5344CB8AC3E}">
+        <p14:creationId xmlns:p14="http://schemas.microsoft.com/office/powerpoint/2010/main" val="475396866"/>
+      </p:ext>
+    </p:extLst>
+  </p:cSld>
+  <p:clrMapOvr>
+    <a:masterClrMapping/>
+  </p:clrMapOvr>
+</p:notes>
+</file>
+
+<file path=ppt/notesSlides/notesSlide7.xml><?xml version="1.0" encoding="utf-8"?>
+<p:notes xmlns:a="http://schemas.openxmlformats.org/drawingml/2006/main" xmlns:r="http://schemas.openxmlformats.org/officeDocument/2006/relationships" xmlns:p="http://schemas.openxmlformats.org/presentationml/2006/main">
+  <p:cSld>
+    <p:spTree>
+      <p:nvGrpSpPr>
+        <p:cNvPr id="1" name="">
+          <a:extLst>
+            <a:ext uri="{FF2B5EF4-FFF2-40B4-BE49-F238E27FC236}">
+              <a16:creationId xmlns:a16="http://schemas.microsoft.com/office/drawing/2014/main" id="{3BA24F4C-2561-D993-E2AF-6C2F448C3767}"/>
+            </a:ext>
+          </a:extLst>
+        </p:cNvPr>
+        <p:cNvGrpSpPr/>
+        <p:nvPr/>
+      </p:nvGrpSpPr>
+      <p:grpSpPr>
+        <a:xfrm>
+          <a:off x="0" y="0"/>
+          <a:ext cx="0" cy="0"/>
+          <a:chOff x="0" y="0"/>
+          <a:chExt cx="0" cy="0"/>
+        </a:xfrm>
+      </p:grpSpPr>
+      <p:sp>
+        <p:nvSpPr>
+          <p:cNvPr id="2" name="Slide Image Placeholder 1">
+            <a:extLst>
+              <a:ext uri="{FF2B5EF4-FFF2-40B4-BE49-F238E27FC236}">
+                <a16:creationId xmlns:a16="http://schemas.microsoft.com/office/drawing/2014/main" id="{C0158F02-F0A9-5C7F-59D3-45CF137DF28C}"/>
+              </a:ext>
+            </a:extLst>
+          </p:cNvPr>
+          <p:cNvSpPr>
+            <a:spLocks noGrp="1" noRot="1" noChangeAspect="1"/>
+          </p:cNvSpPr>
+          <p:nvPr>
+            <p:ph type="sldImg"/>
+          </p:nvPr>
+        </p:nvSpPr>
+        <p:spPr/>
+      </p:sp>
+      <p:sp>
+        <p:nvSpPr>
+          <p:cNvPr id="3" name="Notes Placeholder 2">
+            <a:extLst>
+              <a:ext uri="{FF2B5EF4-FFF2-40B4-BE49-F238E27FC236}">
+                <a16:creationId xmlns:a16="http://schemas.microsoft.com/office/drawing/2014/main" id="{88A752F2-053D-BAF3-4747-65889D1D8A5B}"/>
+              </a:ext>
+            </a:extLst>
+          </p:cNvPr>
+          <p:cNvSpPr>
+            <a:spLocks noGrp="1"/>
+          </p:cNvSpPr>
+          <p:nvPr>
+            <p:ph type="body" idx="1"/>
+          </p:nvPr>
+        </p:nvSpPr>
+        <p:spPr/>
+        <p:txBody>
+          <a:bodyPr/>
+          <a:lstStyle/>
+          <a:p>
+            <a:endParaRPr lang="en-US" dirty="0"/>
+          </a:p>
+        </p:txBody>
+      </p:sp>
+      <p:sp>
+        <p:nvSpPr>
+          <p:cNvPr id="4" name="Slide Number Placeholder 3">
+            <a:extLst>
+              <a:ext uri="{FF2B5EF4-FFF2-40B4-BE49-F238E27FC236}">
+                <a16:creationId xmlns:a16="http://schemas.microsoft.com/office/drawing/2014/main" id="{5C6C9165-5886-2A22-7869-3C7F2BB53B87}"/>
+              </a:ext>
+            </a:extLst>
+          </p:cNvPr>
+          <p:cNvSpPr>
+            <a:spLocks noGrp="1"/>
+          </p:cNvSpPr>
+          <p:nvPr>
+            <p:ph type="sldNum" sz="quarter" idx="5"/>
+          </p:nvPr>
+        </p:nvSpPr>
+        <p:spPr/>
+        <p:txBody>
+          <a:bodyPr/>
+          <a:lstStyle/>
+          <a:p>
+            <a:fld id="{13FC26C8-C37B-D543-9AB9-4FE91B5DFE38}" type="slidenum">
+              <a:rPr lang="en-US" smtClean="0"/>
+              <a:t>24</a:t>
+            </a:fld>
+            <a:endParaRPr lang="en-US"/>
+          </a:p>
+        </p:txBody>
+      </p:sp>
+    </p:spTree>
+    <p:extLst>
+      <p:ext uri="{BB962C8B-B14F-4D97-AF65-F5344CB8AC3E}">
+        <p14:creationId xmlns:p14="http://schemas.microsoft.com/office/powerpoint/2010/main" val="2129920553"/>
       </p:ext>
     </p:extLst>
   </p:cSld>
@@ -822,7 +1526,7 @@
           <a:p>
             <a:fld id="{EC483935-07C3-DB40-BDCF-E55515B19C93}" type="datetimeFigureOut">
               <a:rPr lang="en-US" smtClean="0"/>
-              <a:t>9/1/26</a:t>
+              <a:t>9/29/26</a:t>
             </a:fld>
             <a:endParaRPr lang="en-US"/>
           </a:p>
@@ -1020,7 +1724,7 @@
           <a:p>
             <a:fld id="{EC483935-07C3-DB40-BDCF-E55515B19C93}" type="datetimeFigureOut">
               <a:rPr lang="en-US" smtClean="0"/>
-              <a:t>9/1/26</a:t>
+              <a:t>9/29/26</a:t>
             </a:fld>
             <a:endParaRPr lang="en-US"/>
           </a:p>
@@ -1228,7 +1932,7 @@
           <a:p>
             <a:fld id="{EC483935-07C3-DB40-BDCF-E55515B19C93}" type="datetimeFigureOut">
               <a:rPr lang="en-US" smtClean="0"/>
-              <a:t>9/1/26</a:t>
+              <a:t>9/29/26</a:t>
             </a:fld>
             <a:endParaRPr lang="en-US"/>
           </a:p>
@@ -1426,7 +2130,7 @@
           <a:p>
             <a:fld id="{EC483935-07C3-DB40-BDCF-E55515B19C93}" type="datetimeFigureOut">
               <a:rPr lang="en-US" smtClean="0"/>
-              <a:t>9/1/26</a:t>
+              <a:t>9/29/26</a:t>
             </a:fld>
             <a:endParaRPr lang="en-US"/>
           </a:p>
@@ -1701,7 +2405,7 @@
           <a:p>
             <a:fld id="{EC483935-07C3-DB40-BDCF-E55515B19C93}" type="datetimeFigureOut">
               <a:rPr lang="en-US" smtClean="0"/>
-              <a:t>9/1/26</a:t>
+              <a:t>9/29/26</a:t>
             </a:fld>
             <a:endParaRPr lang="en-US"/>
           </a:p>
@@ -1966,7 +2670,7 @@
           <a:p>
             <a:fld id="{EC483935-07C3-DB40-BDCF-E55515B19C93}" type="datetimeFigureOut">
               <a:rPr lang="en-US" smtClean="0"/>
-              <a:t>9/1/26</a:t>
+              <a:t>9/29/26</a:t>
             </a:fld>
             <a:endParaRPr lang="en-US"/>
           </a:p>
@@ -2378,7 +3082,7 @@
           <a:p>
             <a:fld id="{EC483935-07C3-DB40-BDCF-E55515B19C93}" type="datetimeFigureOut">
               <a:rPr lang="en-US" smtClean="0"/>
-              <a:t>9/1/26</a:t>
+              <a:t>9/29/26</a:t>
             </a:fld>
             <a:endParaRPr lang="en-US"/>
           </a:p>
@@ -2519,7 +3223,7 @@
           <a:p>
             <a:fld id="{EC483935-07C3-DB40-BDCF-E55515B19C93}" type="datetimeFigureOut">
               <a:rPr lang="en-US" smtClean="0"/>
-              <a:t>9/1/26</a:t>
+              <a:t>9/29/26</a:t>
             </a:fld>
             <a:endParaRPr lang="en-US"/>
           </a:p>
@@ -2632,7 +3336,7 @@
           <a:p>
             <a:fld id="{EC483935-07C3-DB40-BDCF-E55515B19C93}" type="datetimeFigureOut">
               <a:rPr lang="en-US" smtClean="0"/>
-              <a:t>9/1/26</a:t>
+              <a:t>9/29/26</a:t>
             </a:fld>
             <a:endParaRPr lang="en-US"/>
           </a:p>
@@ -2943,7 +3647,7 @@
           <a:p>
             <a:fld id="{EC483935-07C3-DB40-BDCF-E55515B19C93}" type="datetimeFigureOut">
               <a:rPr lang="en-US" smtClean="0"/>
-              <a:t>9/1/26</a:t>
+              <a:t>9/29/26</a:t>
             </a:fld>
             <a:endParaRPr lang="en-US"/>
           </a:p>
@@ -3231,7 +3935,7 @@
           <a:p>
             <a:fld id="{EC483935-07C3-DB40-BDCF-E55515B19C93}" type="datetimeFigureOut">
               <a:rPr lang="en-US" smtClean="0"/>
-              <a:t>9/1/26</a:t>
+              <a:t>9/29/26</a:t>
             </a:fld>
             <a:endParaRPr lang="en-US"/>
           </a:p>
@@ -3472,7 +4176,7 @@
           <a:p>
             <a:fld id="{EC483935-07C3-DB40-BDCF-E55515B19C93}" type="datetimeFigureOut">
               <a:rPr lang="en-US" smtClean="0"/>
-              <a:t>9/1/26</a:t>
+              <a:t>9/29/26</a:t>
             </a:fld>
             <a:endParaRPr lang="en-US"/>
           </a:p>
@@ -3904,7 +4608,7 @@
         <p:spPr>
           <a:xfrm>
             <a:off x="1497795" y="1862666"/>
-            <a:ext cx="5704575" cy="4524315"/>
+            <a:ext cx="5363135" cy="4524315"/>
           </a:xfrm>
           <a:prstGeom prst="rect">
             <a:avLst/>
@@ -3943,7 +4647,7 @@
               <a:rPr lang="en-US" sz="9600" dirty="0">
                 <a:latin typeface="Helvetica" pitchFamily="2" charset="0"/>
               </a:rPr>
-              <a:t>Workshop</a:t>
+              <a:t>Weekend</a:t>
             </a:r>
           </a:p>
         </p:txBody>
@@ -3999,229 +4703,6 @@
         <p:cNvPr id="1" name="">
           <a:extLst>
             <a:ext uri="{FF2B5EF4-FFF2-40B4-BE49-F238E27FC236}">
-              <a16:creationId xmlns:a16="http://schemas.microsoft.com/office/drawing/2014/main" id="{D1DE9E7D-34D7-E69A-60E0-2A1A2E83AC4E}"/>
-            </a:ext>
-          </a:extLst>
-        </p:cNvPr>
-        <p:cNvGrpSpPr/>
-        <p:nvPr/>
-      </p:nvGrpSpPr>
-      <p:grpSpPr>
-        <a:xfrm>
-          <a:off x="0" y="0"/>
-          <a:ext cx="0" cy="0"/>
-          <a:chOff x="0" y="0"/>
-          <a:chExt cx="0" cy="0"/>
-        </a:xfrm>
-      </p:grpSpPr>
-      <p:sp>
-        <p:nvSpPr>
-          <p:cNvPr id="2" name="Title 1">
-            <a:extLst>
-              <a:ext uri="{FF2B5EF4-FFF2-40B4-BE49-F238E27FC236}">
-                <a16:creationId xmlns:a16="http://schemas.microsoft.com/office/drawing/2014/main" id="{0C97E257-5254-58A5-D134-275D22ABB3ED}"/>
-              </a:ext>
-            </a:extLst>
-          </p:cNvPr>
-          <p:cNvSpPr>
-            <a:spLocks noGrp="1"/>
-          </p:cNvSpPr>
-          <p:nvPr>
-            <p:ph type="title"/>
-          </p:nvPr>
-        </p:nvSpPr>
-        <p:spPr/>
-        <p:txBody>
-          <a:bodyPr/>
-          <a:lstStyle/>
-          <a:p>
-            <a:r>
-              <a:rPr lang="en-US" dirty="0" err="1"/>
-              <a:t>Nextflow</a:t>
-            </a:r>
-            <a:r>
-              <a:rPr lang="en-US" dirty="0"/>
-              <a:t> components: </a:t>
-            </a:r>
-            <a:r>
-              <a:rPr lang="en-US" b="1" dirty="0"/>
-              <a:t>processes</a:t>
-            </a:r>
-          </a:p>
-        </p:txBody>
-      </p:sp>
-      <p:sp>
-        <p:nvSpPr>
-          <p:cNvPr id="3" name="Content Placeholder 2">
-            <a:extLst>
-              <a:ext uri="{FF2B5EF4-FFF2-40B4-BE49-F238E27FC236}">
-                <a16:creationId xmlns:a16="http://schemas.microsoft.com/office/drawing/2014/main" id="{1CC895E0-3F1B-B147-6FFB-19BA5C8C1CD7}"/>
-              </a:ext>
-            </a:extLst>
-          </p:cNvPr>
-          <p:cNvSpPr>
-            <a:spLocks noGrp="1"/>
-          </p:cNvSpPr>
-          <p:nvPr>
-            <p:ph idx="1"/>
-          </p:nvPr>
-        </p:nvSpPr>
-        <p:spPr/>
-        <p:txBody>
-          <a:bodyPr/>
-          <a:lstStyle/>
-          <a:p>
-            <a:pPr marL="0" indent="0">
-              <a:buNone/>
-            </a:pPr>
-            <a:r>
-              <a:rPr lang="en-US" b="1" dirty="0">
-                <a:solidFill>
-                  <a:schemeClr val="accent2"/>
-                </a:solidFill>
-              </a:rPr>
-              <a:t>Processes</a:t>
-            </a:r>
-            <a:r>
-              <a:rPr lang="en-US" dirty="0"/>
-              <a:t> are the basic computing units in </a:t>
-            </a:r>
-            <a:r>
-              <a:rPr lang="en-US" dirty="0" err="1"/>
-              <a:t>Nextflow</a:t>
-            </a:r>
-            <a:r>
-              <a:rPr lang="en-US" dirty="0"/>
-              <a:t>. Each process defines:</a:t>
-            </a:r>
-          </a:p>
-          <a:p>
-            <a:r>
-              <a:rPr lang="en-US" b="1" dirty="0"/>
-              <a:t>Inputs and outputs</a:t>
-            </a:r>
-            <a:r>
-              <a:rPr lang="en-US" dirty="0"/>
-              <a:t>: Data consumed and produced</a:t>
-            </a:r>
-          </a:p>
-          <a:p>
-            <a:r>
-              <a:rPr lang="en-US" b="1" dirty="0"/>
-              <a:t>Script</a:t>
-            </a:r>
-            <a:r>
-              <a:rPr lang="en-US" dirty="0"/>
-              <a:t>: The actual command or code to execute</a:t>
-            </a:r>
-          </a:p>
-          <a:p>
-            <a:r>
-              <a:rPr lang="en-US" b="1" dirty="0"/>
-              <a:t>Directives</a:t>
-            </a:r>
-            <a:r>
-              <a:rPr lang="en-US" dirty="0"/>
-              <a:t>: Resource requirements (CPU, memory, time)</a:t>
-            </a:r>
-          </a:p>
-          <a:p>
-            <a:pPr marL="0" indent="0">
-              <a:buNone/>
-            </a:pPr>
-            <a:endParaRPr lang="en-US" dirty="0"/>
-          </a:p>
-          <a:p>
-            <a:pPr marL="0" indent="0">
-              <a:buNone/>
-            </a:pPr>
-            <a:r>
-              <a:rPr lang="en-US" dirty="0"/>
-              <a:t>Think of a process as a single step in your pipeline, like "align reads" or ”run inference tool”. Processes are isolated (</a:t>
-            </a:r>
-            <a:r>
-              <a:rPr lang="en-US" b="1" dirty="0">
-                <a:solidFill>
-                  <a:schemeClr val="accent2"/>
-                </a:solidFill>
-              </a:rPr>
-              <a:t>modules</a:t>
-            </a:r>
-            <a:r>
-              <a:rPr lang="en-US" dirty="0"/>
-              <a:t>)and can be executed independently, enabling parallelization. </a:t>
-            </a:r>
-          </a:p>
-        </p:txBody>
-      </p:sp>
-      <p:pic>
-        <p:nvPicPr>
-          <p:cNvPr id="4098" name="Picture 2" descr="Manufacturing Factory Tool Icons - Free SVG &amp; PNG Manufacturing Factory Tool  Images - Noun Project">
-            <a:extLst>
-              <a:ext uri="{FF2B5EF4-FFF2-40B4-BE49-F238E27FC236}">
-                <a16:creationId xmlns:a16="http://schemas.microsoft.com/office/drawing/2014/main" id="{CF13FCC3-795D-264A-652A-5CE31D964342}"/>
-              </a:ext>
-            </a:extLst>
-          </p:cNvPr>
-          <p:cNvPicPr>
-            <a:picLocks noChangeAspect="1" noChangeArrowheads="1"/>
-          </p:cNvPicPr>
-          <p:nvPr/>
-        </p:nvPicPr>
-        <p:blipFill>
-          <a:blip r:embed="rId2">
-            <a:extLst>
-              <a:ext uri="{28A0092B-C50C-407E-A947-70E740481C1C}">
-                <a14:useLocalDpi xmlns:a14="http://schemas.microsoft.com/office/drawing/2010/main" val="0"/>
-              </a:ext>
-            </a:extLst>
-          </a:blip>
-          <a:srcRect/>
-          <a:stretch>
-            <a:fillRect/>
-          </a:stretch>
-        </p:blipFill>
-        <p:spPr bwMode="auto">
-          <a:xfrm>
-            <a:off x="9004461" y="585043"/>
-            <a:ext cx="834020" cy="834020"/>
-          </a:xfrm>
-          <a:prstGeom prst="rect">
-            <a:avLst/>
-          </a:prstGeom>
-          <a:noFill/>
-          <a:extLst>
-            <a:ext uri="{909E8E84-426E-40DD-AFC4-6F175D3DCCD1}">
-              <a14:hiddenFill xmlns:a14="http://schemas.microsoft.com/office/drawing/2010/main">
-                <a:solidFill>
-                  <a:srgbClr val="FFFFFF"/>
-                </a:solidFill>
-              </a14:hiddenFill>
-            </a:ext>
-          </a:extLst>
-        </p:spPr>
-      </p:pic>
-    </p:spTree>
-    <p:extLst>
-      <p:ext uri="{BB962C8B-B14F-4D97-AF65-F5344CB8AC3E}">
-        <p14:creationId xmlns:p14="http://schemas.microsoft.com/office/powerpoint/2010/main" val="3903298263"/>
-      </p:ext>
-    </p:extLst>
-  </p:cSld>
-  <p:clrMapOvr>
-    <a:masterClrMapping/>
-  </p:clrMapOvr>
-</p:sld>
-</file>
-
-<file path=ppt/slides/slide11.xml><?xml version="1.0" encoding="utf-8"?>
-<p:sld xmlns:a="http://schemas.openxmlformats.org/drawingml/2006/main" xmlns:r="http://schemas.openxmlformats.org/officeDocument/2006/relationships" xmlns:p="http://schemas.openxmlformats.org/presentationml/2006/main">
-  <p:cSld>
-    <p:spTree>
-      <p:nvGrpSpPr>
-        <p:cNvPr id="1" name="">
-          <a:extLst>
-            <a:ext uri="{FF2B5EF4-FFF2-40B4-BE49-F238E27FC236}">
               <a16:creationId xmlns:a16="http://schemas.microsoft.com/office/drawing/2014/main" id="{E3AD97CB-B8A2-C139-67D1-19D621A2F549}"/>
             </a:ext>
           </a:extLst>
@@ -5116,7 +5597,7 @@
 </p:sld>
 </file>
 
-<file path=ppt/slides/slide12.xml><?xml version="1.0" encoding="utf-8"?>
+<file path=ppt/slides/slide11.xml><?xml version="1.0" encoding="utf-8"?>
 <p:sld xmlns:a="http://schemas.openxmlformats.org/drawingml/2006/main" xmlns:r="http://schemas.openxmlformats.org/officeDocument/2006/relationships" xmlns:p="http://schemas.openxmlformats.org/presentationml/2006/main">
   <p:cSld>
     <p:spTree>
@@ -5319,7 +5800,7 @@
 </p:sld>
 </file>
 
-<file path=ppt/slides/slide13.xml><?xml version="1.0" encoding="utf-8"?>
+<file path=ppt/slides/slide12.xml><?xml version="1.0" encoding="utf-8"?>
 <p:sld xmlns:a="http://schemas.openxmlformats.org/drawingml/2006/main" xmlns:r="http://schemas.openxmlformats.org/officeDocument/2006/relationships" xmlns:p="http://schemas.openxmlformats.org/presentationml/2006/main">
   <p:cSld>
     <p:spTree>
@@ -5459,6 +5940,11 @@
           <a:prstGeom prst="rect">
             <a:avLst/>
           </a:prstGeom>
+          <a:solidFill>
+            <a:schemeClr val="bg1">
+              <a:lumMod val="75000"/>
+            </a:schemeClr>
+          </a:solidFill>
           <a:ln>
             <a:noFill/>
           </a:ln>
@@ -5512,6 +5998,11 @@
           <a:prstGeom prst="rect">
             <a:avLst/>
           </a:prstGeom>
+          <a:solidFill>
+            <a:schemeClr val="bg1">
+              <a:lumMod val="75000"/>
+            </a:schemeClr>
+          </a:solidFill>
           <a:ln>
             <a:noFill/>
           </a:ln>
@@ -5565,6 +6056,11 @@
           <a:prstGeom prst="rect">
             <a:avLst/>
           </a:prstGeom>
+          <a:solidFill>
+            <a:schemeClr val="bg1">
+              <a:lumMod val="75000"/>
+            </a:schemeClr>
+          </a:solidFill>
           <a:ln>
             <a:noFill/>
           </a:ln>
@@ -5852,9 +6348,8 @@
             <a:avLst/>
           </a:prstGeom>
           <a:solidFill>
-            <a:schemeClr val="accent2">
-              <a:lumMod val="60000"/>
-              <a:lumOff val="40000"/>
+            <a:schemeClr val="bg1">
+              <a:lumMod val="75000"/>
             </a:schemeClr>
           </a:solidFill>
           <a:ln>
@@ -5910,9 +6405,8 @@
             <a:avLst/>
           </a:prstGeom>
           <a:solidFill>
-            <a:schemeClr val="accent2">
-              <a:lumMod val="60000"/>
-              <a:lumOff val="40000"/>
+            <a:schemeClr val="bg1">
+              <a:lumMod val="75000"/>
             </a:schemeClr>
           </a:solidFill>
           <a:ln>
@@ -6314,7 +6808,7 @@
 </p:sld>
 </file>
 
-<file path=ppt/slides/slide14.xml><?xml version="1.0" encoding="utf-8"?>
+<file path=ppt/slides/slide13.xml><?xml version="1.0" encoding="utf-8"?>
 <p:sld xmlns:a="http://schemas.openxmlformats.org/drawingml/2006/main" xmlns:r="http://schemas.openxmlformats.org/officeDocument/2006/relationships" xmlns:p="http://schemas.openxmlformats.org/presentationml/2006/main">
   <p:cSld>
     <p:spTree>
@@ -6398,7 +6892,7 @@
         </p:blipFill>
         <p:spPr>
           <a:xfrm>
-            <a:off x="1238993" y="1690688"/>
+            <a:off x="2000578" y="2294930"/>
             <a:ext cx="914400" cy="914400"/>
           </a:xfrm>
           <a:prstGeom prst="rect">
@@ -6434,7 +6928,7 @@
         </p:blipFill>
         <p:spPr>
           <a:xfrm>
-            <a:off x="7503226" y="1912526"/>
+            <a:off x="7342597" y="2370367"/>
             <a:ext cx="914400" cy="914400"/>
           </a:xfrm>
           <a:prstGeom prst="rect">
@@ -6456,13 +6950,15 @@
         </p:nvSpPr>
         <p:spPr>
           <a:xfrm>
-            <a:off x="2327564" y="2185060"/>
+            <a:off x="2982271" y="2732278"/>
             <a:ext cx="1848135" cy="369332"/>
           </a:xfrm>
           <a:prstGeom prst="rect">
             <a:avLst/>
           </a:prstGeom>
-          <a:noFill/>
+          <a:solidFill>
+            <a:schemeClr val="accent4"/>
+          </a:solidFill>
         </p:spPr>
         <p:txBody>
           <a:bodyPr wrap="none" rtlCol="0">
@@ -6491,13 +6987,15 @@
         </p:nvSpPr>
         <p:spPr>
           <a:xfrm>
-            <a:off x="8484919" y="2208810"/>
+            <a:off x="8256997" y="2642901"/>
             <a:ext cx="1941301" cy="369332"/>
           </a:xfrm>
           <a:prstGeom prst="rect">
             <a:avLst/>
           </a:prstGeom>
-          <a:noFill/>
+          <a:solidFill>
+            <a:schemeClr val="accent4"/>
+          </a:solidFill>
         </p:spPr>
         <p:txBody>
           <a:bodyPr wrap="none" rtlCol="0">
@@ -6526,7 +7024,7 @@
         </p:nvSpPr>
         <p:spPr>
           <a:xfrm>
-            <a:off x="1056904" y="3236026"/>
+            <a:off x="2914978" y="3416537"/>
             <a:ext cx="1253035" cy="646331"/>
           </a:xfrm>
           <a:prstGeom prst="rect">
@@ -6573,7 +7071,7 @@
         </p:nvSpPr>
         <p:spPr>
           <a:xfrm>
-            <a:off x="1056904" y="3827260"/>
+            <a:off x="2914977" y="3803599"/>
             <a:ext cx="1602233" cy="646331"/>
           </a:xfrm>
           <a:prstGeom prst="rect">
@@ -6620,7 +7118,7 @@
         </p:nvSpPr>
         <p:spPr>
           <a:xfrm>
-            <a:off x="6964878" y="3562597"/>
+            <a:off x="8172204" y="3321857"/>
             <a:ext cx="811248" cy="646331"/>
           </a:xfrm>
           <a:prstGeom prst="rect">
@@ -6659,7 +7157,7 @@
         </p:nvSpPr>
         <p:spPr>
           <a:xfrm>
-            <a:off x="1056903" y="4567488"/>
+            <a:off x="2914977" y="4198126"/>
             <a:ext cx="3779561" cy="646331"/>
           </a:xfrm>
           <a:prstGeom prst="rect">
@@ -6698,7 +7196,7 @@
         </p:nvSpPr>
         <p:spPr>
           <a:xfrm>
-            <a:off x="6975907" y="3921157"/>
+            <a:off x="8183233" y="3680417"/>
             <a:ext cx="800219" cy="646331"/>
           </a:xfrm>
           <a:prstGeom prst="rect">
@@ -6737,7 +7235,7 @@
         </p:nvSpPr>
         <p:spPr>
           <a:xfrm>
-            <a:off x="6975907" y="4298268"/>
+            <a:off x="8172204" y="4060842"/>
             <a:ext cx="997068" cy="646331"/>
           </a:xfrm>
           <a:prstGeom prst="rect">
@@ -6776,7 +7274,7 @@
         </p:nvSpPr>
         <p:spPr>
           <a:xfrm>
-            <a:off x="7004692" y="4675379"/>
+            <a:off x="8183233" y="4441267"/>
             <a:ext cx="996235" cy="646331"/>
           </a:xfrm>
           <a:prstGeom prst="rect">
@@ -6814,7 +7312,7 @@
 </p:sld>
 </file>
 
-<file path=ppt/slides/slide15.xml><?xml version="1.0" encoding="utf-8"?>
+<file path=ppt/slides/slide14.xml><?xml version="1.0" encoding="utf-8"?>
 <p:sld xmlns:a="http://schemas.openxmlformats.org/drawingml/2006/main" xmlns:r="http://schemas.openxmlformats.org/officeDocument/2006/relationships" xmlns:p="http://schemas.openxmlformats.org/presentationml/2006/main">
   <p:cSld>
     <p:spTree>
@@ -7045,7 +7543,7 @@
 </p:sld>
 </file>
 
-<file path=ppt/slides/slide16.xml><?xml version="1.0" encoding="utf-8"?>
+<file path=ppt/slides/slide15.xml><?xml version="1.0" encoding="utf-8"?>
 <p:sld xmlns:a="http://schemas.openxmlformats.org/drawingml/2006/main" xmlns:r="http://schemas.openxmlformats.org/officeDocument/2006/relationships" xmlns:p="http://schemas.openxmlformats.org/presentationml/2006/main">
   <p:cSld>
     <p:spTree>
@@ -7070,6 +7568,64 @@
       </p:grpSpPr>
       <p:sp>
         <p:nvSpPr>
+          <p:cNvPr id="3" name="Rectangle 2">
+            <a:extLst>
+              <a:ext uri="{FF2B5EF4-FFF2-40B4-BE49-F238E27FC236}">
+                <a16:creationId xmlns:a16="http://schemas.microsoft.com/office/drawing/2014/main" id="{D63CD917-36CD-BDE4-07E4-CD074E678248}"/>
+              </a:ext>
+            </a:extLst>
+          </p:cNvPr>
+          <p:cNvSpPr/>
+          <p:nvPr/>
+        </p:nvSpPr>
+        <p:spPr>
+          <a:xfrm>
+            <a:off x="362198" y="1690688"/>
+            <a:ext cx="11620006" cy="3950091"/>
+          </a:xfrm>
+          <a:prstGeom prst="rect">
+            <a:avLst/>
+          </a:prstGeom>
+          <a:solidFill>
+            <a:schemeClr val="accent1">
+              <a:lumMod val="20000"/>
+              <a:lumOff val="80000"/>
+            </a:schemeClr>
+          </a:solidFill>
+          <a:ln w="28575">
+            <a:solidFill>
+              <a:schemeClr val="accent1"/>
+            </a:solidFill>
+            <a:prstDash val="dash"/>
+          </a:ln>
+        </p:spPr>
+        <p:style>
+          <a:lnRef idx="2">
+            <a:schemeClr val="accent1">
+              <a:shade val="15000"/>
+            </a:schemeClr>
+          </a:lnRef>
+          <a:fillRef idx="1">
+            <a:schemeClr val="accent1"/>
+          </a:fillRef>
+          <a:effectRef idx="0">
+            <a:schemeClr val="accent1"/>
+          </a:effectRef>
+          <a:fontRef idx="minor">
+            <a:schemeClr val="lt1"/>
+          </a:fontRef>
+        </p:style>
+        <p:txBody>
+          <a:bodyPr rtlCol="0" anchor="ctr"/>
+          <a:lstStyle/>
+          <a:p>
+            <a:pPr algn="ctr"/>
+            <a:endParaRPr lang="en-US"/>
+          </a:p>
+        </p:txBody>
+      </p:sp>
+      <p:sp>
+        <p:nvSpPr>
           <p:cNvPr id="8" name="Title 1">
             <a:extLst>
               <a:ext uri="{FF2B5EF4-FFF2-40B4-BE49-F238E27FC236}">
@@ -7122,15 +7678,12 @@
             <a:avLst/>
           </a:prstGeom>
           <a:solidFill>
-            <a:schemeClr val="accent4">
-              <a:lumMod val="60000"/>
-              <a:lumOff val="40000"/>
+            <a:schemeClr val="bg1">
+              <a:lumMod val="75000"/>
             </a:schemeClr>
           </a:solidFill>
           <a:ln w="28575">
-            <a:solidFill>
-              <a:srgbClr val="BF9001"/>
-            </a:solidFill>
+            <a:noFill/>
           </a:ln>
         </p:spPr>
         <p:style>
@@ -7155,9 +7708,7 @@
             <a:r>
               <a:rPr lang="en-US" dirty="0">
                 <a:solidFill>
-                  <a:schemeClr val="accent4">
-                    <a:lumMod val="50000"/>
-                  </a:schemeClr>
+                  <a:schemeClr val="bg1"/>
                 </a:solidFill>
               </a:rPr>
               <a:t>Raw reads</a:t>
@@ -7185,6 +7736,11 @@
           <a:prstGeom prst="rect">
             <a:avLst/>
           </a:prstGeom>
+          <a:solidFill>
+            <a:schemeClr val="bg1">
+              <a:lumMod val="75000"/>
+            </a:schemeClr>
+          </a:solidFill>
           <a:ln>
             <a:noFill/>
           </a:ln>
@@ -7238,6 +7794,11 @@
           <a:prstGeom prst="rect">
             <a:avLst/>
           </a:prstGeom>
+          <a:solidFill>
+            <a:schemeClr val="bg1">
+              <a:lumMod val="75000"/>
+            </a:schemeClr>
+          </a:solidFill>
           <a:ln>
             <a:noFill/>
           </a:ln>
@@ -7291,6 +7852,11 @@
           <a:prstGeom prst="rect">
             <a:avLst/>
           </a:prstGeom>
+          <a:solidFill>
+            <a:schemeClr val="bg1">
+              <a:lumMod val="75000"/>
+            </a:schemeClr>
+          </a:solidFill>
           <a:ln>
             <a:noFill/>
           </a:ln>
@@ -7578,9 +8144,8 @@
             <a:avLst/>
           </a:prstGeom>
           <a:solidFill>
-            <a:schemeClr val="accent2">
-              <a:lumMod val="60000"/>
-              <a:lumOff val="40000"/>
+            <a:schemeClr val="bg1">
+              <a:lumMod val="75000"/>
             </a:schemeClr>
           </a:solidFill>
           <a:ln>
@@ -7636,9 +8201,8 @@
             <a:avLst/>
           </a:prstGeom>
           <a:solidFill>
-            <a:schemeClr val="accent2">
-              <a:lumMod val="60000"/>
-              <a:lumOff val="40000"/>
+            <a:schemeClr val="bg1">
+              <a:lumMod val="75000"/>
             </a:schemeClr>
           </a:solidFill>
           <a:ln>
@@ -7953,59 +8517,6 @@
       </p:cxnSp>
       <p:sp>
         <p:nvSpPr>
-          <p:cNvPr id="3" name="Rectangle 2">
-            <a:extLst>
-              <a:ext uri="{FF2B5EF4-FFF2-40B4-BE49-F238E27FC236}">
-                <a16:creationId xmlns:a16="http://schemas.microsoft.com/office/drawing/2014/main" id="{D63CD917-36CD-BDE4-07E4-CD074E678248}"/>
-              </a:ext>
-            </a:extLst>
-          </p:cNvPr>
-          <p:cNvSpPr/>
-          <p:nvPr/>
-        </p:nvSpPr>
-        <p:spPr>
-          <a:xfrm>
-            <a:off x="362198" y="1690688"/>
-            <a:ext cx="11620006" cy="3950091"/>
-          </a:xfrm>
-          <a:prstGeom prst="rect">
-            <a:avLst/>
-          </a:prstGeom>
-          <a:noFill/>
-          <a:ln w="28575">
-            <a:solidFill>
-              <a:schemeClr val="accent1"/>
-            </a:solidFill>
-            <a:prstDash val="dash"/>
-          </a:ln>
-        </p:spPr>
-        <p:style>
-          <a:lnRef idx="2">
-            <a:schemeClr val="accent1">
-              <a:shade val="15000"/>
-            </a:schemeClr>
-          </a:lnRef>
-          <a:fillRef idx="1">
-            <a:schemeClr val="accent1"/>
-          </a:fillRef>
-          <a:effectRef idx="0">
-            <a:schemeClr val="accent1"/>
-          </a:effectRef>
-          <a:fontRef idx="minor">
-            <a:schemeClr val="lt1"/>
-          </a:fontRef>
-        </p:style>
-        <p:txBody>
-          <a:bodyPr rtlCol="0" anchor="ctr"/>
-          <a:lstStyle/>
-          <a:p>
-            <a:pPr algn="ctr"/>
-            <a:endParaRPr lang="en-US"/>
-          </a:p>
-        </p:txBody>
-      </p:sp>
-      <p:sp>
-        <p:nvSpPr>
           <p:cNvPr id="4" name="TextBox 3">
             <a:extLst>
               <a:ext uri="{FF2B5EF4-FFF2-40B4-BE49-F238E27FC236}">
@@ -8052,7 +8563,7 @@
 </p:sld>
 </file>
 
-<file path=ppt/slides/slide17.xml><?xml version="1.0" encoding="utf-8"?>
+<file path=ppt/slides/slide16.xml><?xml version="1.0" encoding="utf-8"?>
 <p:sld xmlns:a="http://schemas.openxmlformats.org/drawingml/2006/main" xmlns:r="http://schemas.openxmlformats.org/officeDocument/2006/relationships" xmlns:p="http://schemas.openxmlformats.org/presentationml/2006/main">
   <p:cSld>
     <p:spTree>
@@ -8077,6 +8588,64 @@
       </p:grpSpPr>
       <p:sp>
         <p:nvSpPr>
+          <p:cNvPr id="3" name="Rectangle 2">
+            <a:extLst>
+              <a:ext uri="{FF2B5EF4-FFF2-40B4-BE49-F238E27FC236}">
+                <a16:creationId xmlns:a16="http://schemas.microsoft.com/office/drawing/2014/main" id="{1E99D19D-2006-C937-D09B-EFD5D374C51C}"/>
+              </a:ext>
+            </a:extLst>
+          </p:cNvPr>
+          <p:cNvSpPr/>
+          <p:nvPr/>
+        </p:nvSpPr>
+        <p:spPr>
+          <a:xfrm>
+            <a:off x="362198" y="1690688"/>
+            <a:ext cx="11620006" cy="3106943"/>
+          </a:xfrm>
+          <a:prstGeom prst="rect">
+            <a:avLst/>
+          </a:prstGeom>
+          <a:solidFill>
+            <a:schemeClr val="accent1">
+              <a:lumMod val="20000"/>
+              <a:lumOff val="80000"/>
+            </a:schemeClr>
+          </a:solidFill>
+          <a:ln w="28575">
+            <a:solidFill>
+              <a:schemeClr val="accent1"/>
+            </a:solidFill>
+            <a:prstDash val="dash"/>
+          </a:ln>
+        </p:spPr>
+        <p:style>
+          <a:lnRef idx="2">
+            <a:schemeClr val="accent1">
+              <a:shade val="15000"/>
+            </a:schemeClr>
+          </a:lnRef>
+          <a:fillRef idx="1">
+            <a:schemeClr val="accent1"/>
+          </a:fillRef>
+          <a:effectRef idx="0">
+            <a:schemeClr val="accent1"/>
+          </a:effectRef>
+          <a:fontRef idx="minor">
+            <a:schemeClr val="lt1"/>
+          </a:fontRef>
+        </p:style>
+        <p:txBody>
+          <a:bodyPr rtlCol="0" anchor="ctr"/>
+          <a:lstStyle/>
+          <a:p>
+            <a:pPr algn="ctr"/>
+            <a:endParaRPr lang="en-US"/>
+          </a:p>
+        </p:txBody>
+      </p:sp>
+      <p:sp>
+        <p:nvSpPr>
           <p:cNvPr id="8" name="Title 1">
             <a:extLst>
               <a:ext uri="{FF2B5EF4-FFF2-40B4-BE49-F238E27FC236}">
@@ -8129,15 +8698,12 @@
             <a:avLst/>
           </a:prstGeom>
           <a:solidFill>
-            <a:schemeClr val="accent4">
-              <a:lumMod val="60000"/>
-              <a:lumOff val="40000"/>
+            <a:schemeClr val="bg1">
+              <a:lumMod val="75000"/>
             </a:schemeClr>
           </a:solidFill>
           <a:ln w="28575">
-            <a:solidFill>
-              <a:srgbClr val="BF9001"/>
-            </a:solidFill>
+            <a:noFill/>
           </a:ln>
         </p:spPr>
         <p:style>
@@ -8162,9 +8728,7 @@
             <a:r>
               <a:rPr lang="en-US" dirty="0">
                 <a:solidFill>
-                  <a:schemeClr val="accent4">
-                    <a:lumMod val="50000"/>
-                  </a:schemeClr>
+                  <a:schemeClr val="bg1"/>
                 </a:solidFill>
               </a:rPr>
               <a:t>Raw reads</a:t>
@@ -8192,6 +8756,11 @@
           <a:prstGeom prst="rect">
             <a:avLst/>
           </a:prstGeom>
+          <a:solidFill>
+            <a:schemeClr val="bg1">
+              <a:lumMod val="75000"/>
+            </a:schemeClr>
+          </a:solidFill>
           <a:ln>
             <a:noFill/>
           </a:ln>
@@ -8218,10 +8787,18 @@
           <a:p>
             <a:pPr algn="ctr"/>
             <a:r>
-              <a:rPr lang="en-US" dirty="0" err="1"/>
+              <a:rPr lang="en-US" dirty="0" err="1">
+                <a:solidFill>
+                  <a:schemeClr val="bg1"/>
+                </a:solidFill>
+              </a:rPr>
               <a:t>FastQC</a:t>
             </a:r>
-            <a:endParaRPr lang="en-US" dirty="0"/>
+            <a:endParaRPr lang="en-US" dirty="0">
+              <a:solidFill>
+                <a:schemeClr val="bg1"/>
+              </a:solidFill>
+            </a:endParaRPr>
           </a:p>
         </p:txBody>
       </p:sp>
@@ -8245,6 +8822,11 @@
           <a:prstGeom prst="rect">
             <a:avLst/>
           </a:prstGeom>
+          <a:solidFill>
+            <a:schemeClr val="bg1">
+              <a:lumMod val="75000"/>
+            </a:schemeClr>
+          </a:solidFill>
           <a:ln>
             <a:noFill/>
           </a:ln>
@@ -8271,10 +8853,18 @@
           <a:p>
             <a:pPr algn="ctr"/>
             <a:r>
-              <a:rPr lang="en-US" dirty="0" err="1"/>
+              <a:rPr lang="en-US" dirty="0" err="1">
+                <a:solidFill>
+                  <a:schemeClr val="bg1"/>
+                </a:solidFill>
+              </a:rPr>
               <a:t>Trimmomatic</a:t>
             </a:r>
-            <a:endParaRPr lang="en-US" dirty="0"/>
+            <a:endParaRPr lang="en-US" dirty="0">
+              <a:solidFill>
+                <a:schemeClr val="bg1"/>
+              </a:solidFill>
+            </a:endParaRPr>
           </a:p>
         </p:txBody>
       </p:sp>
@@ -8298,6 +8888,11 @@
           <a:prstGeom prst="rect">
             <a:avLst/>
           </a:prstGeom>
+          <a:solidFill>
+            <a:schemeClr val="bg1">
+              <a:lumMod val="75000"/>
+            </a:schemeClr>
+          </a:solidFill>
           <a:ln>
             <a:noFill/>
           </a:ln>
@@ -8324,10 +8919,18 @@
           <a:p>
             <a:pPr algn="ctr"/>
             <a:r>
-              <a:rPr lang="en-US" dirty="0" err="1"/>
+              <a:rPr lang="en-US" dirty="0" err="1">
+                <a:solidFill>
+                  <a:schemeClr val="bg1"/>
+                </a:solidFill>
+              </a:rPr>
               <a:t>FastQC</a:t>
             </a:r>
-            <a:endParaRPr lang="en-US" dirty="0"/>
+            <a:endParaRPr lang="en-US" dirty="0">
+              <a:solidFill>
+                <a:schemeClr val="bg1"/>
+              </a:solidFill>
+            </a:endParaRPr>
           </a:p>
         </p:txBody>
       </p:sp>
@@ -8585,9 +9188,8 @@
             <a:avLst/>
           </a:prstGeom>
           <a:solidFill>
-            <a:schemeClr val="accent2">
-              <a:lumMod val="60000"/>
-              <a:lumOff val="40000"/>
+            <a:schemeClr val="bg1">
+              <a:lumMod val="75000"/>
             </a:schemeClr>
           </a:solidFill>
           <a:ln>
@@ -8616,7 +9218,11 @@
           <a:p>
             <a:pPr algn="ctr"/>
             <a:r>
-              <a:rPr lang="en-US" dirty="0"/>
+              <a:rPr lang="en-US" dirty="0">
+                <a:solidFill>
+                  <a:schemeClr val="bg1"/>
+                </a:solidFill>
+              </a:rPr>
               <a:t>Assembly with MEGAHIT</a:t>
             </a:r>
           </a:p>
@@ -8853,59 +9459,6 @@
           </a:fontRef>
         </p:style>
       </p:cxnSp>
-      <p:sp>
-        <p:nvSpPr>
-          <p:cNvPr id="3" name="Rectangle 2">
-            <a:extLst>
-              <a:ext uri="{FF2B5EF4-FFF2-40B4-BE49-F238E27FC236}">
-                <a16:creationId xmlns:a16="http://schemas.microsoft.com/office/drawing/2014/main" id="{1E99D19D-2006-C937-D09B-EFD5D374C51C}"/>
-              </a:ext>
-            </a:extLst>
-          </p:cNvPr>
-          <p:cNvSpPr/>
-          <p:nvPr/>
-        </p:nvSpPr>
-        <p:spPr>
-          <a:xfrm>
-            <a:off x="362198" y="1690688"/>
-            <a:ext cx="11620006" cy="3106943"/>
-          </a:xfrm>
-          <a:prstGeom prst="rect">
-            <a:avLst/>
-          </a:prstGeom>
-          <a:noFill/>
-          <a:ln w="28575">
-            <a:solidFill>
-              <a:schemeClr val="accent1"/>
-            </a:solidFill>
-            <a:prstDash val="dash"/>
-          </a:ln>
-        </p:spPr>
-        <p:style>
-          <a:lnRef idx="2">
-            <a:schemeClr val="accent1">
-              <a:shade val="15000"/>
-            </a:schemeClr>
-          </a:lnRef>
-          <a:fillRef idx="1">
-            <a:schemeClr val="accent1"/>
-          </a:fillRef>
-          <a:effectRef idx="0">
-            <a:schemeClr val="accent1"/>
-          </a:effectRef>
-          <a:fontRef idx="minor">
-            <a:schemeClr val="lt1"/>
-          </a:fontRef>
-        </p:style>
-        <p:txBody>
-          <a:bodyPr rtlCol="0" anchor="ctr"/>
-          <a:lstStyle/>
-          <a:p>
-            <a:pPr algn="ctr"/>
-            <a:endParaRPr lang="en-US"/>
-          </a:p>
-        </p:txBody>
-      </p:sp>
       <p:sp>
         <p:nvSpPr>
           <p:cNvPr id="4" name="TextBox 3">
@@ -8954,7 +9507,7 @@
 </p:sld>
 </file>
 
-<file path=ppt/slides/slide18.xml><?xml version="1.0" encoding="utf-8"?>
+<file path=ppt/slides/slide17.xml><?xml version="1.0" encoding="utf-8"?>
 <p:sld xmlns:a="http://schemas.openxmlformats.org/drawingml/2006/main" xmlns:r="http://schemas.openxmlformats.org/officeDocument/2006/relationships" xmlns:p="http://schemas.openxmlformats.org/presentationml/2006/main">
   <p:cSld>
     <p:spTree>
@@ -8979,6 +9532,64 @@
       </p:grpSpPr>
       <p:sp>
         <p:nvSpPr>
+          <p:cNvPr id="3" name="Rectangle 2">
+            <a:extLst>
+              <a:ext uri="{FF2B5EF4-FFF2-40B4-BE49-F238E27FC236}">
+                <a16:creationId xmlns:a16="http://schemas.microsoft.com/office/drawing/2014/main" id="{CC582806-8BF5-8E05-D6FA-B88DFB301265}"/>
+              </a:ext>
+            </a:extLst>
+          </p:cNvPr>
+          <p:cNvSpPr/>
+          <p:nvPr/>
+        </p:nvSpPr>
+        <p:spPr>
+          <a:xfrm>
+            <a:off x="362198" y="1690688"/>
+            <a:ext cx="11620006" cy="2447863"/>
+          </a:xfrm>
+          <a:prstGeom prst="rect">
+            <a:avLst/>
+          </a:prstGeom>
+          <a:solidFill>
+            <a:schemeClr val="accent1">
+              <a:lumMod val="20000"/>
+              <a:lumOff val="80000"/>
+            </a:schemeClr>
+          </a:solidFill>
+          <a:ln w="28575">
+            <a:solidFill>
+              <a:schemeClr val="accent1"/>
+            </a:solidFill>
+            <a:prstDash val="dash"/>
+          </a:ln>
+        </p:spPr>
+        <p:style>
+          <a:lnRef idx="2">
+            <a:schemeClr val="accent1">
+              <a:shade val="15000"/>
+            </a:schemeClr>
+          </a:lnRef>
+          <a:fillRef idx="1">
+            <a:schemeClr val="accent1"/>
+          </a:fillRef>
+          <a:effectRef idx="0">
+            <a:schemeClr val="accent1"/>
+          </a:effectRef>
+          <a:fontRef idx="minor">
+            <a:schemeClr val="lt1"/>
+          </a:fontRef>
+        </p:style>
+        <p:txBody>
+          <a:bodyPr rtlCol="0" anchor="ctr"/>
+          <a:lstStyle/>
+          <a:p>
+            <a:pPr algn="ctr"/>
+            <a:endParaRPr lang="en-US"/>
+          </a:p>
+        </p:txBody>
+      </p:sp>
+      <p:sp>
+        <p:nvSpPr>
           <p:cNvPr id="8" name="Title 1">
             <a:extLst>
               <a:ext uri="{FF2B5EF4-FFF2-40B4-BE49-F238E27FC236}">
@@ -9031,15 +9642,12 @@
             <a:avLst/>
           </a:prstGeom>
           <a:solidFill>
-            <a:schemeClr val="accent4">
-              <a:lumMod val="60000"/>
-              <a:lumOff val="40000"/>
+            <a:schemeClr val="bg1">
+              <a:lumMod val="75000"/>
             </a:schemeClr>
           </a:solidFill>
           <a:ln w="28575">
-            <a:solidFill>
-              <a:srgbClr val="BF9001"/>
-            </a:solidFill>
+            <a:noFill/>
           </a:ln>
         </p:spPr>
         <p:style>
@@ -9064,9 +9672,7 @@
             <a:r>
               <a:rPr lang="en-US" dirty="0">
                 <a:solidFill>
-                  <a:schemeClr val="accent4">
-                    <a:lumMod val="50000"/>
-                  </a:schemeClr>
+                  <a:schemeClr val="bg1"/>
                 </a:solidFill>
               </a:rPr>
               <a:t>Raw reads</a:t>
@@ -9094,6 +9700,11 @@
           <a:prstGeom prst="rect">
             <a:avLst/>
           </a:prstGeom>
+          <a:solidFill>
+            <a:schemeClr val="bg1">
+              <a:lumMod val="75000"/>
+            </a:schemeClr>
+          </a:solidFill>
           <a:ln>
             <a:noFill/>
           </a:ln>
@@ -9120,10 +9731,18 @@
           <a:p>
             <a:pPr algn="ctr"/>
             <a:r>
-              <a:rPr lang="en-US" dirty="0" err="1"/>
+              <a:rPr lang="en-US" dirty="0" err="1">
+                <a:solidFill>
+                  <a:schemeClr val="bg1"/>
+                </a:solidFill>
+              </a:rPr>
               <a:t>FastQC</a:t>
             </a:r>
-            <a:endParaRPr lang="en-US" dirty="0"/>
+            <a:endParaRPr lang="en-US" dirty="0">
+              <a:solidFill>
+                <a:schemeClr val="bg1"/>
+              </a:solidFill>
+            </a:endParaRPr>
           </a:p>
         </p:txBody>
       </p:sp>
@@ -9147,6 +9766,11 @@
           <a:prstGeom prst="rect">
             <a:avLst/>
           </a:prstGeom>
+          <a:solidFill>
+            <a:schemeClr val="bg1">
+              <a:lumMod val="75000"/>
+            </a:schemeClr>
+          </a:solidFill>
           <a:ln>
             <a:noFill/>
           </a:ln>
@@ -9173,10 +9797,18 @@
           <a:p>
             <a:pPr algn="ctr"/>
             <a:r>
-              <a:rPr lang="en-US" dirty="0" err="1"/>
+              <a:rPr lang="en-US" dirty="0" err="1">
+                <a:solidFill>
+                  <a:schemeClr val="bg1"/>
+                </a:solidFill>
+              </a:rPr>
               <a:t>Trimmomatic</a:t>
             </a:r>
-            <a:endParaRPr lang="en-US" dirty="0"/>
+            <a:endParaRPr lang="en-US" dirty="0">
+              <a:solidFill>
+                <a:schemeClr val="bg1"/>
+              </a:solidFill>
+            </a:endParaRPr>
           </a:p>
         </p:txBody>
       </p:sp>
@@ -9200,6 +9832,11 @@
           <a:prstGeom prst="rect">
             <a:avLst/>
           </a:prstGeom>
+          <a:solidFill>
+            <a:schemeClr val="bg1">
+              <a:lumMod val="75000"/>
+            </a:schemeClr>
+          </a:solidFill>
           <a:ln>
             <a:noFill/>
           </a:ln>
@@ -9226,10 +9863,18 @@
           <a:p>
             <a:pPr algn="ctr"/>
             <a:r>
-              <a:rPr lang="en-US" dirty="0" err="1"/>
+              <a:rPr lang="en-US" dirty="0" err="1">
+                <a:solidFill>
+                  <a:schemeClr val="bg1"/>
+                </a:solidFill>
+              </a:rPr>
               <a:t>FastQC</a:t>
             </a:r>
-            <a:endParaRPr lang="en-US" dirty="0"/>
+            <a:endParaRPr lang="en-US" dirty="0">
+              <a:solidFill>
+                <a:schemeClr val="bg1"/>
+              </a:solidFill>
+            </a:endParaRPr>
           </a:p>
         </p:txBody>
       </p:sp>
@@ -9652,59 +10297,6 @@
       </p:cxnSp>
       <p:sp>
         <p:nvSpPr>
-          <p:cNvPr id="3" name="Rectangle 2">
-            <a:extLst>
-              <a:ext uri="{FF2B5EF4-FFF2-40B4-BE49-F238E27FC236}">
-                <a16:creationId xmlns:a16="http://schemas.microsoft.com/office/drawing/2014/main" id="{CC582806-8BF5-8E05-D6FA-B88DFB301265}"/>
-              </a:ext>
-            </a:extLst>
-          </p:cNvPr>
-          <p:cNvSpPr/>
-          <p:nvPr/>
-        </p:nvSpPr>
-        <p:spPr>
-          <a:xfrm>
-            <a:off x="362198" y="1690688"/>
-            <a:ext cx="11620006" cy="2447863"/>
-          </a:xfrm>
-          <a:prstGeom prst="rect">
-            <a:avLst/>
-          </a:prstGeom>
-          <a:noFill/>
-          <a:ln w="28575">
-            <a:solidFill>
-              <a:schemeClr val="accent1"/>
-            </a:solidFill>
-            <a:prstDash val="dash"/>
-          </a:ln>
-        </p:spPr>
-        <p:style>
-          <a:lnRef idx="2">
-            <a:schemeClr val="accent1">
-              <a:shade val="15000"/>
-            </a:schemeClr>
-          </a:lnRef>
-          <a:fillRef idx="1">
-            <a:schemeClr val="accent1"/>
-          </a:fillRef>
-          <a:effectRef idx="0">
-            <a:schemeClr val="accent1"/>
-          </a:effectRef>
-          <a:fontRef idx="minor">
-            <a:schemeClr val="lt1"/>
-          </a:fontRef>
-        </p:style>
-        <p:txBody>
-          <a:bodyPr rtlCol="0" anchor="ctr"/>
-          <a:lstStyle/>
-          <a:p>
-            <a:pPr algn="ctr"/>
-            <a:endParaRPr lang="en-US"/>
-          </a:p>
-        </p:txBody>
-      </p:sp>
-      <p:sp>
-        <p:nvSpPr>
           <p:cNvPr id="4" name="TextBox 3">
             <a:extLst>
               <a:ext uri="{FF2B5EF4-FFF2-40B4-BE49-F238E27FC236}">
@@ -9751,7 +10343,7 @@
 </p:sld>
 </file>
 
-<file path=ppt/slides/slide19.xml><?xml version="1.0" encoding="utf-8"?>
+<file path=ppt/slides/slide18.xml><?xml version="1.0" encoding="utf-8"?>
 <p:sld xmlns:a="http://schemas.openxmlformats.org/drawingml/2006/main" xmlns:r="http://schemas.openxmlformats.org/officeDocument/2006/relationships" xmlns:p="http://schemas.openxmlformats.org/presentationml/2006/main">
   <p:cSld>
     <p:spTree>
@@ -10142,90 +10734,7 @@
 </p:sld>
 </file>
 
-<file path=ppt/slides/slide2.xml><?xml version="1.0" encoding="utf-8"?>
-<p:sld xmlns:a="http://schemas.openxmlformats.org/drawingml/2006/main" xmlns:r="http://schemas.openxmlformats.org/officeDocument/2006/relationships" xmlns:p="http://schemas.openxmlformats.org/presentationml/2006/main">
-  <p:cSld>
-    <p:spTree>
-      <p:nvGrpSpPr>
-        <p:cNvPr id="1" name=""/>
-        <p:cNvGrpSpPr/>
-        <p:nvPr/>
-      </p:nvGrpSpPr>
-      <p:grpSpPr>
-        <a:xfrm>
-          <a:off x="0" y="0"/>
-          <a:ext cx="0" cy="0"/>
-          <a:chOff x="0" y="0"/>
-          <a:chExt cx="0" cy="0"/>
-        </a:xfrm>
-      </p:grpSpPr>
-      <p:sp>
-        <p:nvSpPr>
-          <p:cNvPr id="2" name="Title 1">
-            <a:extLst>
-              <a:ext uri="{FF2B5EF4-FFF2-40B4-BE49-F238E27FC236}">
-                <a16:creationId xmlns:a16="http://schemas.microsoft.com/office/drawing/2014/main" id="{C8439672-E7F5-1723-B190-A3D07B73B95A}"/>
-              </a:ext>
-            </a:extLst>
-          </p:cNvPr>
-          <p:cNvSpPr>
-            <a:spLocks noGrp="1"/>
-          </p:cNvSpPr>
-          <p:nvPr>
-            <p:ph type="title"/>
-          </p:nvPr>
-        </p:nvSpPr>
-        <p:spPr/>
-        <p:txBody>
-          <a:bodyPr/>
-          <a:lstStyle/>
-          <a:p>
-            <a:r>
-              <a:rPr lang="en-US" dirty="0"/>
-              <a:t>Plan</a:t>
-            </a:r>
-          </a:p>
-        </p:txBody>
-      </p:sp>
-      <p:sp>
-        <p:nvSpPr>
-          <p:cNvPr id="3" name="Content Placeholder 2">
-            <a:extLst>
-              <a:ext uri="{FF2B5EF4-FFF2-40B4-BE49-F238E27FC236}">
-                <a16:creationId xmlns:a16="http://schemas.microsoft.com/office/drawing/2014/main" id="{588B3222-58DD-375B-1D58-C6FD304DA78A}"/>
-              </a:ext>
-            </a:extLst>
-          </p:cNvPr>
-          <p:cNvSpPr>
-            <a:spLocks noGrp="1"/>
-          </p:cNvSpPr>
-          <p:nvPr>
-            <p:ph idx="1"/>
-          </p:nvPr>
-        </p:nvSpPr>
-        <p:spPr/>
-        <p:txBody>
-          <a:bodyPr/>
-          <a:lstStyle/>
-          <a:p>
-            <a:endParaRPr lang="en-US"/>
-          </a:p>
-        </p:txBody>
-      </p:sp>
-    </p:spTree>
-    <p:extLst>
-      <p:ext uri="{BB962C8B-B14F-4D97-AF65-F5344CB8AC3E}">
-        <p14:creationId xmlns:p14="http://schemas.microsoft.com/office/powerpoint/2010/main" val="1157480680"/>
-      </p:ext>
-    </p:extLst>
-  </p:cSld>
-  <p:clrMapOvr>
-    <a:masterClrMapping/>
-  </p:clrMapOvr>
-</p:sld>
-</file>
-
-<file path=ppt/slides/slide20.xml><?xml version="1.0" encoding="utf-8"?>
+<file path=ppt/slides/slide19.xml><?xml version="1.0" encoding="utf-8"?>
 <p:sld xmlns:a="http://schemas.openxmlformats.org/drawingml/2006/main" xmlns:r="http://schemas.openxmlformats.org/officeDocument/2006/relationships" xmlns:p="http://schemas.openxmlformats.org/presentationml/2006/main">
   <p:cSld>
     <p:spTree>
@@ -10906,6 +11415,1334 @@
 </p:sld>
 </file>
 
+<file path=ppt/slides/slide2.xml><?xml version="1.0" encoding="utf-8"?>
+<p:sld xmlns:a="http://schemas.openxmlformats.org/drawingml/2006/main" xmlns:r="http://schemas.openxmlformats.org/officeDocument/2006/relationships" xmlns:p="http://schemas.openxmlformats.org/presentationml/2006/main">
+  <p:cSld>
+    <p:spTree>
+      <p:nvGrpSpPr>
+        <p:cNvPr id="1" name=""/>
+        <p:cNvGrpSpPr/>
+        <p:nvPr/>
+      </p:nvGrpSpPr>
+      <p:grpSpPr>
+        <a:xfrm>
+          <a:off x="0" y="0"/>
+          <a:ext cx="0" cy="0"/>
+          <a:chOff x="0" y="0"/>
+          <a:chExt cx="0" cy="0"/>
+        </a:xfrm>
+      </p:grpSpPr>
+      <p:sp>
+        <p:nvSpPr>
+          <p:cNvPr id="2" name="Title 1">
+            <a:extLst>
+              <a:ext uri="{FF2B5EF4-FFF2-40B4-BE49-F238E27FC236}">
+                <a16:creationId xmlns:a16="http://schemas.microsoft.com/office/drawing/2014/main" id="{C8439672-E7F5-1723-B190-A3D07B73B95A}"/>
+              </a:ext>
+            </a:extLst>
+          </p:cNvPr>
+          <p:cNvSpPr>
+            <a:spLocks noGrp="1"/>
+          </p:cNvSpPr>
+          <p:nvPr>
+            <p:ph type="title"/>
+          </p:nvPr>
+        </p:nvSpPr>
+        <p:spPr/>
+        <p:txBody>
+          <a:bodyPr/>
+          <a:lstStyle/>
+          <a:p>
+            <a:r>
+              <a:rPr lang="en-US" dirty="0"/>
+              <a:t>Plan</a:t>
+            </a:r>
+          </a:p>
+        </p:txBody>
+      </p:sp>
+      <p:sp>
+        <p:nvSpPr>
+          <p:cNvPr id="3" name="Content Placeholder 2">
+            <a:extLst>
+              <a:ext uri="{FF2B5EF4-FFF2-40B4-BE49-F238E27FC236}">
+                <a16:creationId xmlns:a16="http://schemas.microsoft.com/office/drawing/2014/main" id="{588B3222-58DD-375B-1D58-C6FD304DA78A}"/>
+              </a:ext>
+            </a:extLst>
+          </p:cNvPr>
+          <p:cNvSpPr>
+            <a:spLocks noGrp="1"/>
+          </p:cNvSpPr>
+          <p:nvPr>
+            <p:ph idx="1"/>
+          </p:nvPr>
+        </p:nvSpPr>
+        <p:spPr/>
+        <p:txBody>
+          <a:bodyPr>
+            <a:normAutofit lnSpcReduction="10000"/>
+          </a:bodyPr>
+          <a:lstStyle/>
+          <a:p>
+            <a:pPr marL="0" indent="0">
+              <a:buNone/>
+            </a:pPr>
+            <a:r>
+              <a:rPr lang="en-US" b="1" u="sng" dirty="0"/>
+              <a:t>Day 1: Foundations; creating a pipeline</a:t>
+            </a:r>
+          </a:p>
+          <a:p>
+            <a:r>
+              <a:rPr lang="en-US" sz="2400" dirty="0"/>
+              <a:t>Processes</a:t>
+            </a:r>
+          </a:p>
+          <a:p>
+            <a:r>
+              <a:rPr lang="en-US" sz="2400" dirty="0"/>
+              <a:t>Channels</a:t>
+            </a:r>
+          </a:p>
+          <a:p>
+            <a:r>
+              <a:rPr lang="en-US" sz="2400" dirty="0"/>
+              <a:t>Workflows</a:t>
+            </a:r>
+          </a:p>
+          <a:p>
+            <a:pPr marL="0" indent="0">
+              <a:buNone/>
+            </a:pPr>
+            <a:endParaRPr lang="en-US" sz="2400" dirty="0"/>
+          </a:p>
+          <a:p>
+            <a:pPr marL="0" indent="0">
+              <a:buNone/>
+            </a:pPr>
+            <a:r>
+              <a:rPr lang="en-US" b="1" u="sng" dirty="0"/>
+              <a:t>Day 2: From pipeline to production</a:t>
+            </a:r>
+          </a:p>
+          <a:p>
+            <a:r>
+              <a:rPr lang="en-US" sz="2400" dirty="0"/>
+              <a:t>Parametrizing – </a:t>
+            </a:r>
+            <a:r>
+              <a:rPr lang="en-US" sz="2400" dirty="0" err="1"/>
+              <a:t>nextflow.config</a:t>
+            </a:r>
+            <a:endParaRPr lang="en-US" sz="2400" dirty="0"/>
+          </a:p>
+          <a:p>
+            <a:r>
+              <a:rPr lang="en-US" sz="2400" dirty="0"/>
+              <a:t>Compartmentalizing – modules</a:t>
+            </a:r>
+          </a:p>
+          <a:p>
+            <a:r>
+              <a:rPr lang="en-US" sz="2400" dirty="0"/>
+              <a:t>Making it portable – containers</a:t>
+            </a:r>
+          </a:p>
+          <a:p>
+            <a:r>
+              <a:rPr lang="en-US" sz="2400" dirty="0"/>
+              <a:t>Making it scalable – HPC (SLURM)</a:t>
+            </a:r>
+          </a:p>
+          <a:p>
+            <a:pPr marL="0" indent="0">
+              <a:buNone/>
+            </a:pPr>
+            <a:endParaRPr lang="en-US" sz="2400" dirty="0"/>
+          </a:p>
+          <a:p>
+            <a:pPr marL="0" indent="0">
+              <a:buNone/>
+            </a:pPr>
+            <a:endParaRPr lang="en-US" dirty="0"/>
+          </a:p>
+        </p:txBody>
+      </p:sp>
+    </p:spTree>
+    <p:extLst>
+      <p:ext uri="{BB962C8B-B14F-4D97-AF65-F5344CB8AC3E}">
+        <p14:creationId xmlns:p14="http://schemas.microsoft.com/office/powerpoint/2010/main" val="1157480680"/>
+      </p:ext>
+    </p:extLst>
+  </p:cSld>
+  <p:clrMapOvr>
+    <a:masterClrMapping/>
+  </p:clrMapOvr>
+</p:sld>
+</file>
+
+<file path=ppt/slides/slide20.xml><?xml version="1.0" encoding="utf-8"?>
+<p:sld xmlns:a="http://schemas.openxmlformats.org/drawingml/2006/main" xmlns:r="http://schemas.openxmlformats.org/officeDocument/2006/relationships" xmlns:p="http://schemas.openxmlformats.org/presentationml/2006/main">
+  <p:cSld>
+    <p:spTree>
+      <p:nvGrpSpPr>
+        <p:cNvPr id="1" name="">
+          <a:extLst>
+            <a:ext uri="{FF2B5EF4-FFF2-40B4-BE49-F238E27FC236}">
+              <a16:creationId xmlns:a16="http://schemas.microsoft.com/office/drawing/2014/main" id="{9A90AF89-510A-C89B-55C3-CDC7529F10C6}"/>
+            </a:ext>
+          </a:extLst>
+        </p:cNvPr>
+        <p:cNvGrpSpPr/>
+        <p:nvPr/>
+      </p:nvGrpSpPr>
+      <p:grpSpPr>
+        <a:xfrm>
+          <a:off x="0" y="0"/>
+          <a:ext cx="0" cy="0"/>
+          <a:chOff x="0" y="0"/>
+          <a:chExt cx="0" cy="0"/>
+        </a:xfrm>
+      </p:grpSpPr>
+      <p:sp>
+        <p:nvSpPr>
+          <p:cNvPr id="11" name="TextBox 10">
+            <a:extLst>
+              <a:ext uri="{FF2B5EF4-FFF2-40B4-BE49-F238E27FC236}">
+                <a16:creationId xmlns:a16="http://schemas.microsoft.com/office/drawing/2014/main" id="{DB559012-82C8-B274-9E0E-9235350F9606}"/>
+              </a:ext>
+            </a:extLst>
+          </p:cNvPr>
+          <p:cNvSpPr txBox="1"/>
+          <p:nvPr/>
+        </p:nvSpPr>
+        <p:spPr>
+          <a:xfrm>
+            <a:off x="6096000" y="2134677"/>
+            <a:ext cx="5499558" cy="3416320"/>
+          </a:xfrm>
+          <a:prstGeom prst="rect">
+            <a:avLst/>
+          </a:prstGeom>
+          <a:noFill/>
+        </p:spPr>
+        <p:txBody>
+          <a:bodyPr wrap="square" rtlCol="0">
+            <a:spAutoFit/>
+          </a:bodyPr>
+          <a:lstStyle/>
+          <a:p>
+            <a:r>
+              <a:rPr lang="en-US" b="1" dirty="0">
+                <a:solidFill>
+                  <a:srgbClr val="7030A0"/>
+                </a:solidFill>
+              </a:rPr>
+              <a:t>Configuration files </a:t>
+            </a:r>
+            <a:r>
+              <a:rPr lang="en-US" dirty="0"/>
+              <a:t>(</a:t>
+            </a:r>
+            <a:r>
+              <a:rPr lang="en-US" sz="1200" dirty="0" err="1">
+                <a:latin typeface="Menlo" panose="020B0609030804020204" pitchFamily="49" charset="0"/>
+                <a:ea typeface="Menlo" panose="020B0609030804020204" pitchFamily="49" charset="0"/>
+                <a:cs typeface="Menlo" panose="020B0609030804020204" pitchFamily="49" charset="0"/>
+              </a:rPr>
+              <a:t>nextflow.config</a:t>
+            </a:r>
+            <a:r>
+              <a:rPr lang="en-US" dirty="0"/>
+              <a:t>) separate execution settings from pipeline logic:</a:t>
+            </a:r>
+          </a:p>
+          <a:p>
+            <a:pPr marL="285750" indent="-285750">
+              <a:buFont typeface="Arial" panose="020B0604020202020204" pitchFamily="34" charset="0"/>
+              <a:buChar char="•"/>
+            </a:pPr>
+            <a:r>
+              <a:rPr lang="en-US" b="1" dirty="0"/>
+              <a:t>Executor settings</a:t>
+            </a:r>
+            <a:r>
+              <a:rPr lang="en-US" dirty="0"/>
+              <a:t>: Where to run (local, HPC, cloud)</a:t>
+            </a:r>
+          </a:p>
+          <a:p>
+            <a:pPr marL="285750" indent="-285750">
+              <a:buFont typeface="Arial" panose="020B0604020202020204" pitchFamily="34" charset="0"/>
+              <a:buChar char="•"/>
+            </a:pPr>
+            <a:r>
+              <a:rPr lang="en-US" b="1" dirty="0"/>
+              <a:t>Resource allocation</a:t>
+            </a:r>
+            <a:r>
+              <a:rPr lang="en-US" dirty="0"/>
+              <a:t>: Default CPU, memory per process</a:t>
+            </a:r>
+          </a:p>
+          <a:p>
+            <a:pPr marL="285750" indent="-285750">
+              <a:buFont typeface="Arial" panose="020B0604020202020204" pitchFamily="34" charset="0"/>
+              <a:buChar char="•"/>
+            </a:pPr>
+            <a:r>
+              <a:rPr lang="en-US" b="1" dirty="0"/>
+              <a:t>Container settings</a:t>
+            </a:r>
+            <a:r>
+              <a:rPr lang="en-US" dirty="0"/>
+              <a:t>: Docker/Singularity configuration</a:t>
+            </a:r>
+          </a:p>
+          <a:p>
+            <a:pPr marL="285750" indent="-285750">
+              <a:buFont typeface="Arial" panose="020B0604020202020204" pitchFamily="34" charset="0"/>
+              <a:buChar char="•"/>
+            </a:pPr>
+            <a:r>
+              <a:rPr lang="en-US" b="1" dirty="0"/>
+              <a:t>Profiles</a:t>
+            </a:r>
+            <a:r>
+              <a:rPr lang="en-US" dirty="0"/>
+              <a:t>: Different configurations for different environments (laptop vs cluster)</a:t>
+            </a:r>
+          </a:p>
+          <a:p>
+            <a:endParaRPr lang="en-US" dirty="0"/>
+          </a:p>
+          <a:p>
+            <a:r>
+              <a:rPr lang="en-US" dirty="0"/>
+              <a:t>This separation allows the same pipeline to run across different infrastructure without code changes.</a:t>
+            </a:r>
+          </a:p>
+          <a:p>
+            <a:endParaRPr lang="en-US" dirty="0"/>
+          </a:p>
+        </p:txBody>
+      </p:sp>
+      <p:sp>
+        <p:nvSpPr>
+          <p:cNvPr id="12" name="Title 1">
+            <a:extLst>
+              <a:ext uri="{FF2B5EF4-FFF2-40B4-BE49-F238E27FC236}">
+                <a16:creationId xmlns:a16="http://schemas.microsoft.com/office/drawing/2014/main" id="{B8085EB4-79EB-8EF0-F251-72EB70D8F246}"/>
+              </a:ext>
+            </a:extLst>
+          </p:cNvPr>
+          <p:cNvSpPr>
+            <a:spLocks noGrp="1"/>
+          </p:cNvSpPr>
+          <p:nvPr>
+            <p:ph type="title"/>
+          </p:nvPr>
+        </p:nvSpPr>
+        <p:spPr>
+          <a:xfrm>
+            <a:off x="838200" y="365125"/>
+            <a:ext cx="10515600" cy="1325563"/>
+          </a:xfrm>
+        </p:spPr>
+        <p:txBody>
+          <a:bodyPr/>
+          <a:lstStyle/>
+          <a:p>
+            <a:r>
+              <a:rPr lang="en-US" dirty="0" err="1"/>
+              <a:t>Nextflow</a:t>
+            </a:r>
+            <a:r>
+              <a:rPr lang="en-US" dirty="0"/>
+              <a:t> components: </a:t>
+            </a:r>
+            <a:r>
+              <a:rPr lang="en-US" b="1" dirty="0"/>
+              <a:t>config files</a:t>
+            </a:r>
+          </a:p>
+        </p:txBody>
+      </p:sp>
+      <p:pic>
+        <p:nvPicPr>
+          <p:cNvPr id="3074" name="Picture 2" descr="Oversee - May 22, 2016 Word Of The Day | Britannica Dictionary">
+            <a:extLst>
+              <a:ext uri="{FF2B5EF4-FFF2-40B4-BE49-F238E27FC236}">
+                <a16:creationId xmlns:a16="http://schemas.microsoft.com/office/drawing/2014/main" id="{EAB5C093-D743-8EF5-753F-81CDEB863AE0}"/>
+              </a:ext>
+            </a:extLst>
+          </p:cNvPr>
+          <p:cNvPicPr>
+            <a:picLocks noChangeAspect="1" noChangeArrowheads="1"/>
+          </p:cNvPicPr>
+          <p:nvPr/>
+        </p:nvPicPr>
+        <p:blipFill>
+          <a:blip r:embed="rId2">
+            <a:extLst>
+              <a:ext uri="{28A0092B-C50C-407E-A947-70E740481C1C}">
+                <a14:useLocalDpi xmlns:a14="http://schemas.microsoft.com/office/drawing/2010/main" val="0"/>
+              </a:ext>
+            </a:extLst>
+          </a:blip>
+          <a:srcRect/>
+          <a:stretch>
+            <a:fillRect/>
+          </a:stretch>
+        </p:blipFill>
+        <p:spPr bwMode="auto">
+          <a:xfrm>
+            <a:off x="838200" y="2193884"/>
+            <a:ext cx="4334584" cy="3022802"/>
+          </a:xfrm>
+          <a:prstGeom prst="rect">
+            <a:avLst/>
+          </a:prstGeom>
+          <a:noFill/>
+          <a:extLst>
+            <a:ext uri="{909E8E84-426E-40DD-AFC4-6F175D3DCCD1}">
+              <a14:hiddenFill xmlns:a14="http://schemas.microsoft.com/office/drawing/2010/main">
+                <a:solidFill>
+                  <a:srgbClr val="FFFFFF"/>
+                </a:solidFill>
+              </a14:hiddenFill>
+            </a:ext>
+          </a:extLst>
+        </p:spPr>
+      </p:pic>
+      <p:pic>
+        <p:nvPicPr>
+          <p:cNvPr id="5122" name="Picture 2" descr="Manual Icon Vector Art, Icons, and Graphics for Free Download">
+            <a:extLst>
+              <a:ext uri="{FF2B5EF4-FFF2-40B4-BE49-F238E27FC236}">
+                <a16:creationId xmlns:a16="http://schemas.microsoft.com/office/drawing/2014/main" id="{41F8F46F-0A04-AAB2-1EFE-A68F2CDDE98E}"/>
+              </a:ext>
+            </a:extLst>
+          </p:cNvPr>
+          <p:cNvPicPr>
+            <a:picLocks noChangeAspect="1" noChangeArrowheads="1"/>
+          </p:cNvPicPr>
+          <p:nvPr/>
+        </p:nvPicPr>
+        <p:blipFill>
+          <a:blip r:embed="rId3">
+            <a:extLst>
+              <a:ext uri="{28A0092B-C50C-407E-A947-70E740481C1C}">
+                <a14:useLocalDpi xmlns:a14="http://schemas.microsoft.com/office/drawing/2010/main" val="0"/>
+              </a:ext>
+            </a:extLst>
+          </a:blip>
+          <a:srcRect/>
+          <a:stretch>
+            <a:fillRect/>
+          </a:stretch>
+        </p:blipFill>
+        <p:spPr bwMode="auto">
+          <a:xfrm>
+            <a:off x="9061508" y="669604"/>
+            <a:ext cx="431149" cy="537536"/>
+          </a:xfrm>
+          <a:prstGeom prst="rect">
+            <a:avLst/>
+          </a:prstGeom>
+          <a:noFill/>
+          <a:extLst>
+            <a:ext uri="{909E8E84-426E-40DD-AFC4-6F175D3DCCD1}">
+              <a14:hiddenFill xmlns:a14="http://schemas.microsoft.com/office/drawing/2010/main">
+                <a:solidFill>
+                  <a:srgbClr val="FFFFFF"/>
+                </a:solidFill>
+              </a14:hiddenFill>
+            </a:ext>
+          </a:extLst>
+        </p:spPr>
+      </p:pic>
+    </p:spTree>
+    <p:extLst>
+      <p:ext uri="{BB962C8B-B14F-4D97-AF65-F5344CB8AC3E}">
+        <p14:creationId xmlns:p14="http://schemas.microsoft.com/office/powerpoint/2010/main" val="3889215571"/>
+      </p:ext>
+    </p:extLst>
+  </p:cSld>
+  <p:clrMapOvr>
+    <a:masterClrMapping/>
+  </p:clrMapOvr>
+</p:sld>
+</file>
+
+<file path=ppt/slides/slide21.xml><?xml version="1.0" encoding="utf-8"?>
+<p:sld xmlns:a="http://schemas.openxmlformats.org/drawingml/2006/main" xmlns:r="http://schemas.openxmlformats.org/officeDocument/2006/relationships" xmlns:p="http://schemas.openxmlformats.org/presentationml/2006/main">
+  <p:cSld>
+    <p:spTree>
+      <p:nvGrpSpPr>
+        <p:cNvPr id="1" name="">
+          <a:extLst>
+            <a:ext uri="{FF2B5EF4-FFF2-40B4-BE49-F238E27FC236}">
+              <a16:creationId xmlns:a16="http://schemas.microsoft.com/office/drawing/2014/main" id="{30A7E632-1B08-6D8A-3A25-87625934D76E}"/>
+            </a:ext>
+          </a:extLst>
+        </p:cNvPr>
+        <p:cNvGrpSpPr/>
+        <p:nvPr/>
+      </p:nvGrpSpPr>
+      <p:grpSpPr>
+        <a:xfrm>
+          <a:off x="0" y="0"/>
+          <a:ext cx="0" cy="0"/>
+          <a:chOff x="0" y="0"/>
+          <a:chExt cx="0" cy="0"/>
+        </a:xfrm>
+      </p:grpSpPr>
+      <p:sp>
+        <p:nvSpPr>
+          <p:cNvPr id="6" name="Title 1">
+            <a:extLst>
+              <a:ext uri="{FF2B5EF4-FFF2-40B4-BE49-F238E27FC236}">
+                <a16:creationId xmlns:a16="http://schemas.microsoft.com/office/drawing/2014/main" id="{BEDBFA83-B7A1-3974-0E7E-4C0F70E71604}"/>
+              </a:ext>
+            </a:extLst>
+          </p:cNvPr>
+          <p:cNvSpPr txBox="1">
+            <a:spLocks/>
+          </p:cNvSpPr>
+          <p:nvPr/>
+        </p:nvSpPr>
+        <p:spPr>
+          <a:xfrm>
+            <a:off x="1646320" y="2089105"/>
+            <a:ext cx="4570412" cy="2387600"/>
+          </a:xfrm>
+          <a:prstGeom prst="rect">
+            <a:avLst/>
+          </a:prstGeom>
+        </p:spPr>
+        <p:txBody>
+          <a:bodyPr vert="horz" lIns="91440" tIns="45720" rIns="91440" bIns="45720" rtlCol="0" anchor="ctr">
+            <a:normAutofit/>
+          </a:bodyPr>
+          <a:lstStyle>
+            <a:lvl1pPr algn="l" defTabSz="914400" rtl="0" eaLnBrk="1" latinLnBrk="0" hangingPunct="1">
+              <a:lnSpc>
+                <a:spcPct val="90000"/>
+              </a:lnSpc>
+              <a:spcBef>
+                <a:spcPct val="0"/>
+              </a:spcBef>
+              <a:buNone/>
+              <a:defRPr sz="4400" kern="1200">
+                <a:solidFill>
+                  <a:schemeClr val="tx1"/>
+                </a:solidFill>
+                <a:latin typeface="+mj-lt"/>
+                <a:ea typeface="+mj-ea"/>
+                <a:cs typeface="+mj-cs"/>
+              </a:defRPr>
+            </a:lvl1pPr>
+          </a:lstStyle>
+          <a:p>
+            <a:r>
+              <a:rPr lang="en-US" sz="5400" dirty="0"/>
+              <a:t>Containers</a:t>
+            </a:r>
+            <a:endParaRPr lang="en-US" sz="5400" dirty="0">
+              <a:latin typeface="Helvetica" pitchFamily="2" charset="0"/>
+            </a:endParaRPr>
+          </a:p>
+        </p:txBody>
+      </p:sp>
+      <p:pic>
+        <p:nvPicPr>
+          <p:cNvPr id="1026" name="Picture 2" descr="Software - Free computer icons">
+            <a:extLst>
+              <a:ext uri="{FF2B5EF4-FFF2-40B4-BE49-F238E27FC236}">
+                <a16:creationId xmlns:a16="http://schemas.microsoft.com/office/drawing/2014/main" id="{90307FDE-986B-CAFD-B54C-EAD152D20F69}"/>
+              </a:ext>
+            </a:extLst>
+          </p:cNvPr>
+          <p:cNvPicPr>
+            <a:picLocks noChangeAspect="1" noChangeArrowheads="1"/>
+          </p:cNvPicPr>
+          <p:nvPr/>
+        </p:nvPicPr>
+        <p:blipFill>
+          <a:blip r:embed="rId3">
+            <a:extLst>
+              <a:ext uri="{28A0092B-C50C-407E-A947-70E740481C1C}">
+                <a14:useLocalDpi xmlns:a14="http://schemas.microsoft.com/office/drawing/2010/main" val="0"/>
+              </a:ext>
+            </a:extLst>
+          </a:blip>
+          <a:srcRect/>
+          <a:stretch>
+            <a:fillRect/>
+          </a:stretch>
+        </p:blipFill>
+        <p:spPr bwMode="auto">
+          <a:xfrm>
+            <a:off x="6096000" y="2540329"/>
+            <a:ext cx="1248229" cy="1248229"/>
+          </a:xfrm>
+          <a:prstGeom prst="rect">
+            <a:avLst/>
+          </a:prstGeom>
+          <a:noFill/>
+          <a:extLst>
+            <a:ext uri="{909E8E84-426E-40DD-AFC4-6F175D3DCCD1}">
+              <a14:hiddenFill xmlns:a14="http://schemas.microsoft.com/office/drawing/2010/main">
+                <a:solidFill>
+                  <a:srgbClr val="FFFFFF"/>
+                </a:solidFill>
+              </a14:hiddenFill>
+            </a:ext>
+          </a:extLst>
+        </p:spPr>
+      </p:pic>
+    </p:spTree>
+    <p:extLst>
+      <p:ext uri="{BB962C8B-B14F-4D97-AF65-F5344CB8AC3E}">
+        <p14:creationId xmlns:p14="http://schemas.microsoft.com/office/powerpoint/2010/main" val="722826327"/>
+      </p:ext>
+    </p:extLst>
+  </p:cSld>
+  <p:clrMapOvr>
+    <a:masterClrMapping/>
+  </p:clrMapOvr>
+</p:sld>
+</file>
+
+<file path=ppt/slides/slide22.xml><?xml version="1.0" encoding="utf-8"?>
+<p:sld xmlns:a="http://schemas.openxmlformats.org/drawingml/2006/main" xmlns:r="http://schemas.openxmlformats.org/officeDocument/2006/relationships" xmlns:p="http://schemas.openxmlformats.org/presentationml/2006/main">
+  <p:cSld>
+    <p:spTree>
+      <p:nvGrpSpPr>
+        <p:cNvPr id="1" name="">
+          <a:extLst>
+            <a:ext uri="{FF2B5EF4-FFF2-40B4-BE49-F238E27FC236}">
+              <a16:creationId xmlns:a16="http://schemas.microsoft.com/office/drawing/2014/main" id="{F3FAF49B-F4D4-672E-CBAC-B59D767AF846}"/>
+            </a:ext>
+          </a:extLst>
+        </p:cNvPr>
+        <p:cNvGrpSpPr/>
+        <p:nvPr/>
+      </p:nvGrpSpPr>
+      <p:grpSpPr>
+        <a:xfrm>
+          <a:off x="0" y="0"/>
+          <a:ext cx="0" cy="0"/>
+          <a:chOff x="0" y="0"/>
+          <a:chExt cx="0" cy="0"/>
+        </a:xfrm>
+      </p:grpSpPr>
+      <p:sp>
+        <p:nvSpPr>
+          <p:cNvPr id="2" name="Title 1">
+            <a:extLst>
+              <a:ext uri="{FF2B5EF4-FFF2-40B4-BE49-F238E27FC236}">
+                <a16:creationId xmlns:a16="http://schemas.microsoft.com/office/drawing/2014/main" id="{92D63F50-ADB6-FEBA-66C6-B06489CA27C4}"/>
+              </a:ext>
+            </a:extLst>
+          </p:cNvPr>
+          <p:cNvSpPr>
+            <a:spLocks noGrp="1"/>
+          </p:cNvSpPr>
+          <p:nvPr>
+            <p:ph type="title"/>
+          </p:nvPr>
+        </p:nvSpPr>
+        <p:spPr/>
+        <p:txBody>
+          <a:bodyPr>
+            <a:normAutofit/>
+          </a:bodyPr>
+          <a:lstStyle/>
+          <a:p>
+            <a:r>
+              <a:rPr lang="en-US" sz="4000" dirty="0">
+                <a:latin typeface="Helvetica" pitchFamily="2" charset="0"/>
+              </a:rPr>
+              <a:t>The dependency problem</a:t>
+            </a:r>
+          </a:p>
+        </p:txBody>
+      </p:sp>
+      <p:pic>
+        <p:nvPicPr>
+          <p:cNvPr id="3074" name="Picture 2" descr="Comprehensive Guide to Dependency Management in Python | Towards Data  Science">
+            <a:extLst>
+              <a:ext uri="{FF2B5EF4-FFF2-40B4-BE49-F238E27FC236}">
+                <a16:creationId xmlns:a16="http://schemas.microsoft.com/office/drawing/2014/main" id="{B69F3160-5F2F-5AD0-786A-CD86791F190E}"/>
+              </a:ext>
+            </a:extLst>
+          </p:cNvPr>
+          <p:cNvPicPr>
+            <a:picLocks noChangeAspect="1" noChangeArrowheads="1"/>
+          </p:cNvPicPr>
+          <p:nvPr/>
+        </p:nvPicPr>
+        <p:blipFill>
+          <a:blip r:embed="rId3">
+            <a:extLst>
+              <a:ext uri="{28A0092B-C50C-407E-A947-70E740481C1C}">
+                <a14:useLocalDpi xmlns:a14="http://schemas.microsoft.com/office/drawing/2010/main" val="0"/>
+              </a:ext>
+            </a:extLst>
+          </a:blip>
+          <a:srcRect/>
+          <a:stretch>
+            <a:fillRect/>
+          </a:stretch>
+        </p:blipFill>
+        <p:spPr bwMode="auto">
+          <a:xfrm>
+            <a:off x="1441175" y="1851789"/>
+            <a:ext cx="8763000" cy="4561780"/>
+          </a:xfrm>
+          <a:prstGeom prst="rect">
+            <a:avLst/>
+          </a:prstGeom>
+          <a:noFill/>
+          <a:extLst>
+            <a:ext uri="{909E8E84-426E-40DD-AFC4-6F175D3DCCD1}">
+              <a14:hiddenFill xmlns:a14="http://schemas.microsoft.com/office/drawing/2010/main">
+                <a:solidFill>
+                  <a:srgbClr val="FFFFFF"/>
+                </a:solidFill>
+              </a14:hiddenFill>
+            </a:ext>
+          </a:extLst>
+        </p:spPr>
+      </p:pic>
+    </p:spTree>
+    <p:extLst>
+      <p:ext uri="{BB962C8B-B14F-4D97-AF65-F5344CB8AC3E}">
+        <p14:creationId xmlns:p14="http://schemas.microsoft.com/office/powerpoint/2010/main" val="1907772438"/>
+      </p:ext>
+    </p:extLst>
+  </p:cSld>
+  <p:clrMapOvr>
+    <a:masterClrMapping/>
+  </p:clrMapOvr>
+</p:sld>
+</file>
+
+<file path=ppt/slides/slide23.xml><?xml version="1.0" encoding="utf-8"?>
+<p:sld xmlns:a="http://schemas.openxmlformats.org/drawingml/2006/main" xmlns:r="http://schemas.openxmlformats.org/officeDocument/2006/relationships" xmlns:p="http://schemas.openxmlformats.org/presentationml/2006/main">
+  <p:cSld>
+    <p:spTree>
+      <p:nvGrpSpPr>
+        <p:cNvPr id="1" name="">
+          <a:extLst>
+            <a:ext uri="{FF2B5EF4-FFF2-40B4-BE49-F238E27FC236}">
+              <a16:creationId xmlns:a16="http://schemas.microsoft.com/office/drawing/2014/main" id="{216265C6-6F3E-E159-BCCB-BF81A97674B7}"/>
+            </a:ext>
+          </a:extLst>
+        </p:cNvPr>
+        <p:cNvGrpSpPr/>
+        <p:nvPr/>
+      </p:nvGrpSpPr>
+      <p:grpSpPr>
+        <a:xfrm>
+          <a:off x="0" y="0"/>
+          <a:ext cx="0" cy="0"/>
+          <a:chOff x="0" y="0"/>
+          <a:chExt cx="0" cy="0"/>
+        </a:xfrm>
+      </p:grpSpPr>
+      <p:sp>
+        <p:nvSpPr>
+          <p:cNvPr id="2" name="Title 1">
+            <a:extLst>
+              <a:ext uri="{FF2B5EF4-FFF2-40B4-BE49-F238E27FC236}">
+                <a16:creationId xmlns:a16="http://schemas.microsoft.com/office/drawing/2014/main" id="{E7F7C3F9-71A8-FC24-43BA-7CEEF829EBE2}"/>
+              </a:ext>
+            </a:extLst>
+          </p:cNvPr>
+          <p:cNvSpPr>
+            <a:spLocks noGrp="1"/>
+          </p:cNvSpPr>
+          <p:nvPr>
+            <p:ph type="title"/>
+          </p:nvPr>
+        </p:nvSpPr>
+        <p:spPr/>
+        <p:txBody>
+          <a:bodyPr>
+            <a:normAutofit/>
+          </a:bodyPr>
+          <a:lstStyle/>
+          <a:p>
+            <a:r>
+              <a:rPr lang="en-US" sz="4000" dirty="0">
+                <a:latin typeface="Helvetica" pitchFamily="2" charset="0"/>
+              </a:rPr>
+              <a:t>Introduction to containers</a:t>
+            </a:r>
+          </a:p>
+        </p:txBody>
+      </p:sp>
+      <p:sp>
+        <p:nvSpPr>
+          <p:cNvPr id="3" name="TextBox 2">
+            <a:extLst>
+              <a:ext uri="{FF2B5EF4-FFF2-40B4-BE49-F238E27FC236}">
+                <a16:creationId xmlns:a16="http://schemas.microsoft.com/office/drawing/2014/main" id="{B5AE2760-694B-59C8-C3B1-C3202ED4722D}"/>
+              </a:ext>
+            </a:extLst>
+          </p:cNvPr>
+          <p:cNvSpPr txBox="1"/>
+          <p:nvPr/>
+        </p:nvSpPr>
+        <p:spPr>
+          <a:xfrm>
+            <a:off x="838200" y="1442549"/>
+            <a:ext cx="6405465" cy="4247317"/>
+          </a:xfrm>
+          <a:prstGeom prst="rect">
+            <a:avLst/>
+          </a:prstGeom>
+          <a:noFill/>
+        </p:spPr>
+        <p:txBody>
+          <a:bodyPr wrap="square" rtlCol="0">
+            <a:spAutoFit/>
+          </a:bodyPr>
+          <a:lstStyle/>
+          <a:p>
+            <a:r>
+              <a:rPr lang="en-US" dirty="0"/>
+              <a:t>We </a:t>
+            </a:r>
+            <a:r>
+              <a:rPr lang="en-US" b="1" dirty="0"/>
+              <a:t>have to</a:t>
+            </a:r>
+            <a:r>
+              <a:rPr lang="en-US" dirty="0"/>
+              <a:t> use containers when: </a:t>
+            </a:r>
+          </a:p>
+          <a:p>
+            <a:pPr marL="285750" indent="-285750">
+              <a:buFontTx/>
+              <a:buChar char="-"/>
+            </a:pPr>
+            <a:r>
+              <a:rPr lang="en-US" dirty="0"/>
+              <a:t>extremely complex dependencies</a:t>
+            </a:r>
+          </a:p>
+          <a:p>
+            <a:pPr marL="285750" indent="-285750">
+              <a:buFontTx/>
+              <a:buChar char="-"/>
+            </a:pPr>
+            <a:r>
+              <a:rPr lang="en-US" dirty="0"/>
+              <a:t>require a specific operating system configuration</a:t>
+            </a:r>
+          </a:p>
+          <a:p>
+            <a:pPr marL="285750" indent="-285750">
+              <a:buFontTx/>
+              <a:buChar char="-"/>
+            </a:pPr>
+            <a:r>
+              <a:rPr lang="en-US" dirty="0"/>
+              <a:t>need to guarantee that analysis will run identically on any system — not just Hazel</a:t>
+            </a:r>
+          </a:p>
+          <a:p>
+            <a:endParaRPr lang="en-US" dirty="0"/>
+          </a:p>
+          <a:p>
+            <a:r>
+              <a:rPr lang="en-US" dirty="0"/>
+              <a:t>We </a:t>
+            </a:r>
+            <a:r>
+              <a:rPr lang="en-US" b="1" dirty="0">
+                <a:solidFill>
+                  <a:schemeClr val="accent2">
+                    <a:lumMod val="75000"/>
+                  </a:schemeClr>
+                </a:solidFill>
+              </a:rPr>
+              <a:t>should generally use containers</a:t>
+            </a:r>
+            <a:endParaRPr lang="en-US" dirty="0"/>
+          </a:p>
+          <a:p>
+            <a:endParaRPr lang="en-US" dirty="0"/>
+          </a:p>
+          <a:p>
+            <a:r>
+              <a:rPr lang="en-US" dirty="0"/>
+              <a:t>A container is like a complete mini-computer: </a:t>
+            </a:r>
+          </a:p>
+          <a:p>
+            <a:pPr marL="285750" indent="-285750">
+              <a:buFontTx/>
+              <a:buChar char="-"/>
+            </a:pPr>
+            <a:r>
+              <a:rPr lang="en-US" dirty="0"/>
+              <a:t>Operating system</a:t>
+            </a:r>
+          </a:p>
+          <a:p>
+            <a:pPr marL="285750" indent="-285750">
+              <a:buFontTx/>
+              <a:buChar char="-"/>
+            </a:pPr>
+            <a:r>
+              <a:rPr lang="en-US" dirty="0"/>
+              <a:t>Libraries</a:t>
+            </a:r>
+          </a:p>
+          <a:p>
+            <a:pPr marL="285750" indent="-285750">
+              <a:buFontTx/>
+              <a:buChar char="-"/>
+            </a:pPr>
+            <a:r>
+              <a:rPr lang="en-US" dirty="0"/>
+              <a:t>Software</a:t>
+            </a:r>
+          </a:p>
+          <a:p>
+            <a:r>
+              <a:rPr lang="en-US" dirty="0"/>
+              <a:t>You don't install the software — you just run the container. </a:t>
+            </a:r>
+          </a:p>
+          <a:p>
+            <a:pPr marL="285750" indent="-285750">
+              <a:buFontTx/>
+              <a:buChar char="-"/>
+            </a:pPr>
+            <a:endParaRPr lang="en-US" dirty="0"/>
+          </a:p>
+          <a:p>
+            <a:endParaRPr lang="en-US" dirty="0"/>
+          </a:p>
+        </p:txBody>
+      </p:sp>
+      <p:pic>
+        <p:nvPicPr>
+          <p:cNvPr id="4" name="Picture 3">
+            <a:extLst>
+              <a:ext uri="{FF2B5EF4-FFF2-40B4-BE49-F238E27FC236}">
+                <a16:creationId xmlns:a16="http://schemas.microsoft.com/office/drawing/2014/main" id="{1A5E3C14-0703-76A5-5414-7B911F52189B}"/>
+              </a:ext>
+            </a:extLst>
+          </p:cNvPr>
+          <p:cNvPicPr>
+            <a:picLocks noChangeAspect="1"/>
+          </p:cNvPicPr>
+          <p:nvPr/>
+        </p:nvPicPr>
+        <p:blipFill>
+          <a:blip r:embed="rId3"/>
+          <a:stretch>
+            <a:fillRect/>
+          </a:stretch>
+        </p:blipFill>
+        <p:spPr>
+          <a:xfrm>
+            <a:off x="6531428" y="1590990"/>
+            <a:ext cx="6165273" cy="4281440"/>
+          </a:xfrm>
+          <a:prstGeom prst="rect">
+            <a:avLst/>
+          </a:prstGeom>
+        </p:spPr>
+      </p:pic>
+      <p:sp>
+        <p:nvSpPr>
+          <p:cNvPr id="5" name="TextBox 4">
+            <a:extLst>
+              <a:ext uri="{FF2B5EF4-FFF2-40B4-BE49-F238E27FC236}">
+                <a16:creationId xmlns:a16="http://schemas.microsoft.com/office/drawing/2014/main" id="{4ADAD4BC-53FB-4FAA-3690-291FDBF2CEFE}"/>
+              </a:ext>
+            </a:extLst>
+          </p:cNvPr>
+          <p:cNvSpPr txBox="1"/>
+          <p:nvPr/>
+        </p:nvSpPr>
+        <p:spPr>
+          <a:xfrm>
+            <a:off x="838200" y="5503098"/>
+            <a:ext cx="4488729" cy="369332"/>
+          </a:xfrm>
+          <a:prstGeom prst="rect">
+            <a:avLst/>
+          </a:prstGeom>
+          <a:solidFill>
+            <a:schemeClr val="accent4">
+              <a:lumMod val="20000"/>
+              <a:lumOff val="80000"/>
+            </a:schemeClr>
+          </a:solidFill>
+        </p:spPr>
+        <p:txBody>
+          <a:bodyPr wrap="none" rtlCol="0">
+            <a:spAutoFit/>
+          </a:bodyPr>
+          <a:lstStyle/>
+          <a:p>
+            <a:r>
+              <a:rPr lang="en-US" dirty="0"/>
+              <a:t>portable, versioned, immutable environments</a:t>
+            </a:r>
+          </a:p>
+        </p:txBody>
+      </p:sp>
+      <p:sp>
+        <p:nvSpPr>
+          <p:cNvPr id="6" name="TextBox 5">
+            <a:extLst>
+              <a:ext uri="{FF2B5EF4-FFF2-40B4-BE49-F238E27FC236}">
+                <a16:creationId xmlns:a16="http://schemas.microsoft.com/office/drawing/2014/main" id="{1114F417-8C7D-B8FB-7332-A2FC0621A712}"/>
+              </a:ext>
+            </a:extLst>
+          </p:cNvPr>
+          <p:cNvSpPr txBox="1"/>
+          <p:nvPr/>
+        </p:nvSpPr>
+        <p:spPr>
+          <a:xfrm>
+            <a:off x="838200" y="6020871"/>
+            <a:ext cx="8305479" cy="369332"/>
+          </a:xfrm>
+          <a:prstGeom prst="rect">
+            <a:avLst/>
+          </a:prstGeom>
+          <a:solidFill>
+            <a:schemeClr val="accent4">
+              <a:lumMod val="40000"/>
+              <a:lumOff val="60000"/>
+            </a:schemeClr>
+          </a:solidFill>
+        </p:spPr>
+        <p:txBody>
+          <a:bodyPr wrap="none" rtlCol="0">
+            <a:spAutoFit/>
+          </a:bodyPr>
+          <a:lstStyle/>
+          <a:p>
+            <a:r>
+              <a:rPr lang="en-US" dirty="0"/>
+              <a:t>An analysis is not just a script — it is a script plus the exact environment in which it run</a:t>
+            </a:r>
+          </a:p>
+        </p:txBody>
+      </p:sp>
+    </p:spTree>
+    <p:extLst>
+      <p:ext uri="{BB962C8B-B14F-4D97-AF65-F5344CB8AC3E}">
+        <p14:creationId xmlns:p14="http://schemas.microsoft.com/office/powerpoint/2010/main" val="2364049003"/>
+      </p:ext>
+    </p:extLst>
+  </p:cSld>
+  <p:clrMapOvr>
+    <a:masterClrMapping/>
+  </p:clrMapOvr>
+</p:sld>
+</file>
+
+<file path=ppt/slides/slide24.xml><?xml version="1.0" encoding="utf-8"?>
+<p:sld xmlns:a="http://schemas.openxmlformats.org/drawingml/2006/main" xmlns:r="http://schemas.openxmlformats.org/officeDocument/2006/relationships" xmlns:p="http://schemas.openxmlformats.org/presentationml/2006/main">
+  <p:cSld>
+    <p:spTree>
+      <p:nvGrpSpPr>
+        <p:cNvPr id="1" name="">
+          <a:extLst>
+            <a:ext uri="{FF2B5EF4-FFF2-40B4-BE49-F238E27FC236}">
+              <a16:creationId xmlns:a16="http://schemas.microsoft.com/office/drawing/2014/main" id="{0827E178-611C-4A10-AB68-2E8C2C7D82E1}"/>
+            </a:ext>
+          </a:extLst>
+        </p:cNvPr>
+        <p:cNvGrpSpPr/>
+        <p:nvPr/>
+      </p:nvGrpSpPr>
+      <p:grpSpPr>
+        <a:xfrm>
+          <a:off x="0" y="0"/>
+          <a:ext cx="0" cy="0"/>
+          <a:chOff x="0" y="0"/>
+          <a:chExt cx="0" cy="0"/>
+        </a:xfrm>
+      </p:grpSpPr>
+      <p:sp>
+        <p:nvSpPr>
+          <p:cNvPr id="2" name="Title 1">
+            <a:extLst>
+              <a:ext uri="{FF2B5EF4-FFF2-40B4-BE49-F238E27FC236}">
+                <a16:creationId xmlns:a16="http://schemas.microsoft.com/office/drawing/2014/main" id="{6F68F1C3-1BB9-9B74-0597-520B1FC41047}"/>
+              </a:ext>
+            </a:extLst>
+          </p:cNvPr>
+          <p:cNvSpPr>
+            <a:spLocks noGrp="1"/>
+          </p:cNvSpPr>
+          <p:nvPr>
+            <p:ph type="title"/>
+          </p:nvPr>
+        </p:nvSpPr>
+        <p:spPr/>
+        <p:txBody>
+          <a:bodyPr>
+            <a:normAutofit/>
+          </a:bodyPr>
+          <a:lstStyle/>
+          <a:p>
+            <a:r>
+              <a:rPr lang="en-US" sz="4000" dirty="0">
+                <a:latin typeface="Helvetica" pitchFamily="2" charset="0"/>
+              </a:rPr>
+              <a:t>Singularity vs. docker</a:t>
+            </a:r>
+          </a:p>
+        </p:txBody>
+      </p:sp>
+      <p:sp>
+        <p:nvSpPr>
+          <p:cNvPr id="4" name="TextBox 3">
+            <a:extLst>
+              <a:ext uri="{FF2B5EF4-FFF2-40B4-BE49-F238E27FC236}">
+                <a16:creationId xmlns:a16="http://schemas.microsoft.com/office/drawing/2014/main" id="{E6861FA9-7AF1-DC19-E5DD-5BA7E6730003}"/>
+              </a:ext>
+            </a:extLst>
+          </p:cNvPr>
+          <p:cNvSpPr txBox="1"/>
+          <p:nvPr/>
+        </p:nvSpPr>
+        <p:spPr>
+          <a:xfrm>
+            <a:off x="1040495" y="4948291"/>
+            <a:ext cx="4711719" cy="1477328"/>
+          </a:xfrm>
+          <a:prstGeom prst="rect">
+            <a:avLst/>
+          </a:prstGeom>
+          <a:noFill/>
+        </p:spPr>
+        <p:txBody>
+          <a:bodyPr wrap="square" rtlCol="0">
+            <a:spAutoFit/>
+          </a:bodyPr>
+          <a:lstStyle/>
+          <a:p>
+            <a:pPr marL="285750" indent="-285750">
+              <a:buFont typeface="Arial" panose="020B0604020202020204" pitchFamily="34" charset="0"/>
+              <a:buChar char="•"/>
+            </a:pPr>
+            <a:r>
+              <a:rPr lang="en-US" dirty="0"/>
+              <a:t>dominant container platform </a:t>
+            </a:r>
+          </a:p>
+          <a:p>
+            <a:pPr marL="285750" indent="-285750">
+              <a:buFont typeface="Arial" panose="020B0604020202020204" pitchFamily="34" charset="0"/>
+              <a:buChar char="•"/>
+            </a:pPr>
+            <a:r>
+              <a:rPr lang="en-US" dirty="0"/>
+              <a:t>most likely to encounter in tutorials, documentation, and online resources</a:t>
+            </a:r>
+          </a:p>
+          <a:p>
+            <a:pPr marL="285750" indent="-285750">
+              <a:buFont typeface="Arial" panose="020B0604020202020204" pitchFamily="34" charset="0"/>
+              <a:buChar char="•"/>
+            </a:pPr>
+            <a:r>
+              <a:rPr lang="en-US" dirty="0"/>
+              <a:t>images are stored in registries(Docker Hub and the </a:t>
+            </a:r>
+            <a:r>
+              <a:rPr lang="en-US" dirty="0" err="1"/>
+              <a:t>Biocontainers</a:t>
+            </a:r>
+            <a:r>
+              <a:rPr lang="en-US" dirty="0"/>
+              <a:t>) </a:t>
+            </a:r>
+          </a:p>
+        </p:txBody>
+      </p:sp>
+      <p:sp>
+        <p:nvSpPr>
+          <p:cNvPr id="5" name="TextBox 4">
+            <a:extLst>
+              <a:ext uri="{FF2B5EF4-FFF2-40B4-BE49-F238E27FC236}">
+                <a16:creationId xmlns:a16="http://schemas.microsoft.com/office/drawing/2014/main" id="{B95412E8-21E2-61B4-F2FD-5F0A010D0509}"/>
+              </a:ext>
+            </a:extLst>
+          </p:cNvPr>
+          <p:cNvSpPr txBox="1"/>
+          <p:nvPr/>
+        </p:nvSpPr>
+        <p:spPr>
+          <a:xfrm>
+            <a:off x="6439788" y="4948291"/>
+            <a:ext cx="11066811" cy="923330"/>
+          </a:xfrm>
+          <a:prstGeom prst="rect">
+            <a:avLst/>
+          </a:prstGeom>
+          <a:noFill/>
+        </p:spPr>
+        <p:txBody>
+          <a:bodyPr wrap="square" rtlCol="0">
+            <a:spAutoFit/>
+          </a:bodyPr>
+          <a:lstStyle/>
+          <a:p>
+            <a:pPr marL="285750" indent="-285750">
+              <a:buFont typeface="Arial" panose="020B0604020202020204" pitchFamily="34" charset="0"/>
+              <a:buChar char="•"/>
+            </a:pPr>
+            <a:r>
+              <a:rPr lang="en-US" dirty="0"/>
+              <a:t>HPC clusters: Docker requires root privileges. </a:t>
+            </a:r>
+          </a:p>
+          <a:p>
+            <a:pPr marL="285750" indent="-285750">
+              <a:buFont typeface="Arial" panose="020B0604020202020204" pitchFamily="34" charset="0"/>
+              <a:buChar char="•"/>
+            </a:pPr>
+            <a:r>
+              <a:rPr lang="en-US" dirty="0"/>
+              <a:t>No needing administrator access. </a:t>
+            </a:r>
+          </a:p>
+          <a:p>
+            <a:pPr marL="285750" indent="-285750">
+              <a:buFont typeface="Arial" panose="020B0604020202020204" pitchFamily="34" charset="0"/>
+              <a:buChar char="•"/>
+            </a:pPr>
+            <a:r>
+              <a:rPr lang="en-US" dirty="0"/>
+              <a:t>can also directly run Docker images</a:t>
+            </a:r>
+          </a:p>
+        </p:txBody>
+      </p:sp>
+      <p:pic>
+        <p:nvPicPr>
+          <p:cNvPr id="4098" name="Picture 2" descr="Docker Logo and symbol, meaning, history, PNG, brand">
+            <a:extLst>
+              <a:ext uri="{FF2B5EF4-FFF2-40B4-BE49-F238E27FC236}">
+                <a16:creationId xmlns:a16="http://schemas.microsoft.com/office/drawing/2014/main" id="{BD41C810-FE27-8401-204E-378BA6ECEDA8}"/>
+              </a:ext>
+            </a:extLst>
+          </p:cNvPr>
+          <p:cNvPicPr>
+            <a:picLocks noChangeAspect="1" noChangeArrowheads="1"/>
+          </p:cNvPicPr>
+          <p:nvPr/>
+        </p:nvPicPr>
+        <p:blipFill>
+          <a:blip r:embed="rId3">
+            <a:extLst>
+              <a:ext uri="{28A0092B-C50C-407E-A947-70E740481C1C}">
+                <a14:useLocalDpi xmlns:a14="http://schemas.microsoft.com/office/drawing/2010/main" val="0"/>
+              </a:ext>
+            </a:extLst>
+          </a:blip>
+          <a:srcRect/>
+          <a:stretch>
+            <a:fillRect/>
+          </a:stretch>
+        </p:blipFill>
+        <p:spPr bwMode="auto">
+          <a:xfrm>
+            <a:off x="1344744" y="2165459"/>
+            <a:ext cx="4103219" cy="2308061"/>
+          </a:xfrm>
+          <a:prstGeom prst="rect">
+            <a:avLst/>
+          </a:prstGeom>
+          <a:noFill/>
+          <a:extLst>
+            <a:ext uri="{909E8E84-426E-40DD-AFC4-6F175D3DCCD1}">
+              <a14:hiddenFill xmlns:a14="http://schemas.microsoft.com/office/drawing/2010/main">
+                <a:solidFill>
+                  <a:srgbClr val="FFFFFF"/>
+                </a:solidFill>
+              </a14:hiddenFill>
+            </a:ext>
+          </a:extLst>
+        </p:spPr>
+      </p:pic>
+      <p:pic>
+        <p:nvPicPr>
+          <p:cNvPr id="4100" name="Picture 4" descr="Apptainer - Portable, Reproducible Containers">
+            <a:extLst>
+              <a:ext uri="{FF2B5EF4-FFF2-40B4-BE49-F238E27FC236}">
+                <a16:creationId xmlns:a16="http://schemas.microsoft.com/office/drawing/2014/main" id="{7EB3E702-EF5A-9AEC-6839-E491F44BD594}"/>
+              </a:ext>
+            </a:extLst>
+          </p:cNvPr>
+          <p:cNvPicPr>
+            <a:picLocks noChangeAspect="1" noChangeArrowheads="1"/>
+          </p:cNvPicPr>
+          <p:nvPr/>
+        </p:nvPicPr>
+        <p:blipFill>
+          <a:blip r:embed="rId4">
+            <a:extLst>
+              <a:ext uri="{28A0092B-C50C-407E-A947-70E740481C1C}">
+                <a14:useLocalDpi xmlns:a14="http://schemas.microsoft.com/office/drawing/2010/main" val="0"/>
+              </a:ext>
+            </a:extLst>
+          </a:blip>
+          <a:srcRect/>
+          <a:stretch>
+            <a:fillRect/>
+          </a:stretch>
+        </p:blipFill>
+        <p:spPr bwMode="auto">
+          <a:xfrm>
+            <a:off x="6130438" y="2906888"/>
+            <a:ext cx="5143500" cy="1574800"/>
+          </a:xfrm>
+          <a:prstGeom prst="rect">
+            <a:avLst/>
+          </a:prstGeom>
+          <a:noFill/>
+          <a:extLst>
+            <a:ext uri="{909E8E84-426E-40DD-AFC4-6F175D3DCCD1}">
+              <a14:hiddenFill xmlns:a14="http://schemas.microsoft.com/office/drawing/2010/main">
+                <a:solidFill>
+                  <a:srgbClr val="FFFFFF"/>
+                </a:solidFill>
+              </a14:hiddenFill>
+            </a:ext>
+          </a:extLst>
+        </p:spPr>
+      </p:pic>
+    </p:spTree>
+    <p:extLst>
+      <p:ext uri="{BB962C8B-B14F-4D97-AF65-F5344CB8AC3E}">
+        <p14:creationId xmlns:p14="http://schemas.microsoft.com/office/powerpoint/2010/main" val="493050639"/>
+      </p:ext>
+    </p:extLst>
+  </p:cSld>
+  <p:clrMapOvr>
+    <a:masterClrMapping/>
+  </p:clrMapOvr>
+</p:sld>
+</file>
+
 <file path=ppt/slides/slide3.xml><?xml version="1.0" encoding="utf-8"?>
 <p:sld xmlns:a="http://schemas.openxmlformats.org/drawingml/2006/main" xmlns:r="http://schemas.openxmlformats.org/officeDocument/2006/relationships" xmlns:p="http://schemas.openxmlformats.org/presentationml/2006/main">
   <p:cSld>
@@ -11000,6 +12837,75 @@
   <p:cSld>
     <p:spTree>
       <p:nvGrpSpPr>
+        <p:cNvPr id="1" name="">
+          <a:extLst>
+            <a:ext uri="{FF2B5EF4-FFF2-40B4-BE49-F238E27FC236}">
+              <a16:creationId xmlns:a16="http://schemas.microsoft.com/office/drawing/2014/main" id="{BBAD8B8A-6420-D4CC-D98C-6A20CE2FEE79}"/>
+            </a:ext>
+          </a:extLst>
+        </p:cNvPr>
+        <p:cNvGrpSpPr/>
+        <p:nvPr/>
+      </p:nvGrpSpPr>
+      <p:grpSpPr>
+        <a:xfrm>
+          <a:off x="0" y="0"/>
+          <a:ext cx="0" cy="0"/>
+          <a:chOff x="0" y="0"/>
+          <a:chExt cx="0" cy="0"/>
+        </a:xfrm>
+      </p:grpSpPr>
+      <p:sp>
+        <p:nvSpPr>
+          <p:cNvPr id="2" name="Title 1">
+            <a:extLst>
+              <a:ext uri="{FF2B5EF4-FFF2-40B4-BE49-F238E27FC236}">
+                <a16:creationId xmlns:a16="http://schemas.microsoft.com/office/drawing/2014/main" id="{189AD3CE-7C37-BFFF-26DF-8F907F2E6151}"/>
+              </a:ext>
+            </a:extLst>
+          </p:cNvPr>
+          <p:cNvSpPr>
+            <a:spLocks noGrp="1"/>
+          </p:cNvSpPr>
+          <p:nvPr>
+            <p:ph type="title"/>
+          </p:nvPr>
+        </p:nvSpPr>
+        <p:spPr>
+          <a:xfrm>
+            <a:off x="2522951" y="2337974"/>
+            <a:ext cx="10515600" cy="1325563"/>
+          </a:xfrm>
+        </p:spPr>
+        <p:txBody>
+          <a:bodyPr/>
+          <a:lstStyle/>
+          <a:p>
+            <a:r>
+              <a:rPr lang="en-US" dirty="0"/>
+              <a:t>Access to SLURM based HPC?</a:t>
+            </a:r>
+          </a:p>
+        </p:txBody>
+      </p:sp>
+    </p:spTree>
+    <p:extLst>
+      <p:ext uri="{BB962C8B-B14F-4D97-AF65-F5344CB8AC3E}">
+        <p14:creationId xmlns:p14="http://schemas.microsoft.com/office/powerpoint/2010/main" val="1180560196"/>
+      </p:ext>
+    </p:extLst>
+  </p:cSld>
+  <p:clrMapOvr>
+    <a:masterClrMapping/>
+  </p:clrMapOvr>
+</p:sld>
+</file>
+
+<file path=ppt/slides/slide5.xml><?xml version="1.0" encoding="utf-8"?>
+<p:sld xmlns:a="http://schemas.openxmlformats.org/drawingml/2006/main" xmlns:r="http://schemas.openxmlformats.org/officeDocument/2006/relationships" xmlns:p="http://schemas.openxmlformats.org/presentationml/2006/main">
+  <p:cSld>
+    <p:spTree>
+      <p:nvGrpSpPr>
         <p:cNvPr id="1" name=""/>
         <p:cNvGrpSpPr/>
         <p:nvPr/>
@@ -11441,91 +13347,6 @@
           <a:p>
             <a:pPr algn="ctr"/>
             <a:endParaRPr lang="en-US"/>
-          </a:p>
-        </p:txBody>
-      </p:sp>
-      <p:sp>
-        <p:nvSpPr>
-          <p:cNvPr id="14" name="TextBox 13">
-            <a:extLst>
-              <a:ext uri="{FF2B5EF4-FFF2-40B4-BE49-F238E27FC236}">
-                <a16:creationId xmlns:a16="http://schemas.microsoft.com/office/drawing/2014/main" id="{8DE1105A-6A7E-46E5-55D6-D0668CD365B9}"/>
-              </a:ext>
-            </a:extLst>
-          </p:cNvPr>
-          <p:cNvSpPr txBox="1"/>
-          <p:nvPr/>
-        </p:nvSpPr>
-        <p:spPr>
-          <a:xfrm>
-            <a:off x="950319" y="1533957"/>
-            <a:ext cx="2101281" cy="1323439"/>
-          </a:xfrm>
-          <a:prstGeom prst="rect">
-            <a:avLst/>
-          </a:prstGeom>
-          <a:noFill/>
-        </p:spPr>
-        <p:txBody>
-          <a:bodyPr wrap="none" rtlCol="0">
-            <a:spAutoFit/>
-          </a:bodyPr>
-          <a:lstStyle/>
-          <a:p>
-            <a:pPr marL="342900" indent="-342900">
-              <a:buFont typeface="Arial" panose="020B0604020202020204" pitchFamily="34" charset="0"/>
-              <a:buChar char="•"/>
-            </a:pPr>
-            <a:r>
-              <a:rPr lang="en-US" sz="2000" dirty="0">
-                <a:solidFill>
-                  <a:srgbClr val="05BE99"/>
-                </a:solidFill>
-              </a:rPr>
-              <a:t>Reproducibility</a:t>
-            </a:r>
-          </a:p>
-          <a:p>
-            <a:pPr marL="342900" indent="-342900">
-              <a:buFont typeface="Arial" panose="020B0604020202020204" pitchFamily="34" charset="0"/>
-              <a:buChar char="•"/>
-            </a:pPr>
-            <a:r>
-              <a:rPr lang="en-US" sz="2000" dirty="0">
-                <a:solidFill>
-                  <a:srgbClr val="05BE99"/>
-                </a:solidFill>
-              </a:rPr>
-              <a:t>Scalability</a:t>
-            </a:r>
-          </a:p>
-          <a:p>
-            <a:pPr marL="342900" indent="-342900">
-              <a:buFont typeface="Arial" panose="020B0604020202020204" pitchFamily="34" charset="0"/>
-              <a:buChar char="•"/>
-            </a:pPr>
-            <a:r>
-              <a:rPr lang="en-US" sz="2000" dirty="0">
-                <a:solidFill>
-                  <a:srgbClr val="05BE99"/>
-                </a:solidFill>
-              </a:rPr>
-              <a:t>Resumability</a:t>
-            </a:r>
-          </a:p>
-          <a:p>
-            <a:pPr marL="342900" indent="-342900">
-              <a:buFont typeface="Arial" panose="020B0604020202020204" pitchFamily="34" charset="0"/>
-              <a:buChar char="•"/>
-            </a:pPr>
-            <a:r>
-              <a:rPr lang="en-US" sz="2000" dirty="0">
-                <a:solidFill>
-                  <a:srgbClr val="05BE99"/>
-                </a:solidFill>
-              </a:rPr>
-              <a:t>Portability</a:t>
-            </a:r>
           </a:p>
         </p:txBody>
       </p:sp>
@@ -11778,7 +13599,7 @@
 </p:sld>
 </file>
 
-<file path=ppt/slides/slide5.xml><?xml version="1.0" encoding="utf-8"?>
+<file path=ppt/slides/slide6.xml><?xml version="1.0" encoding="utf-8"?>
 <p:sld xmlns:a="http://schemas.openxmlformats.org/drawingml/2006/main" xmlns:r="http://schemas.openxmlformats.org/officeDocument/2006/relationships" xmlns:p="http://schemas.openxmlformats.org/presentationml/2006/main">
   <p:cSld>
     <p:spTree>
@@ -11831,10 +13652,10 @@
       </p:sp>
       <p:sp>
         <p:nvSpPr>
-          <p:cNvPr id="14" name="TextBox 13">
-            <a:extLst>
-              <a:ext uri="{FF2B5EF4-FFF2-40B4-BE49-F238E27FC236}">
-                <a16:creationId xmlns:a16="http://schemas.microsoft.com/office/drawing/2014/main" id="{0B7244FC-66C5-6BA3-F78B-D5C8EC1C259C}"/>
+          <p:cNvPr id="12" name="TextBox 11">
+            <a:extLst>
+              <a:ext uri="{FF2B5EF4-FFF2-40B4-BE49-F238E27FC236}">
+                <a16:creationId xmlns:a16="http://schemas.microsoft.com/office/drawing/2014/main" id="{169864BF-15EE-EE46-47A5-B636525E77CF}"/>
               </a:ext>
             </a:extLst>
           </p:cNvPr>
@@ -11843,93 +13664,8 @@
         </p:nvSpPr>
         <p:spPr>
           <a:xfrm>
-            <a:off x="950319" y="1533957"/>
-            <a:ext cx="2101281" cy="1323439"/>
-          </a:xfrm>
-          <a:prstGeom prst="rect">
-            <a:avLst/>
-          </a:prstGeom>
-          <a:noFill/>
-        </p:spPr>
-        <p:txBody>
-          <a:bodyPr wrap="none" rtlCol="0">
-            <a:spAutoFit/>
-          </a:bodyPr>
-          <a:lstStyle/>
-          <a:p>
-            <a:pPr marL="342900" indent="-342900">
-              <a:buFont typeface="Arial" panose="020B0604020202020204" pitchFamily="34" charset="0"/>
-              <a:buChar char="•"/>
-            </a:pPr>
-            <a:r>
-              <a:rPr lang="en-US" sz="2000" dirty="0">
-                <a:solidFill>
-                  <a:srgbClr val="05BE99"/>
-                </a:solidFill>
-              </a:rPr>
-              <a:t>Reproducibility</a:t>
-            </a:r>
-          </a:p>
-          <a:p>
-            <a:pPr marL="342900" indent="-342900">
-              <a:buFont typeface="Arial" panose="020B0604020202020204" pitchFamily="34" charset="0"/>
-              <a:buChar char="•"/>
-            </a:pPr>
-            <a:r>
-              <a:rPr lang="en-US" sz="2000" dirty="0">
-                <a:solidFill>
-                  <a:srgbClr val="05BE99"/>
-                </a:solidFill>
-              </a:rPr>
-              <a:t>Scalability</a:t>
-            </a:r>
-          </a:p>
-          <a:p>
-            <a:pPr marL="342900" indent="-342900">
-              <a:buFont typeface="Arial" panose="020B0604020202020204" pitchFamily="34" charset="0"/>
-              <a:buChar char="•"/>
-            </a:pPr>
-            <a:r>
-              <a:rPr lang="en-US" sz="2000" dirty="0">
-                <a:solidFill>
-                  <a:srgbClr val="05BE99"/>
-                </a:solidFill>
-              </a:rPr>
-              <a:t>Resumability</a:t>
-            </a:r>
-          </a:p>
-          <a:p>
-            <a:pPr marL="342900" indent="-342900">
-              <a:buFont typeface="Arial" panose="020B0604020202020204" pitchFamily="34" charset="0"/>
-              <a:buChar char="•"/>
-            </a:pPr>
-            <a:r>
-              <a:rPr lang="en-US" sz="2000" dirty="0">
-                <a:solidFill>
-                  <a:srgbClr val="05BE99"/>
-                </a:solidFill>
-              </a:rPr>
-              <a:t>Portability</a:t>
-            </a:r>
-          </a:p>
-        </p:txBody>
-      </p:sp>
-      <p:sp>
-        <p:nvSpPr>
-          <p:cNvPr id="12" name="TextBox 11">
-            <a:extLst>
-              <a:ext uri="{FF2B5EF4-FFF2-40B4-BE49-F238E27FC236}">
-                <a16:creationId xmlns:a16="http://schemas.microsoft.com/office/drawing/2014/main" id="{169864BF-15EE-EE46-47A5-B636525E77CF}"/>
-              </a:ext>
-            </a:extLst>
-          </p:cNvPr>
-          <p:cNvSpPr txBox="1"/>
-          <p:nvPr/>
-        </p:nvSpPr>
-        <p:spPr>
-          <a:xfrm>
-            <a:off x="4478482" y="1695080"/>
-            <a:ext cx="6095010" cy="1200329"/>
+            <a:off x="1101437" y="1795005"/>
+            <a:ext cx="10592497" cy="923330"/>
           </a:xfrm>
           <a:prstGeom prst="rect">
             <a:avLst/>
@@ -11978,134 +13714,470 @@
           </a:p>
         </p:txBody>
       </p:sp>
+      <p:sp>
+        <p:nvSpPr>
+          <p:cNvPr id="3" name="Rectangle 2">
+            <a:extLst>
+              <a:ext uri="{FF2B5EF4-FFF2-40B4-BE49-F238E27FC236}">
+                <a16:creationId xmlns:a16="http://schemas.microsoft.com/office/drawing/2014/main" id="{823D2CD7-CC3F-89A6-18D7-1872512111FC}"/>
+              </a:ext>
+            </a:extLst>
+          </p:cNvPr>
+          <p:cNvSpPr/>
+          <p:nvPr/>
+        </p:nvSpPr>
+        <p:spPr>
+          <a:xfrm>
+            <a:off x="1101437" y="2959082"/>
+            <a:ext cx="2238498" cy="1030035"/>
+          </a:xfrm>
+          <a:prstGeom prst="rect">
+            <a:avLst/>
+          </a:prstGeom>
+          <a:solidFill>
+            <a:srgbClr val="05BE99"/>
+          </a:solidFill>
+          <a:ln>
+            <a:noFill/>
+          </a:ln>
+        </p:spPr>
+        <p:style>
+          <a:lnRef idx="2">
+            <a:schemeClr val="accent1">
+              <a:shade val="15000"/>
+            </a:schemeClr>
+          </a:lnRef>
+          <a:fillRef idx="1">
+            <a:schemeClr val="accent1"/>
+          </a:fillRef>
+          <a:effectRef idx="0">
+            <a:schemeClr val="accent1"/>
+          </a:effectRef>
+          <a:fontRef idx="minor">
+            <a:schemeClr val="lt1"/>
+          </a:fontRef>
+        </p:style>
+        <p:txBody>
+          <a:bodyPr rtlCol="0" anchor="ctr"/>
+          <a:lstStyle/>
+          <a:p>
+            <a:pPr algn="ctr"/>
+            <a:r>
+              <a:rPr lang="en-US" dirty="0"/>
+              <a:t>Reproducibility</a:t>
+            </a:r>
+          </a:p>
+        </p:txBody>
+      </p:sp>
+      <p:sp>
+        <p:nvSpPr>
+          <p:cNvPr id="4" name="Rectangle 3">
+            <a:extLst>
+              <a:ext uri="{FF2B5EF4-FFF2-40B4-BE49-F238E27FC236}">
+                <a16:creationId xmlns:a16="http://schemas.microsoft.com/office/drawing/2014/main" id="{5BDFA295-1B14-B9F3-E2E1-5E4BE5039965}"/>
+              </a:ext>
+            </a:extLst>
+          </p:cNvPr>
+          <p:cNvSpPr/>
+          <p:nvPr/>
+        </p:nvSpPr>
+        <p:spPr>
+          <a:xfrm>
+            <a:off x="1101437" y="4470606"/>
+            <a:ext cx="2238498" cy="1030035"/>
+          </a:xfrm>
+          <a:prstGeom prst="rect">
+            <a:avLst/>
+          </a:prstGeom>
+          <a:solidFill>
+            <a:srgbClr val="05BE99"/>
+          </a:solidFill>
+          <a:ln>
+            <a:noFill/>
+          </a:ln>
+        </p:spPr>
+        <p:style>
+          <a:lnRef idx="2">
+            <a:schemeClr val="accent1">
+              <a:shade val="15000"/>
+            </a:schemeClr>
+          </a:lnRef>
+          <a:fillRef idx="1">
+            <a:schemeClr val="accent1"/>
+          </a:fillRef>
+          <a:effectRef idx="0">
+            <a:schemeClr val="accent1"/>
+          </a:effectRef>
+          <a:fontRef idx="minor">
+            <a:schemeClr val="lt1"/>
+          </a:fontRef>
+        </p:style>
+        <p:txBody>
+          <a:bodyPr rtlCol="0" anchor="ctr"/>
+          <a:lstStyle/>
+          <a:p>
+            <a:pPr algn="ctr"/>
+            <a:r>
+              <a:rPr lang="en-US" dirty="0"/>
+              <a:t>Scalability</a:t>
+            </a:r>
+          </a:p>
+        </p:txBody>
+      </p:sp>
+      <p:sp>
+        <p:nvSpPr>
+          <p:cNvPr id="5" name="Rectangle 4">
+            <a:extLst>
+              <a:ext uri="{FF2B5EF4-FFF2-40B4-BE49-F238E27FC236}">
+                <a16:creationId xmlns:a16="http://schemas.microsoft.com/office/drawing/2014/main" id="{9D6F392F-E495-F8D9-5BB9-F8D6DB2D6FC6}"/>
+              </a:ext>
+            </a:extLst>
+          </p:cNvPr>
+          <p:cNvSpPr/>
+          <p:nvPr/>
+        </p:nvSpPr>
+        <p:spPr>
+          <a:xfrm>
+            <a:off x="6611734" y="2959081"/>
+            <a:ext cx="2238498" cy="1030035"/>
+          </a:xfrm>
+          <a:prstGeom prst="rect">
+            <a:avLst/>
+          </a:prstGeom>
+          <a:solidFill>
+            <a:srgbClr val="05BE99"/>
+          </a:solidFill>
+          <a:ln>
+            <a:noFill/>
+          </a:ln>
+        </p:spPr>
+        <p:style>
+          <a:lnRef idx="2">
+            <a:schemeClr val="accent1">
+              <a:shade val="15000"/>
+            </a:schemeClr>
+          </a:lnRef>
+          <a:fillRef idx="1">
+            <a:schemeClr val="accent1"/>
+          </a:fillRef>
+          <a:effectRef idx="0">
+            <a:schemeClr val="accent1"/>
+          </a:effectRef>
+          <a:fontRef idx="minor">
+            <a:schemeClr val="lt1"/>
+          </a:fontRef>
+        </p:style>
+        <p:txBody>
+          <a:bodyPr rtlCol="0" anchor="ctr"/>
+          <a:lstStyle/>
+          <a:p>
+            <a:pPr algn="ctr"/>
+            <a:r>
+              <a:rPr lang="en-US" dirty="0"/>
+              <a:t>Resumability</a:t>
+            </a:r>
+          </a:p>
+        </p:txBody>
+      </p:sp>
+      <p:sp>
+        <p:nvSpPr>
+          <p:cNvPr id="6" name="Rectangle 5">
+            <a:extLst>
+              <a:ext uri="{FF2B5EF4-FFF2-40B4-BE49-F238E27FC236}">
+                <a16:creationId xmlns:a16="http://schemas.microsoft.com/office/drawing/2014/main" id="{DFDD6438-E0CD-D68E-B250-1A51C751835B}"/>
+              </a:ext>
+            </a:extLst>
+          </p:cNvPr>
+          <p:cNvSpPr/>
+          <p:nvPr/>
+        </p:nvSpPr>
+        <p:spPr>
+          <a:xfrm>
+            <a:off x="6611734" y="4470605"/>
+            <a:ext cx="2238498" cy="1030035"/>
+          </a:xfrm>
+          <a:prstGeom prst="rect">
+            <a:avLst/>
+          </a:prstGeom>
+          <a:solidFill>
+            <a:srgbClr val="05BE99"/>
+          </a:solidFill>
+          <a:ln>
+            <a:noFill/>
+          </a:ln>
+        </p:spPr>
+        <p:style>
+          <a:lnRef idx="2">
+            <a:schemeClr val="accent1">
+              <a:shade val="15000"/>
+            </a:schemeClr>
+          </a:lnRef>
+          <a:fillRef idx="1">
+            <a:schemeClr val="accent1"/>
+          </a:fillRef>
+          <a:effectRef idx="0">
+            <a:schemeClr val="accent1"/>
+          </a:effectRef>
+          <a:fontRef idx="minor">
+            <a:schemeClr val="lt1"/>
+          </a:fontRef>
+        </p:style>
+        <p:txBody>
+          <a:bodyPr rtlCol="0" anchor="ctr"/>
+          <a:lstStyle/>
+          <a:p>
+            <a:pPr algn="ctr"/>
+            <a:r>
+              <a:rPr lang="en-US" dirty="0"/>
+              <a:t>Portability</a:t>
+            </a:r>
+          </a:p>
+        </p:txBody>
+      </p:sp>
+      <p:sp>
+        <p:nvSpPr>
+          <p:cNvPr id="7" name="Rectangle 6">
+            <a:extLst>
+              <a:ext uri="{FF2B5EF4-FFF2-40B4-BE49-F238E27FC236}">
+                <a16:creationId xmlns:a16="http://schemas.microsoft.com/office/drawing/2014/main" id="{741E6540-2F52-D6C3-4881-D8B39AE12F87}"/>
+              </a:ext>
+            </a:extLst>
+          </p:cNvPr>
+          <p:cNvSpPr/>
+          <p:nvPr/>
+        </p:nvSpPr>
+        <p:spPr>
+          <a:xfrm>
+            <a:off x="3339935" y="2959081"/>
+            <a:ext cx="2238498" cy="1030035"/>
+          </a:xfrm>
+          <a:prstGeom prst="rect">
+            <a:avLst/>
+          </a:prstGeom>
+          <a:solidFill>
+            <a:srgbClr val="05BE99">
+              <a:alpha val="50980"/>
+            </a:srgbClr>
+          </a:solidFill>
+          <a:ln>
+            <a:noFill/>
+          </a:ln>
+        </p:spPr>
+        <p:style>
+          <a:lnRef idx="2">
+            <a:schemeClr val="accent1">
+              <a:shade val="15000"/>
+            </a:schemeClr>
+          </a:lnRef>
+          <a:fillRef idx="1">
+            <a:schemeClr val="accent1"/>
+          </a:fillRef>
+          <a:effectRef idx="0">
+            <a:schemeClr val="accent1"/>
+          </a:effectRef>
+          <a:fontRef idx="minor">
+            <a:schemeClr val="lt1"/>
+          </a:fontRef>
+        </p:style>
+        <p:txBody>
+          <a:bodyPr rtlCol="0" anchor="ctr"/>
+          <a:lstStyle/>
+          <a:p>
+            <a:r>
+              <a:rPr lang="en-US" sz="1400" dirty="0">
+                <a:solidFill>
+                  <a:schemeClr val="tx1"/>
+                </a:solidFill>
+              </a:rPr>
+              <a:t>Same inputs, same software, same results, every time you run it.</a:t>
+            </a:r>
+          </a:p>
+        </p:txBody>
+      </p:sp>
+      <p:sp>
+        <p:nvSpPr>
+          <p:cNvPr id="8" name="Rectangle 7">
+            <a:extLst>
+              <a:ext uri="{FF2B5EF4-FFF2-40B4-BE49-F238E27FC236}">
+                <a16:creationId xmlns:a16="http://schemas.microsoft.com/office/drawing/2014/main" id="{4D355D74-D31A-1690-F0DD-C89FCF54AFCB}"/>
+              </a:ext>
+            </a:extLst>
+          </p:cNvPr>
+          <p:cNvSpPr/>
+          <p:nvPr/>
+        </p:nvSpPr>
+        <p:spPr>
+          <a:xfrm>
+            <a:off x="8850232" y="2959080"/>
+            <a:ext cx="2238498" cy="1030035"/>
+          </a:xfrm>
+          <a:prstGeom prst="rect">
+            <a:avLst/>
+          </a:prstGeom>
+          <a:solidFill>
+            <a:srgbClr val="05BE99">
+              <a:alpha val="50980"/>
+            </a:srgbClr>
+          </a:solidFill>
+          <a:ln>
+            <a:noFill/>
+          </a:ln>
+        </p:spPr>
+        <p:style>
+          <a:lnRef idx="2">
+            <a:schemeClr val="accent1">
+              <a:shade val="15000"/>
+            </a:schemeClr>
+          </a:lnRef>
+          <a:fillRef idx="1">
+            <a:schemeClr val="accent1"/>
+          </a:fillRef>
+          <a:effectRef idx="0">
+            <a:schemeClr val="accent1"/>
+          </a:effectRef>
+          <a:fontRef idx="minor">
+            <a:schemeClr val="lt1"/>
+          </a:fontRef>
+        </p:style>
+        <p:txBody>
+          <a:bodyPr rtlCol="0" anchor="ctr"/>
+          <a:lstStyle/>
+          <a:p>
+            <a:r>
+              <a:rPr lang="en-US" sz="1400" dirty="0">
+                <a:solidFill>
+                  <a:schemeClr val="tx1"/>
+                </a:solidFill>
+              </a:rPr>
+              <a:t>If a step fails, fix it and pick up where you left off.</a:t>
+            </a:r>
+          </a:p>
+        </p:txBody>
+      </p:sp>
+      <p:sp>
+        <p:nvSpPr>
+          <p:cNvPr id="9" name="Rectangle 8">
+            <a:extLst>
+              <a:ext uri="{FF2B5EF4-FFF2-40B4-BE49-F238E27FC236}">
+                <a16:creationId xmlns:a16="http://schemas.microsoft.com/office/drawing/2014/main" id="{82AD6DB5-F634-5CF4-7AD0-6BB82479DB7A}"/>
+              </a:ext>
+            </a:extLst>
+          </p:cNvPr>
+          <p:cNvSpPr/>
+          <p:nvPr/>
+        </p:nvSpPr>
+        <p:spPr>
+          <a:xfrm>
+            <a:off x="3339935" y="4470606"/>
+            <a:ext cx="2238498" cy="1030035"/>
+          </a:xfrm>
+          <a:prstGeom prst="rect">
+            <a:avLst/>
+          </a:prstGeom>
+          <a:solidFill>
+            <a:srgbClr val="05BE99">
+              <a:alpha val="50980"/>
+            </a:srgbClr>
+          </a:solidFill>
+          <a:ln>
+            <a:noFill/>
+          </a:ln>
+        </p:spPr>
+        <p:style>
+          <a:lnRef idx="2">
+            <a:schemeClr val="accent1">
+              <a:shade val="15000"/>
+            </a:schemeClr>
+          </a:lnRef>
+          <a:fillRef idx="1">
+            <a:schemeClr val="accent1"/>
+          </a:fillRef>
+          <a:effectRef idx="0">
+            <a:schemeClr val="accent1"/>
+          </a:effectRef>
+          <a:fontRef idx="minor">
+            <a:schemeClr val="lt1"/>
+          </a:fontRef>
+        </p:style>
+        <p:txBody>
+          <a:bodyPr rtlCol="0" anchor="ctr"/>
+          <a:lstStyle/>
+          <a:p>
+            <a:r>
+              <a:rPr lang="en-US" sz="1400" dirty="0">
+                <a:solidFill>
+                  <a:schemeClr val="tx1"/>
+                </a:solidFill>
+              </a:rPr>
+              <a:t>One sample or one thousand: the pipeline code doesn't change.</a:t>
+            </a:r>
+          </a:p>
+        </p:txBody>
+      </p:sp>
+      <p:sp>
+        <p:nvSpPr>
+          <p:cNvPr id="10" name="Rectangle 9">
+            <a:extLst>
+              <a:ext uri="{FF2B5EF4-FFF2-40B4-BE49-F238E27FC236}">
+                <a16:creationId xmlns:a16="http://schemas.microsoft.com/office/drawing/2014/main" id="{1F940946-C49C-D981-4AF4-3FD0D3A9545A}"/>
+              </a:ext>
+            </a:extLst>
+          </p:cNvPr>
+          <p:cNvSpPr/>
+          <p:nvPr/>
+        </p:nvSpPr>
+        <p:spPr>
+          <a:xfrm>
+            <a:off x="8850232" y="4470604"/>
+            <a:ext cx="2238498" cy="1030035"/>
+          </a:xfrm>
+          <a:prstGeom prst="rect">
+            <a:avLst/>
+          </a:prstGeom>
+          <a:solidFill>
+            <a:srgbClr val="05BE99">
+              <a:alpha val="50980"/>
+            </a:srgbClr>
+          </a:solidFill>
+          <a:ln>
+            <a:noFill/>
+          </a:ln>
+        </p:spPr>
+        <p:style>
+          <a:lnRef idx="2">
+            <a:schemeClr val="accent1">
+              <a:shade val="15000"/>
+            </a:schemeClr>
+          </a:lnRef>
+          <a:fillRef idx="1">
+            <a:schemeClr val="accent1"/>
+          </a:fillRef>
+          <a:effectRef idx="0">
+            <a:schemeClr val="accent1"/>
+          </a:effectRef>
+          <a:fontRef idx="minor">
+            <a:schemeClr val="lt1"/>
+          </a:fontRef>
+        </p:style>
+        <p:txBody>
+          <a:bodyPr rtlCol="0" anchor="ctr"/>
+          <a:lstStyle/>
+          <a:p>
+            <a:r>
+              <a:rPr lang="en-US" sz="1400" dirty="0">
+                <a:solidFill>
+                  <a:schemeClr val="tx1"/>
+                </a:solidFill>
+              </a:rPr>
+              <a:t>Run on a laptop, HPC, or cloud by changing config, not code.</a:t>
+            </a:r>
+          </a:p>
+        </p:txBody>
+      </p:sp>
     </p:spTree>
     <p:extLst>
       <p:ext uri="{BB962C8B-B14F-4D97-AF65-F5344CB8AC3E}">
         <p14:creationId xmlns:p14="http://schemas.microsoft.com/office/powerpoint/2010/main" val="3424635678"/>
-      </p:ext>
-    </p:extLst>
-  </p:cSld>
-  <p:clrMapOvr>
-    <a:masterClrMapping/>
-  </p:clrMapOvr>
-</p:sld>
-</file>
-
-<file path=ppt/slides/slide6.xml><?xml version="1.0" encoding="utf-8"?>
-<p:sld xmlns:a="http://schemas.openxmlformats.org/drawingml/2006/main" xmlns:r="http://schemas.openxmlformats.org/officeDocument/2006/relationships" xmlns:p="http://schemas.openxmlformats.org/presentationml/2006/main">
-  <p:cSld>
-    <p:spTree>
-      <p:nvGrpSpPr>
-        <p:cNvPr id="1" name="">
-          <a:extLst>
-            <a:ext uri="{FF2B5EF4-FFF2-40B4-BE49-F238E27FC236}">
-              <a16:creationId xmlns:a16="http://schemas.microsoft.com/office/drawing/2014/main" id="{644F7E96-FE70-D22B-728F-D70B24A20394}"/>
-            </a:ext>
-          </a:extLst>
-        </p:cNvPr>
-        <p:cNvGrpSpPr/>
-        <p:nvPr/>
-      </p:nvGrpSpPr>
-      <p:grpSpPr>
-        <a:xfrm>
-          <a:off x="0" y="0"/>
-          <a:ext cx="0" cy="0"/>
-          <a:chOff x="0" y="0"/>
-          <a:chExt cx="0" cy="0"/>
-        </a:xfrm>
-      </p:grpSpPr>
-      <p:sp>
-        <p:nvSpPr>
-          <p:cNvPr id="2" name="Title 1">
-            <a:extLst>
-              <a:ext uri="{FF2B5EF4-FFF2-40B4-BE49-F238E27FC236}">
-                <a16:creationId xmlns:a16="http://schemas.microsoft.com/office/drawing/2014/main" id="{D059EC32-4961-26B6-1CBB-B03560143C47}"/>
-              </a:ext>
-            </a:extLst>
-          </p:cNvPr>
-          <p:cNvSpPr>
-            <a:spLocks noGrp="1"/>
-          </p:cNvSpPr>
-          <p:nvPr>
-            <p:ph type="title"/>
-          </p:nvPr>
-        </p:nvSpPr>
-        <p:spPr/>
-        <p:txBody>
-          <a:bodyPr/>
-          <a:lstStyle/>
-          <a:p>
-            <a:r>
-              <a:rPr lang="en-US" dirty="0"/>
-              <a:t>Pipeline managers</a:t>
-            </a:r>
-          </a:p>
-        </p:txBody>
-      </p:sp>
-      <p:pic>
-        <p:nvPicPr>
-          <p:cNvPr id="4" name="Picture 3" descr="Bioinformatics Tools: Nextflow &amp; SnakeMake — — How they are integrated with  CI/CD pipeline | by MarinaYutingS | Medium">
-            <a:extLst>
-              <a:ext uri="{FF2B5EF4-FFF2-40B4-BE49-F238E27FC236}">
-                <a16:creationId xmlns:a16="http://schemas.microsoft.com/office/drawing/2014/main" id="{D63B8BC4-A23C-F2A8-0629-3866F8A2310B}"/>
-              </a:ext>
-            </a:extLst>
-          </p:cNvPr>
-          <p:cNvPicPr>
-            <a:picLocks noChangeAspect="1"/>
-          </p:cNvPicPr>
-          <p:nvPr/>
-        </p:nvPicPr>
-        <p:blipFill>
-          <a:blip r:embed="rId2"/>
-          <a:stretch>
-            <a:fillRect/>
-          </a:stretch>
-        </p:blipFill>
-        <p:spPr>
-          <a:xfrm>
-            <a:off x="1177446" y="1690688"/>
-            <a:ext cx="3791559" cy="1161499"/>
-          </a:xfrm>
-          <a:prstGeom prst="rect">
-            <a:avLst/>
-          </a:prstGeom>
-        </p:spPr>
-      </p:pic>
-      <p:pic>
-        <p:nvPicPr>
-          <p:cNvPr id="5" name="Picture 4" descr="GitHub - nextflow-io/nextflow: A DSL for data-driven computational  pipelines · GitHub">
-            <a:extLst>
-              <a:ext uri="{FF2B5EF4-FFF2-40B4-BE49-F238E27FC236}">
-                <a16:creationId xmlns:a16="http://schemas.microsoft.com/office/drawing/2014/main" id="{BA116F7A-C0BC-C0C6-6B69-98848A5999B8}"/>
-              </a:ext>
-            </a:extLst>
-          </p:cNvPr>
-          <p:cNvPicPr>
-            <a:picLocks noChangeAspect="1"/>
-          </p:cNvPicPr>
-          <p:nvPr/>
-        </p:nvPicPr>
-        <p:blipFill>
-          <a:blip r:embed="rId3"/>
-          <a:stretch>
-            <a:fillRect/>
-          </a:stretch>
-        </p:blipFill>
-        <p:spPr>
-          <a:xfrm>
-            <a:off x="7014575" y="1309476"/>
-            <a:ext cx="3904207" cy="1952104"/>
-          </a:xfrm>
-          <a:prstGeom prst="rect">
-            <a:avLst/>
-          </a:prstGeom>
-        </p:spPr>
-      </p:pic>
-    </p:spTree>
-    <p:extLst>
-      <p:ext uri="{BB962C8B-B14F-4D97-AF65-F5344CB8AC3E}">
-        <p14:creationId xmlns:p14="http://schemas.microsoft.com/office/powerpoint/2010/main" val="1989615894"/>
       </p:ext>
     </p:extLst>
   </p:cSld>
@@ -12170,10 +14242,10 @@
       </p:sp>
       <p:pic>
         <p:nvPicPr>
-          <p:cNvPr id="5" name="Picture 4" descr="GitHub - nextflow-io/nextflow: A DSL for data-driven computational  pipelines · GitHub">
-            <a:extLst>
-              <a:ext uri="{FF2B5EF4-FFF2-40B4-BE49-F238E27FC236}">
-                <a16:creationId xmlns:a16="http://schemas.microsoft.com/office/drawing/2014/main" id="{BA2AA113-0B2D-413D-F5D3-6133DDFD2D05}"/>
+          <p:cNvPr id="3" name="Picture 2" descr="nf-core">
+            <a:extLst>
+              <a:ext uri="{FF2B5EF4-FFF2-40B4-BE49-F238E27FC236}">
+                <a16:creationId xmlns:a16="http://schemas.microsoft.com/office/drawing/2014/main" id="{0BAEB4E7-8909-C38C-3502-1B49BBA615A4}"/>
               </a:ext>
             </a:extLst>
           </p:cNvPr>
@@ -12183,21 +14255,339 @@
           <p:nvPr/>
         </p:nvPicPr>
         <p:blipFill>
-          <a:blip r:embed="rId2"/>
+          <a:blip r:embed="rId3"/>
           <a:stretch>
             <a:fillRect/>
           </a:stretch>
         </p:blipFill>
         <p:spPr>
           <a:xfrm>
-            <a:off x="7014575" y="1309476"/>
-            <a:ext cx="3904207" cy="1952104"/>
+            <a:off x="9543334" y="3482772"/>
+            <a:ext cx="2515114" cy="1414752"/>
           </a:xfrm>
           <a:prstGeom prst="rect">
             <a:avLst/>
           </a:prstGeom>
         </p:spPr>
       </p:pic>
+      <p:sp>
+        <p:nvSpPr>
+          <p:cNvPr id="4" name="TextBox 3">
+            <a:extLst>
+              <a:ext uri="{FF2B5EF4-FFF2-40B4-BE49-F238E27FC236}">
+                <a16:creationId xmlns:a16="http://schemas.microsoft.com/office/drawing/2014/main" id="{B8FEDD9A-01F9-3CD3-5748-F745EF9B203B}"/>
+              </a:ext>
+            </a:extLst>
+          </p:cNvPr>
+          <p:cNvSpPr txBox="1"/>
+          <p:nvPr/>
+        </p:nvSpPr>
+        <p:spPr>
+          <a:xfrm>
+            <a:off x="876013" y="1437961"/>
+            <a:ext cx="8477108" cy="3693319"/>
+          </a:xfrm>
+          <a:prstGeom prst="rect">
+            <a:avLst/>
+          </a:prstGeom>
+          <a:noFill/>
+        </p:spPr>
+        <p:txBody>
+          <a:bodyPr wrap="square" rtlCol="0">
+            <a:spAutoFit/>
+          </a:bodyPr>
+          <a:lstStyle/>
+          <a:p>
+            <a:r>
+              <a:rPr lang="en-US" dirty="0"/>
+              <a:t>A workflow language built for data-intensive bioinformatics on any infrastructure.</a:t>
+            </a:r>
+          </a:p>
+          <a:p>
+            <a:endParaRPr lang="en-US" dirty="0"/>
+          </a:p>
+          <a:p>
+            <a:endParaRPr lang="en-US" dirty="0"/>
+          </a:p>
+          <a:p>
+            <a:pPr marL="285750" indent="-285750">
+              <a:buFont typeface="Arial" panose="020B0604020202020204" pitchFamily="34" charset="0"/>
+              <a:buChar char="•"/>
+            </a:pPr>
+            <a:r>
+              <a:rPr lang="en-US" b="1" dirty="0"/>
+              <a:t>Use the tools you already know.</a:t>
+            </a:r>
+            <a:r>
+              <a:rPr lang="en-US" dirty="0"/>
+              <a:t> Each step is a bash script, or Python, R, Perl. </a:t>
+            </a:r>
+            <a:r>
+              <a:rPr lang="en-US" dirty="0" err="1"/>
+              <a:t>Nextflow</a:t>
+            </a:r>
+            <a:r>
+              <a:rPr lang="en-US" dirty="0"/>
+              <a:t> wraps your commands; it doesn't replace them.</a:t>
+            </a:r>
+          </a:p>
+          <a:p>
+            <a:pPr marL="285750" indent="-285750">
+              <a:buFont typeface="Arial" panose="020B0604020202020204" pitchFamily="34" charset="0"/>
+              <a:buChar char="•"/>
+            </a:pPr>
+            <a:r>
+              <a:rPr lang="en-US" b="1" dirty="0"/>
+              <a:t>Data flows, work runs in parallel.</a:t>
+            </a:r>
+            <a:r>
+              <a:rPr lang="en-US" dirty="0"/>
+              <a:t> Channels pass files between steps, and each sample runs as soon as its inputs are ready.</a:t>
+            </a:r>
+          </a:p>
+          <a:p>
+            <a:pPr marL="285750" indent="-285750">
+              <a:buFont typeface="Arial" panose="020B0604020202020204" pitchFamily="34" charset="0"/>
+              <a:buChar char="•"/>
+            </a:pPr>
+            <a:r>
+              <a:rPr lang="en-US" b="1" dirty="0"/>
+              <a:t>Built-in HPC and cloud support.</a:t>
+            </a:r>
+            <a:r>
+              <a:rPr lang="en-US" dirty="0"/>
+              <a:t> SLURM, AWS, Google Cloud, Kubernetes: swap executors in config.</a:t>
+            </a:r>
+          </a:p>
+          <a:p>
+            <a:pPr marL="285750" indent="-285750">
+              <a:buFont typeface="Arial" panose="020B0604020202020204" pitchFamily="34" charset="0"/>
+              <a:buChar char="•"/>
+            </a:pPr>
+            <a:r>
+              <a:rPr lang="en-US" b="1" dirty="0"/>
+              <a:t>First-class containers.</a:t>
+            </a:r>
+            <a:r>
+              <a:rPr lang="en-US" dirty="0"/>
+              <a:t> Docker, </a:t>
+            </a:r>
+            <a:r>
+              <a:rPr lang="en-US" dirty="0" err="1"/>
+              <a:t>Apptainer</a:t>
+            </a:r>
+            <a:r>
+              <a:rPr lang="en-US" dirty="0"/>
+              <a:t>, and Conda are supported per process.</a:t>
+            </a:r>
+          </a:p>
+          <a:p>
+            <a:pPr marL="285750" indent="-285750">
+              <a:buFont typeface="Arial" panose="020B0604020202020204" pitchFamily="34" charset="0"/>
+              <a:buChar char="•"/>
+            </a:pPr>
+            <a:r>
+              <a:rPr lang="en-US" b="1" dirty="0"/>
+              <a:t>A large community.</a:t>
+            </a:r>
+            <a:r>
+              <a:rPr lang="en-US" dirty="0"/>
+              <a:t> </a:t>
+            </a:r>
+            <a:r>
+              <a:rPr lang="en-US" dirty="0" err="1"/>
+              <a:t>nf</a:t>
+            </a:r>
+            <a:r>
+              <a:rPr lang="en-US" dirty="0"/>
+              <a:t>-core offers 100+ peer-reviewed pipelines and 1,000+ reusable modules.</a:t>
+            </a:r>
+          </a:p>
+          <a:p>
+            <a:endParaRPr lang="en-US" dirty="0"/>
+          </a:p>
+        </p:txBody>
+      </p:sp>
+      <p:grpSp>
+        <p:nvGrpSpPr>
+          <p:cNvPr id="9" name="Group 8">
+            <a:extLst>
+              <a:ext uri="{FF2B5EF4-FFF2-40B4-BE49-F238E27FC236}">
+                <a16:creationId xmlns:a16="http://schemas.microsoft.com/office/drawing/2014/main" id="{815A72C4-488A-3743-7574-E03B14A16CD0}"/>
+              </a:ext>
+            </a:extLst>
+          </p:cNvPr>
+          <p:cNvGrpSpPr/>
+          <p:nvPr/>
+        </p:nvGrpSpPr>
+        <p:grpSpPr>
+          <a:xfrm>
+            <a:off x="3005925" y="4897524"/>
+            <a:ext cx="6122602" cy="1244472"/>
+            <a:chOff x="2928829" y="5005106"/>
+            <a:chExt cx="6122602" cy="1244472"/>
+          </a:xfrm>
+        </p:grpSpPr>
+        <p:pic>
+          <p:nvPicPr>
+            <p:cNvPr id="5" name="Picture 4" descr="GitHub - nextflow-io/nextflow: A DSL for data-driven computational  pipelines · GitHub">
+              <a:extLst>
+                <a:ext uri="{FF2B5EF4-FFF2-40B4-BE49-F238E27FC236}">
+                  <a16:creationId xmlns:a16="http://schemas.microsoft.com/office/drawing/2014/main" id="{BA2AA113-0B2D-413D-F5D3-6133DDFD2D05}"/>
+                </a:ext>
+              </a:extLst>
+            </p:cNvPr>
+            <p:cNvPicPr>
+              <a:picLocks noChangeAspect="1"/>
+            </p:cNvPicPr>
+            <p:nvPr/>
+          </p:nvPicPr>
+          <p:blipFill>
+            <a:blip r:embed="rId4"/>
+            <a:stretch>
+              <a:fillRect/>
+            </a:stretch>
+          </p:blipFill>
+          <p:spPr>
+            <a:xfrm>
+              <a:off x="6562488" y="5005106"/>
+              <a:ext cx="2488943" cy="1244472"/>
+            </a:xfrm>
+            <a:prstGeom prst="rect">
+              <a:avLst/>
+            </a:prstGeom>
+          </p:spPr>
+        </p:pic>
+        <p:pic>
+          <p:nvPicPr>
+            <p:cNvPr id="7" name="Picture 6" descr="File:Snakemake logo dark.png - Wikimedia Commons">
+              <a:extLst>
+                <a:ext uri="{FF2B5EF4-FFF2-40B4-BE49-F238E27FC236}">
+                  <a16:creationId xmlns:a16="http://schemas.microsoft.com/office/drawing/2014/main" id="{1D1C2F67-198F-79CA-B577-41B9F278B6ED}"/>
+                </a:ext>
+              </a:extLst>
+            </p:cNvPr>
+            <p:cNvPicPr>
+              <a:picLocks noChangeAspect="1"/>
+            </p:cNvPicPr>
+            <p:nvPr/>
+          </p:nvPicPr>
+          <p:blipFill>
+            <a:blip r:embed="rId5"/>
+            <a:stretch>
+              <a:fillRect/>
+            </a:stretch>
+          </p:blipFill>
+          <p:spPr>
+            <a:xfrm>
+              <a:off x="2928829" y="5327756"/>
+              <a:ext cx="2434675" cy="599170"/>
+            </a:xfrm>
+            <a:prstGeom prst="rect">
+              <a:avLst/>
+            </a:prstGeom>
+          </p:spPr>
+        </p:pic>
+        <p:sp>
+          <p:nvSpPr>
+            <p:cNvPr id="8" name="TextBox 7">
+              <a:extLst>
+                <a:ext uri="{FF2B5EF4-FFF2-40B4-BE49-F238E27FC236}">
+                  <a16:creationId xmlns:a16="http://schemas.microsoft.com/office/drawing/2014/main" id="{08768EB8-D1BC-290B-73CD-0EBCFF0C21B7}"/>
+                </a:ext>
+              </a:extLst>
+            </p:cNvPr>
+            <p:cNvSpPr txBox="1"/>
+            <p:nvPr/>
+          </p:nvSpPr>
+          <p:spPr>
+            <a:xfrm>
+              <a:off x="5772056" y="5420039"/>
+              <a:ext cx="435312" cy="369332"/>
+            </a:xfrm>
+            <a:prstGeom prst="rect">
+              <a:avLst/>
+            </a:prstGeom>
+            <a:noFill/>
+          </p:spPr>
+          <p:txBody>
+            <a:bodyPr wrap="none" rtlCol="0">
+              <a:spAutoFit/>
+            </a:bodyPr>
+            <a:lstStyle/>
+            <a:p>
+              <a:r>
+                <a:rPr lang="en-US" dirty="0"/>
+                <a:t>vs.</a:t>
+              </a:r>
+            </a:p>
+          </p:txBody>
+        </p:sp>
+      </p:grpSp>
+      <p:sp>
+        <p:nvSpPr>
+          <p:cNvPr id="6" name="TextBox 5">
+            <a:extLst>
+              <a:ext uri="{FF2B5EF4-FFF2-40B4-BE49-F238E27FC236}">
+                <a16:creationId xmlns:a16="http://schemas.microsoft.com/office/drawing/2014/main" id="{BFF84B75-FE4F-33F5-A999-56A2A17CC272}"/>
+              </a:ext>
+            </a:extLst>
+          </p:cNvPr>
+          <p:cNvSpPr txBox="1"/>
+          <p:nvPr/>
+        </p:nvSpPr>
+        <p:spPr>
+          <a:xfrm>
+            <a:off x="1237533" y="5967695"/>
+            <a:ext cx="9962147" cy="646331"/>
+          </a:xfrm>
+          <a:prstGeom prst="rect">
+            <a:avLst/>
+          </a:prstGeom>
+          <a:noFill/>
+        </p:spPr>
+        <p:txBody>
+          <a:bodyPr wrap="square" rtlCol="0">
+            <a:spAutoFit/>
+          </a:bodyPr>
+          <a:lstStyle/>
+          <a:p>
+            <a:pPr algn="ctr"/>
+            <a:r>
+              <a:rPr lang="en-US" dirty="0" err="1"/>
+              <a:t>Snakemake</a:t>
+            </a:r>
+            <a:r>
+              <a:rPr lang="en-US" dirty="0"/>
+              <a:t> is </a:t>
+            </a:r>
+            <a:r>
+              <a:rPr lang="en-US" b="1" dirty="0"/>
+              <a:t>file-driven</a:t>
+            </a:r>
+            <a:r>
+              <a:rPr lang="en-US" dirty="0"/>
+              <a:t>, working backward from the outputs you want. </a:t>
+            </a:r>
+            <a:r>
+              <a:rPr lang="en-US" dirty="0" err="1"/>
+              <a:t>Nextflow</a:t>
+            </a:r>
+            <a:r>
+              <a:rPr lang="en-US" dirty="0"/>
+              <a:t> is </a:t>
+            </a:r>
+            <a:r>
+              <a:rPr lang="en-US" b="1" dirty="0"/>
+              <a:t>dataflow-driven</a:t>
+            </a:r>
+            <a:r>
+              <a:rPr lang="en-US" dirty="0"/>
+              <a:t>, pushing inputs forward through channels. </a:t>
+            </a:r>
+          </a:p>
+        </p:txBody>
+      </p:sp>
     </p:spTree>
     <p:extLst>
       <p:ext uri="{BB962C8B-B14F-4D97-AF65-F5344CB8AC3E}">
@@ -12208,79 +14598,115 @@
   <p:clrMapOvr>
     <a:masterClrMapping/>
   </p:clrMapOvr>
+  <p:timing>
+    <p:tnLst>
+      <p:par>
+        <p:cTn id="1" dur="indefinite" restart="never" nodeType="tmRoot">
+          <p:childTnLst>
+            <p:seq concurrent="1" nextAc="seek">
+              <p:cTn id="2" dur="indefinite" nodeType="mainSeq">
+                <p:childTnLst>
+                  <p:par>
+                    <p:cTn id="3" fill="hold">
+                      <p:stCondLst>
+                        <p:cond delay="indefinite"/>
+                      </p:stCondLst>
+                      <p:childTnLst>
+                        <p:par>
+                          <p:cTn id="4" fill="hold">
+                            <p:stCondLst>
+                              <p:cond delay="0"/>
+                            </p:stCondLst>
+                            <p:childTnLst>
+                              <p:par>
+                                <p:cTn id="5" presetID="1" presetClass="entr" presetSubtype="0" fill="hold" nodeType="clickEffect">
+                                  <p:stCondLst>
+                                    <p:cond delay="0"/>
+                                  </p:stCondLst>
+                                  <p:childTnLst>
+                                    <p:set>
+                                      <p:cBhvr>
+                                        <p:cTn id="6" dur="1" fill="hold">
+                                          <p:stCondLst>
+                                            <p:cond delay="0"/>
+                                          </p:stCondLst>
+                                        </p:cTn>
+                                        <p:tgtEl>
+                                          <p:spTgt spid="9"/>
+                                        </p:tgtEl>
+                                        <p:attrNameLst>
+                                          <p:attrName>style.visibility</p:attrName>
+                                        </p:attrNameLst>
+                                      </p:cBhvr>
+                                      <p:to>
+                                        <p:strVal val="visible"/>
+                                      </p:to>
+                                    </p:set>
+                                  </p:childTnLst>
+                                </p:cTn>
+                              </p:par>
+                              <p:par>
+                                <p:cTn id="7" presetID="1" presetClass="entr" presetSubtype="0" fill="hold" grpId="0" nodeType="withEffect">
+                                  <p:stCondLst>
+                                    <p:cond delay="0"/>
+                                  </p:stCondLst>
+                                  <p:childTnLst>
+                                    <p:set>
+                                      <p:cBhvr>
+                                        <p:cTn id="8" dur="1" fill="hold">
+                                          <p:stCondLst>
+                                            <p:cond delay="0"/>
+                                          </p:stCondLst>
+                                        </p:cTn>
+                                        <p:tgtEl>
+                                          <p:spTgt spid="6"/>
+                                        </p:tgtEl>
+                                        <p:attrNameLst>
+                                          <p:attrName>style.visibility</p:attrName>
+                                        </p:attrNameLst>
+                                      </p:cBhvr>
+                                      <p:to>
+                                        <p:strVal val="visible"/>
+                                      </p:to>
+                                    </p:set>
+                                  </p:childTnLst>
+                                </p:cTn>
+                              </p:par>
+                            </p:childTnLst>
+                          </p:cTn>
+                        </p:par>
+                      </p:childTnLst>
+                    </p:cTn>
+                  </p:par>
+                </p:childTnLst>
+              </p:cTn>
+              <p:prevCondLst>
+                <p:cond evt="onPrev" delay="0">
+                  <p:tgtEl>
+                    <p:sldTgt/>
+                  </p:tgtEl>
+                </p:cond>
+              </p:prevCondLst>
+              <p:nextCondLst>
+                <p:cond evt="onNext" delay="0">
+                  <p:tgtEl>
+                    <p:sldTgt/>
+                  </p:tgtEl>
+                </p:cond>
+              </p:nextCondLst>
+            </p:seq>
+          </p:childTnLst>
+        </p:cTn>
+      </p:par>
+    </p:tnLst>
+    <p:bldLst>
+      <p:bldP spid="6" grpId="0"/>
+    </p:bldLst>
+  </p:timing>
 </p:sld>
 </file>
 
 <file path=ppt/slides/slide8.xml><?xml version="1.0" encoding="utf-8"?>
-<p:sld xmlns:a="http://schemas.openxmlformats.org/drawingml/2006/main" xmlns:r="http://schemas.openxmlformats.org/officeDocument/2006/relationships" xmlns:p="http://schemas.openxmlformats.org/presentationml/2006/main">
-  <p:cSld>
-    <p:spTree>
-      <p:nvGrpSpPr>
-        <p:cNvPr id="1" name="">
-          <a:extLst>
-            <a:ext uri="{FF2B5EF4-FFF2-40B4-BE49-F238E27FC236}">
-              <a16:creationId xmlns:a16="http://schemas.microsoft.com/office/drawing/2014/main" id="{BBAD8B8A-6420-D4CC-D98C-6A20CE2FEE79}"/>
-            </a:ext>
-          </a:extLst>
-        </p:cNvPr>
-        <p:cNvGrpSpPr/>
-        <p:nvPr/>
-      </p:nvGrpSpPr>
-      <p:grpSpPr>
-        <a:xfrm>
-          <a:off x="0" y="0"/>
-          <a:ext cx="0" cy="0"/>
-          <a:chOff x="0" y="0"/>
-          <a:chExt cx="0" cy="0"/>
-        </a:xfrm>
-      </p:grpSpPr>
-      <p:sp>
-        <p:nvSpPr>
-          <p:cNvPr id="2" name="Title 1">
-            <a:extLst>
-              <a:ext uri="{FF2B5EF4-FFF2-40B4-BE49-F238E27FC236}">
-                <a16:creationId xmlns:a16="http://schemas.microsoft.com/office/drawing/2014/main" id="{189AD3CE-7C37-BFFF-26DF-8F907F2E6151}"/>
-              </a:ext>
-            </a:extLst>
-          </p:cNvPr>
-          <p:cNvSpPr>
-            <a:spLocks noGrp="1"/>
-          </p:cNvSpPr>
-          <p:nvPr>
-            <p:ph type="title"/>
-          </p:nvPr>
-        </p:nvSpPr>
-        <p:spPr>
-          <a:xfrm>
-            <a:off x="2522951" y="2337974"/>
-            <a:ext cx="10515600" cy="1325563"/>
-          </a:xfrm>
-        </p:spPr>
-        <p:txBody>
-          <a:bodyPr/>
-          <a:lstStyle/>
-          <a:p>
-            <a:r>
-              <a:rPr lang="en-US" dirty="0"/>
-              <a:t>Access to SLURM based HPC?</a:t>
-            </a:r>
-          </a:p>
-        </p:txBody>
-      </p:sp>
-    </p:spTree>
-    <p:extLst>
-      <p:ext uri="{BB962C8B-B14F-4D97-AF65-F5344CB8AC3E}">
-        <p14:creationId xmlns:p14="http://schemas.microsoft.com/office/powerpoint/2010/main" val="1180560196"/>
-      </p:ext>
-    </p:extLst>
-  </p:cSld>
-  <p:clrMapOvr>
-    <a:masterClrMapping/>
-  </p:clrMapOvr>
-</p:sld>
-</file>
-
-<file path=ppt/slides/slide9.xml><?xml version="1.0" encoding="utf-8"?>
 <p:sld xmlns:a="http://schemas.openxmlformats.org/drawingml/2006/main" xmlns:r="http://schemas.openxmlformats.org/officeDocument/2006/relationships" xmlns:p="http://schemas.openxmlformats.org/presentationml/2006/main">
   <p:cSld>
     <p:spTree>
@@ -13414,6 +15840,229 @@
       <p:bldP spid="23" grpId="0" animBg="1"/>
     </p:bldLst>
   </p:timing>
+</p:sld>
+</file>
+
+<file path=ppt/slides/slide9.xml><?xml version="1.0" encoding="utf-8"?>
+<p:sld xmlns:a="http://schemas.openxmlformats.org/drawingml/2006/main" xmlns:r="http://schemas.openxmlformats.org/officeDocument/2006/relationships" xmlns:p="http://schemas.openxmlformats.org/presentationml/2006/main">
+  <p:cSld>
+    <p:spTree>
+      <p:nvGrpSpPr>
+        <p:cNvPr id="1" name="">
+          <a:extLst>
+            <a:ext uri="{FF2B5EF4-FFF2-40B4-BE49-F238E27FC236}">
+              <a16:creationId xmlns:a16="http://schemas.microsoft.com/office/drawing/2014/main" id="{D1DE9E7D-34D7-E69A-60E0-2A1A2E83AC4E}"/>
+            </a:ext>
+          </a:extLst>
+        </p:cNvPr>
+        <p:cNvGrpSpPr/>
+        <p:nvPr/>
+      </p:nvGrpSpPr>
+      <p:grpSpPr>
+        <a:xfrm>
+          <a:off x="0" y="0"/>
+          <a:ext cx="0" cy="0"/>
+          <a:chOff x="0" y="0"/>
+          <a:chExt cx="0" cy="0"/>
+        </a:xfrm>
+      </p:grpSpPr>
+      <p:sp>
+        <p:nvSpPr>
+          <p:cNvPr id="2" name="Title 1">
+            <a:extLst>
+              <a:ext uri="{FF2B5EF4-FFF2-40B4-BE49-F238E27FC236}">
+                <a16:creationId xmlns:a16="http://schemas.microsoft.com/office/drawing/2014/main" id="{0C97E257-5254-58A5-D134-275D22ABB3ED}"/>
+              </a:ext>
+            </a:extLst>
+          </p:cNvPr>
+          <p:cNvSpPr>
+            <a:spLocks noGrp="1"/>
+          </p:cNvSpPr>
+          <p:nvPr>
+            <p:ph type="title"/>
+          </p:nvPr>
+        </p:nvSpPr>
+        <p:spPr/>
+        <p:txBody>
+          <a:bodyPr/>
+          <a:lstStyle/>
+          <a:p>
+            <a:r>
+              <a:rPr lang="en-US" dirty="0" err="1"/>
+              <a:t>Nextflow</a:t>
+            </a:r>
+            <a:r>
+              <a:rPr lang="en-US" dirty="0"/>
+              <a:t> components: </a:t>
+            </a:r>
+            <a:r>
+              <a:rPr lang="en-US" b="1" dirty="0"/>
+              <a:t>processes</a:t>
+            </a:r>
+          </a:p>
+        </p:txBody>
+      </p:sp>
+      <p:sp>
+        <p:nvSpPr>
+          <p:cNvPr id="3" name="Content Placeholder 2">
+            <a:extLst>
+              <a:ext uri="{FF2B5EF4-FFF2-40B4-BE49-F238E27FC236}">
+                <a16:creationId xmlns:a16="http://schemas.microsoft.com/office/drawing/2014/main" id="{1CC895E0-3F1B-B147-6FFB-19BA5C8C1CD7}"/>
+              </a:ext>
+            </a:extLst>
+          </p:cNvPr>
+          <p:cNvSpPr>
+            <a:spLocks noGrp="1"/>
+          </p:cNvSpPr>
+          <p:nvPr>
+            <p:ph idx="1"/>
+          </p:nvPr>
+        </p:nvSpPr>
+        <p:spPr/>
+        <p:txBody>
+          <a:bodyPr/>
+          <a:lstStyle/>
+          <a:p>
+            <a:pPr marL="0" indent="0">
+              <a:buNone/>
+            </a:pPr>
+            <a:r>
+              <a:rPr lang="en-US" b="1" dirty="0">
+                <a:solidFill>
+                  <a:schemeClr val="accent2"/>
+                </a:solidFill>
+              </a:rPr>
+              <a:t>Processes</a:t>
+            </a:r>
+            <a:r>
+              <a:rPr lang="en-US" dirty="0"/>
+              <a:t> are the basic computing units in </a:t>
+            </a:r>
+            <a:r>
+              <a:rPr lang="en-US" dirty="0" err="1"/>
+              <a:t>Nextflow</a:t>
+            </a:r>
+            <a:r>
+              <a:rPr lang="en-US" dirty="0"/>
+              <a:t>. Each process defines:</a:t>
+            </a:r>
+          </a:p>
+          <a:p>
+            <a:r>
+              <a:rPr lang="en-US" b="1" dirty="0"/>
+              <a:t>Inputs and outputs</a:t>
+            </a:r>
+            <a:r>
+              <a:rPr lang="en-US" dirty="0"/>
+              <a:t>: Data consumed and produced</a:t>
+            </a:r>
+          </a:p>
+          <a:p>
+            <a:r>
+              <a:rPr lang="en-US" b="1" dirty="0"/>
+              <a:t>Script</a:t>
+            </a:r>
+            <a:r>
+              <a:rPr lang="en-US" dirty="0"/>
+              <a:t>: The actual command or code to execute</a:t>
+            </a:r>
+          </a:p>
+          <a:p>
+            <a:r>
+              <a:rPr lang="en-US" b="1" dirty="0"/>
+              <a:t>Directives</a:t>
+            </a:r>
+            <a:r>
+              <a:rPr lang="en-US" dirty="0"/>
+              <a:t>: Resource requirements (CPU, memory, time)</a:t>
+            </a:r>
+          </a:p>
+          <a:p>
+            <a:pPr marL="0" indent="0">
+              <a:buNone/>
+            </a:pPr>
+            <a:endParaRPr lang="en-US" dirty="0"/>
+          </a:p>
+          <a:p>
+            <a:pPr marL="0" indent="0">
+              <a:buNone/>
+            </a:pPr>
+            <a:r>
+              <a:rPr lang="en-US" dirty="0"/>
+              <a:t>Think of a process as a single step in your pipeline, like "align reads" or ”run inference tool”. Processes are isolated (</a:t>
+            </a:r>
+            <a:r>
+              <a:rPr lang="en-US" b="1" dirty="0">
+                <a:solidFill>
+                  <a:schemeClr val="accent2"/>
+                </a:solidFill>
+              </a:rPr>
+              <a:t>modules</a:t>
+            </a:r>
+            <a:r>
+              <a:rPr lang="en-US" dirty="0"/>
+              <a:t>)and can be executed independently, enabling parallelization. </a:t>
+            </a:r>
+          </a:p>
+        </p:txBody>
+      </p:sp>
+      <p:pic>
+        <p:nvPicPr>
+          <p:cNvPr id="4098" name="Picture 2" descr="Manufacturing Factory Tool Icons - Free SVG &amp; PNG Manufacturing Factory Tool  Images - Noun Project">
+            <a:extLst>
+              <a:ext uri="{FF2B5EF4-FFF2-40B4-BE49-F238E27FC236}">
+                <a16:creationId xmlns:a16="http://schemas.microsoft.com/office/drawing/2014/main" id="{CF13FCC3-795D-264A-652A-5CE31D964342}"/>
+              </a:ext>
+            </a:extLst>
+          </p:cNvPr>
+          <p:cNvPicPr>
+            <a:picLocks noChangeAspect="1" noChangeArrowheads="1"/>
+          </p:cNvPicPr>
+          <p:nvPr/>
+        </p:nvPicPr>
+        <p:blipFill>
+          <a:blip r:embed="rId2">
+            <a:extLst>
+              <a:ext uri="{28A0092B-C50C-407E-A947-70E740481C1C}">
+                <a14:useLocalDpi xmlns:a14="http://schemas.microsoft.com/office/drawing/2010/main" val="0"/>
+              </a:ext>
+            </a:extLst>
+          </a:blip>
+          <a:srcRect/>
+          <a:stretch>
+            <a:fillRect/>
+          </a:stretch>
+        </p:blipFill>
+        <p:spPr bwMode="auto">
+          <a:xfrm>
+            <a:off x="9004461" y="585043"/>
+            <a:ext cx="834020" cy="834020"/>
+          </a:xfrm>
+          <a:prstGeom prst="rect">
+            <a:avLst/>
+          </a:prstGeom>
+          <a:noFill/>
+          <a:extLst>
+            <a:ext uri="{909E8E84-426E-40DD-AFC4-6F175D3DCCD1}">
+              <a14:hiddenFill xmlns:a14="http://schemas.microsoft.com/office/drawing/2010/main">
+                <a:solidFill>
+                  <a:srgbClr val="FFFFFF"/>
+                </a:solidFill>
+              </a14:hiddenFill>
+            </a:ext>
+          </a:extLst>
+        </p:spPr>
+      </p:pic>
+    </p:spTree>
+    <p:extLst>
+      <p:ext uri="{BB962C8B-B14F-4D97-AF65-F5344CB8AC3E}">
+        <p14:creationId xmlns:p14="http://schemas.microsoft.com/office/powerpoint/2010/main" val="3903298263"/>
+      </p:ext>
+    </p:extLst>
+  </p:cSld>
+  <p:clrMapOvr>
+    <a:masterClrMapping/>
+  </p:clrMapOvr>
 </p:sld>
 </file>
 

--- a/day1_material/slides/day1.pptx
+++ b/day1_material/slides/day1.pptx
@@ -220,7 +220,7 @@
           <a:p>
             <a:fld id="{09C84A49-CA76-E84D-B4CB-59BA5B0597A2}" type="datetimeFigureOut">
               <a:rPr lang="en-US" smtClean="0"/>
-              <a:t>9/29/26</a:t>
+              <a:t>9/30/26</a:t>
             </a:fld>
             <a:endParaRPr lang="en-US"/>
           </a:p>
@@ -1526,7 +1526,7 @@
           <a:p>
             <a:fld id="{EC483935-07C3-DB40-BDCF-E55515B19C93}" type="datetimeFigureOut">
               <a:rPr lang="en-US" smtClean="0"/>
-              <a:t>9/29/26</a:t>
+              <a:t>9/30/26</a:t>
             </a:fld>
             <a:endParaRPr lang="en-US"/>
           </a:p>
@@ -1724,7 +1724,7 @@
           <a:p>
             <a:fld id="{EC483935-07C3-DB40-BDCF-E55515B19C93}" type="datetimeFigureOut">
               <a:rPr lang="en-US" smtClean="0"/>
-              <a:t>9/29/26</a:t>
+              <a:t>9/30/26</a:t>
             </a:fld>
             <a:endParaRPr lang="en-US"/>
           </a:p>
@@ -1932,7 +1932,7 @@
           <a:p>
             <a:fld id="{EC483935-07C3-DB40-BDCF-E55515B19C93}" type="datetimeFigureOut">
               <a:rPr lang="en-US" smtClean="0"/>
-              <a:t>9/29/26</a:t>
+              <a:t>9/30/26</a:t>
             </a:fld>
             <a:endParaRPr lang="en-US"/>
           </a:p>
@@ -2130,7 +2130,7 @@
           <a:p>
             <a:fld id="{EC483935-07C3-DB40-BDCF-E55515B19C93}" type="datetimeFigureOut">
               <a:rPr lang="en-US" smtClean="0"/>
-              <a:t>9/29/26</a:t>
+              <a:t>9/30/26</a:t>
             </a:fld>
             <a:endParaRPr lang="en-US"/>
           </a:p>
@@ -2405,7 +2405,7 @@
           <a:p>
             <a:fld id="{EC483935-07C3-DB40-BDCF-E55515B19C93}" type="datetimeFigureOut">
               <a:rPr lang="en-US" smtClean="0"/>
-              <a:t>9/29/26</a:t>
+              <a:t>9/30/26</a:t>
             </a:fld>
             <a:endParaRPr lang="en-US"/>
           </a:p>
@@ -2670,7 +2670,7 @@
           <a:p>
             <a:fld id="{EC483935-07C3-DB40-BDCF-E55515B19C93}" type="datetimeFigureOut">
               <a:rPr lang="en-US" smtClean="0"/>
-              <a:t>9/29/26</a:t>
+              <a:t>9/30/26</a:t>
             </a:fld>
             <a:endParaRPr lang="en-US"/>
           </a:p>
@@ -3082,7 +3082,7 @@
           <a:p>
             <a:fld id="{EC483935-07C3-DB40-BDCF-E55515B19C93}" type="datetimeFigureOut">
               <a:rPr lang="en-US" smtClean="0"/>
-              <a:t>9/29/26</a:t>
+              <a:t>9/30/26</a:t>
             </a:fld>
             <a:endParaRPr lang="en-US"/>
           </a:p>
@@ -3223,7 +3223,7 @@
           <a:p>
             <a:fld id="{EC483935-07C3-DB40-BDCF-E55515B19C93}" type="datetimeFigureOut">
               <a:rPr lang="en-US" smtClean="0"/>
-              <a:t>9/29/26</a:t>
+              <a:t>9/30/26</a:t>
             </a:fld>
             <a:endParaRPr lang="en-US"/>
           </a:p>
@@ -3336,7 +3336,7 @@
           <a:p>
             <a:fld id="{EC483935-07C3-DB40-BDCF-E55515B19C93}" type="datetimeFigureOut">
               <a:rPr lang="en-US" smtClean="0"/>
-              <a:t>9/29/26</a:t>
+              <a:t>9/30/26</a:t>
             </a:fld>
             <a:endParaRPr lang="en-US"/>
           </a:p>
@@ -3647,7 +3647,7 @@
           <a:p>
             <a:fld id="{EC483935-07C3-DB40-BDCF-E55515B19C93}" type="datetimeFigureOut">
               <a:rPr lang="en-US" smtClean="0"/>
-              <a:t>9/29/26</a:t>
+              <a:t>9/30/26</a:t>
             </a:fld>
             <a:endParaRPr lang="en-US"/>
           </a:p>
@@ -3935,7 +3935,7 @@
           <a:p>
             <a:fld id="{EC483935-07C3-DB40-BDCF-E55515B19C93}" type="datetimeFigureOut">
               <a:rPr lang="en-US" smtClean="0"/>
-              <a:t>9/29/26</a:t>
+              <a:t>9/30/26</a:t>
             </a:fld>
             <a:endParaRPr lang="en-US"/>
           </a:p>
@@ -4176,7 +4176,7 @@
           <a:p>
             <a:fld id="{EC483935-07C3-DB40-BDCF-E55515B19C93}" type="datetimeFigureOut">
               <a:rPr lang="en-US" smtClean="0"/>
-              <a:t>9/29/26</a:t>
+              <a:t>9/30/26</a:t>
             </a:fld>
             <a:endParaRPr lang="en-US"/>
           </a:p>
@@ -12815,7 +12815,66 @@
           <a:bodyPr/>
           <a:lstStyle/>
           <a:p>
-            <a:endParaRPr lang="en-US"/>
+            <a:r>
+              <a:rPr lang="en-US" dirty="0"/>
+              <a:t>Code share = </a:t>
+            </a:r>
+            <a:r>
+              <a:rPr lang="en-US" dirty="0" err="1"/>
+              <a:t>github</a:t>
+            </a:r>
+            <a:endParaRPr lang="en-US" dirty="0"/>
+          </a:p>
+          <a:p>
+            <a:r>
+              <a:rPr lang="en-US" dirty="0"/>
+              <a:t>We will use small data files for day1 (</a:t>
+            </a:r>
+            <a:r>
+              <a:rPr lang="en-US" dirty="0" err="1"/>
+              <a:t>github</a:t>
+            </a:r>
+            <a:r>
+              <a:rPr lang="en-US" dirty="0"/>
+              <a:t>) </a:t>
+            </a:r>
+          </a:p>
+          <a:p>
+            <a:r>
+              <a:rPr lang="en-US" dirty="0"/>
+              <a:t>We will use big data files for day2 (hazel) – globus?</a:t>
+            </a:r>
+          </a:p>
+          <a:p>
+            <a:r>
+              <a:rPr lang="en-US" dirty="0"/>
+              <a:t>No internet in compute nodes except xfer (</a:t>
+            </a:r>
+            <a:r>
+              <a:rPr lang="en-US" dirty="0">
+                <a:hlinkClick r:id="rId2"/>
+              </a:rPr>
+              <a:t>https://hurwitzlab.github.io/COS_Compute_Handbook/chapters/10_downloading_data.html</a:t>
+            </a:r>
+            <a:r>
+              <a:rPr lang="en-US" dirty="0"/>
+              <a:t>) </a:t>
+            </a:r>
+          </a:p>
+          <a:p>
+            <a:r>
+              <a:rPr lang="en-US" dirty="0"/>
+              <a:t>BRC modules are wrapped container images</a:t>
+            </a:r>
+          </a:p>
+          <a:p>
+            <a:r>
+              <a:rPr lang="en-US" dirty="0"/>
+              <a:t>Jobs my take a while to run, we normally don’t need to wait, it is more important to understand what we are doing and why</a:t>
+            </a:r>
+          </a:p>
+          <a:p>
+            <a:endParaRPr lang="en-US" dirty="0"/>
           </a:p>
         </p:txBody>
       </p:sp>

--- a/day1_material/slides/day1.pptx
+++ b/day1_material/slides/day1.pptx
@@ -5,7 +5,7 @@
     <p:sldMasterId id="2147483648" r:id="rId1"/>
   </p:sldMasterIdLst>
   <p:notesMasterIdLst>
-    <p:notesMasterId r:id="rId26"/>
+    <p:notesMasterId r:id="rId28"/>
   </p:notesMasterIdLst>
   <p:sldIdLst>
     <p:sldId id="256" r:id="rId2"/>
@@ -32,6 +32,8 @@
     <p:sldId id="303" r:id="rId23"/>
     <p:sldId id="305" r:id="rId24"/>
     <p:sldId id="309" r:id="rId25"/>
+    <p:sldId id="311" r:id="rId26"/>
+    <p:sldId id="310" r:id="rId27"/>
   </p:sldIdLst>
   <p:sldSz cx="12192000" cy="6858000"/>
   <p:notesSz cx="6858000" cy="9144000"/>
@@ -220,7 +222,7 @@
           <a:p>
             <a:fld id="{09C84A49-CA76-E84D-B4CB-59BA5B0597A2}" type="datetimeFigureOut">
               <a:rPr lang="en-US" smtClean="0"/>
-              <a:t>9/30/26</a:t>
+              <a:t>10/2/26</a:t>
             </a:fld>
             <a:endParaRPr lang="en-US"/>
           </a:p>
@@ -1526,7 +1528,7 @@
           <a:p>
             <a:fld id="{EC483935-07C3-DB40-BDCF-E55515B19C93}" type="datetimeFigureOut">
               <a:rPr lang="en-US" smtClean="0"/>
-              <a:t>9/30/26</a:t>
+              <a:t>10/2/26</a:t>
             </a:fld>
             <a:endParaRPr lang="en-US"/>
           </a:p>
@@ -1724,7 +1726,7 @@
           <a:p>
             <a:fld id="{EC483935-07C3-DB40-BDCF-E55515B19C93}" type="datetimeFigureOut">
               <a:rPr lang="en-US" smtClean="0"/>
-              <a:t>9/30/26</a:t>
+              <a:t>10/2/26</a:t>
             </a:fld>
             <a:endParaRPr lang="en-US"/>
           </a:p>
@@ -1932,7 +1934,7 @@
           <a:p>
             <a:fld id="{EC483935-07C3-DB40-BDCF-E55515B19C93}" type="datetimeFigureOut">
               <a:rPr lang="en-US" smtClean="0"/>
-              <a:t>9/30/26</a:t>
+              <a:t>10/2/26</a:t>
             </a:fld>
             <a:endParaRPr lang="en-US"/>
           </a:p>
@@ -2130,7 +2132,7 @@
           <a:p>
             <a:fld id="{EC483935-07C3-DB40-BDCF-E55515B19C93}" type="datetimeFigureOut">
               <a:rPr lang="en-US" smtClean="0"/>
-              <a:t>9/30/26</a:t>
+              <a:t>10/2/26</a:t>
             </a:fld>
             <a:endParaRPr lang="en-US"/>
           </a:p>
@@ -2405,7 +2407,7 @@
           <a:p>
             <a:fld id="{EC483935-07C3-DB40-BDCF-E55515B19C93}" type="datetimeFigureOut">
               <a:rPr lang="en-US" smtClean="0"/>
-              <a:t>9/30/26</a:t>
+              <a:t>10/2/26</a:t>
             </a:fld>
             <a:endParaRPr lang="en-US"/>
           </a:p>
@@ -2670,7 +2672,7 @@
           <a:p>
             <a:fld id="{EC483935-07C3-DB40-BDCF-E55515B19C93}" type="datetimeFigureOut">
               <a:rPr lang="en-US" smtClean="0"/>
-              <a:t>9/30/26</a:t>
+              <a:t>10/2/26</a:t>
             </a:fld>
             <a:endParaRPr lang="en-US"/>
           </a:p>
@@ -3082,7 +3084,7 @@
           <a:p>
             <a:fld id="{EC483935-07C3-DB40-BDCF-E55515B19C93}" type="datetimeFigureOut">
               <a:rPr lang="en-US" smtClean="0"/>
-              <a:t>9/30/26</a:t>
+              <a:t>10/2/26</a:t>
             </a:fld>
             <a:endParaRPr lang="en-US"/>
           </a:p>
@@ -3223,7 +3225,7 @@
           <a:p>
             <a:fld id="{EC483935-07C3-DB40-BDCF-E55515B19C93}" type="datetimeFigureOut">
               <a:rPr lang="en-US" smtClean="0"/>
-              <a:t>9/30/26</a:t>
+              <a:t>10/2/26</a:t>
             </a:fld>
             <a:endParaRPr lang="en-US"/>
           </a:p>
@@ -3336,7 +3338,7 @@
           <a:p>
             <a:fld id="{EC483935-07C3-DB40-BDCF-E55515B19C93}" type="datetimeFigureOut">
               <a:rPr lang="en-US" smtClean="0"/>
-              <a:t>9/30/26</a:t>
+              <a:t>10/2/26</a:t>
             </a:fld>
             <a:endParaRPr lang="en-US"/>
           </a:p>
@@ -3647,7 +3649,7 @@
           <a:p>
             <a:fld id="{EC483935-07C3-DB40-BDCF-E55515B19C93}" type="datetimeFigureOut">
               <a:rPr lang="en-US" smtClean="0"/>
-              <a:t>9/30/26</a:t>
+              <a:t>10/2/26</a:t>
             </a:fld>
             <a:endParaRPr lang="en-US"/>
           </a:p>
@@ -3935,7 +3937,7 @@
           <a:p>
             <a:fld id="{EC483935-07C3-DB40-BDCF-E55515B19C93}" type="datetimeFigureOut">
               <a:rPr lang="en-US" smtClean="0"/>
-              <a:t>9/30/26</a:t>
+              <a:t>10/2/26</a:t>
             </a:fld>
             <a:endParaRPr lang="en-US"/>
           </a:p>
@@ -4176,7 +4178,7 @@
           <a:p>
             <a:fld id="{EC483935-07C3-DB40-BDCF-E55515B19C93}" type="datetimeFigureOut">
               <a:rPr lang="en-US" smtClean="0"/>
-              <a:t>9/30/26</a:t>
+              <a:t>10/2/26</a:t>
             </a:fld>
             <a:endParaRPr lang="en-US"/>
           </a:p>
@@ -12734,6 +12736,261 @@
     <p:extLst>
       <p:ext uri="{BB962C8B-B14F-4D97-AF65-F5344CB8AC3E}">
         <p14:creationId xmlns:p14="http://schemas.microsoft.com/office/powerpoint/2010/main" val="493050639"/>
+      </p:ext>
+    </p:extLst>
+  </p:cSld>
+  <p:clrMapOvr>
+    <a:masterClrMapping/>
+  </p:clrMapOvr>
+</p:sld>
+</file>
+
+<file path=ppt/slides/slide25.xml><?xml version="1.0" encoding="utf-8"?>
+<p:sld xmlns:a="http://schemas.openxmlformats.org/drawingml/2006/main" xmlns:r="http://schemas.openxmlformats.org/officeDocument/2006/relationships" xmlns:p="http://schemas.openxmlformats.org/presentationml/2006/main">
+  <p:cSld>
+    <p:spTree>
+      <p:nvGrpSpPr>
+        <p:cNvPr id="1" name=""/>
+        <p:cNvGrpSpPr/>
+        <p:nvPr/>
+      </p:nvGrpSpPr>
+      <p:grpSpPr>
+        <a:xfrm>
+          <a:off x="0" y="0"/>
+          <a:ext cx="0" cy="0"/>
+          <a:chOff x="0" y="0"/>
+          <a:chExt cx="0" cy="0"/>
+        </a:xfrm>
+      </p:grpSpPr>
+      <p:sp>
+        <p:nvSpPr>
+          <p:cNvPr id="4" name="Title 1">
+            <a:extLst>
+              <a:ext uri="{FF2B5EF4-FFF2-40B4-BE49-F238E27FC236}">
+                <a16:creationId xmlns:a16="http://schemas.microsoft.com/office/drawing/2014/main" id="{C95ACD5E-A6FD-711E-3B35-DB8A4D17DC48}"/>
+              </a:ext>
+            </a:extLst>
+          </p:cNvPr>
+          <p:cNvSpPr>
+            <a:spLocks noGrp="1"/>
+          </p:cNvSpPr>
+          <p:nvPr>
+            <p:ph type="title"/>
+          </p:nvPr>
+        </p:nvSpPr>
+        <p:spPr>
+          <a:xfrm>
+            <a:off x="838200" y="365125"/>
+            <a:ext cx="10515600" cy="1325563"/>
+          </a:xfrm>
+        </p:spPr>
+        <p:txBody>
+          <a:bodyPr>
+            <a:normAutofit/>
+          </a:bodyPr>
+          <a:lstStyle/>
+          <a:p>
+            <a:r>
+              <a:rPr lang="en-US" sz="4000" dirty="0">
+                <a:latin typeface="Helvetica" pitchFamily="2" charset="0"/>
+              </a:rPr>
+              <a:t>Next steps…</a:t>
+            </a:r>
+          </a:p>
+        </p:txBody>
+      </p:sp>
+      <p:pic>
+        <p:nvPicPr>
+          <p:cNvPr id="7" name="Picture 6" descr="nf-core">
+            <a:extLst>
+              <a:ext uri="{FF2B5EF4-FFF2-40B4-BE49-F238E27FC236}">
+                <a16:creationId xmlns:a16="http://schemas.microsoft.com/office/drawing/2014/main" id="{03BE56AD-44DB-1207-F500-4D23226699E3}"/>
+              </a:ext>
+            </a:extLst>
+          </p:cNvPr>
+          <p:cNvPicPr>
+            <a:picLocks noChangeAspect="1"/>
+          </p:cNvPicPr>
+          <p:nvPr/>
+        </p:nvPicPr>
+        <p:blipFill>
+          <a:blip r:embed="rId2"/>
+          <a:stretch>
+            <a:fillRect/>
+          </a:stretch>
+        </p:blipFill>
+        <p:spPr>
+          <a:xfrm>
+            <a:off x="838200" y="2380555"/>
+            <a:ext cx="5424080" cy="3051046"/>
+          </a:xfrm>
+          <a:prstGeom prst="rect">
+            <a:avLst/>
+          </a:prstGeom>
+        </p:spPr>
+      </p:pic>
+      <p:pic>
+        <p:nvPicPr>
+          <p:cNvPr id="8" name="Picture 7" descr="A simple test framework for Nextflow pipelines - Askimed">
+            <a:extLst>
+              <a:ext uri="{FF2B5EF4-FFF2-40B4-BE49-F238E27FC236}">
+                <a16:creationId xmlns:a16="http://schemas.microsoft.com/office/drawing/2014/main" id="{675C2A6E-24A6-B974-5E74-524567E856D0}"/>
+              </a:ext>
+            </a:extLst>
+          </p:cNvPr>
+          <p:cNvPicPr>
+            <a:picLocks noChangeAspect="1"/>
+          </p:cNvPicPr>
+          <p:nvPr/>
+        </p:nvPicPr>
+        <p:blipFill>
+          <a:blip r:embed="rId3"/>
+          <a:stretch>
+            <a:fillRect/>
+          </a:stretch>
+        </p:blipFill>
+        <p:spPr>
+          <a:xfrm>
+            <a:off x="6742669" y="1431235"/>
+            <a:ext cx="5049079" cy="4488070"/>
+          </a:xfrm>
+          <a:prstGeom prst="rect">
+            <a:avLst/>
+          </a:prstGeom>
+        </p:spPr>
+      </p:pic>
+    </p:spTree>
+    <p:extLst>
+      <p:ext uri="{BB962C8B-B14F-4D97-AF65-F5344CB8AC3E}">
+        <p14:creationId xmlns:p14="http://schemas.microsoft.com/office/powerpoint/2010/main" val="3539972613"/>
+      </p:ext>
+    </p:extLst>
+  </p:cSld>
+  <p:clrMapOvr>
+    <a:masterClrMapping/>
+  </p:clrMapOvr>
+</p:sld>
+</file>
+
+<file path=ppt/slides/slide26.xml><?xml version="1.0" encoding="utf-8"?>
+<p:sld xmlns:a="http://schemas.openxmlformats.org/drawingml/2006/main" xmlns:r="http://schemas.openxmlformats.org/officeDocument/2006/relationships" xmlns:p="http://schemas.openxmlformats.org/presentationml/2006/main">
+  <p:cSld>
+    <p:spTree>
+      <p:nvGrpSpPr>
+        <p:cNvPr id="1" name=""/>
+        <p:cNvGrpSpPr/>
+        <p:nvPr/>
+      </p:nvGrpSpPr>
+      <p:grpSpPr>
+        <a:xfrm>
+          <a:off x="0" y="0"/>
+          <a:ext cx="0" cy="0"/>
+          <a:chOff x="0" y="0"/>
+          <a:chExt cx="0" cy="0"/>
+        </a:xfrm>
+      </p:grpSpPr>
+      <p:pic>
+        <p:nvPicPr>
+          <p:cNvPr id="4" name="Picture 3">
+            <a:extLst>
+              <a:ext uri="{FF2B5EF4-FFF2-40B4-BE49-F238E27FC236}">
+                <a16:creationId xmlns:a16="http://schemas.microsoft.com/office/drawing/2014/main" id="{304F6AEA-5F69-088A-A0DE-40B32ABDE5AB}"/>
+              </a:ext>
+            </a:extLst>
+          </p:cNvPr>
+          <p:cNvPicPr>
+            <a:picLocks noChangeAspect="1"/>
+          </p:cNvPicPr>
+          <p:nvPr/>
+        </p:nvPicPr>
+        <p:blipFill>
+          <a:blip r:embed="rId2"/>
+          <a:srcRect t="3724"/>
+          <a:stretch>
+            <a:fillRect/>
+          </a:stretch>
+        </p:blipFill>
+        <p:spPr>
+          <a:xfrm>
+            <a:off x="6851374" y="1690688"/>
+            <a:ext cx="4784312" cy="4523409"/>
+          </a:xfrm>
+          <a:prstGeom prst="rect">
+            <a:avLst/>
+          </a:prstGeom>
+        </p:spPr>
+      </p:pic>
+      <p:sp>
+        <p:nvSpPr>
+          <p:cNvPr id="6" name="Title 1">
+            <a:extLst>
+              <a:ext uri="{FF2B5EF4-FFF2-40B4-BE49-F238E27FC236}">
+                <a16:creationId xmlns:a16="http://schemas.microsoft.com/office/drawing/2014/main" id="{8890979E-372F-41F4-5A62-CEF5E67B65ED}"/>
+              </a:ext>
+            </a:extLst>
+          </p:cNvPr>
+          <p:cNvSpPr>
+            <a:spLocks noGrp="1"/>
+          </p:cNvSpPr>
+          <p:nvPr>
+            <p:ph type="title"/>
+          </p:nvPr>
+        </p:nvSpPr>
+        <p:spPr>
+          <a:xfrm>
+            <a:off x="838200" y="365125"/>
+            <a:ext cx="10515600" cy="1325563"/>
+          </a:xfrm>
+        </p:spPr>
+        <p:txBody>
+          <a:bodyPr>
+            <a:normAutofit/>
+          </a:bodyPr>
+          <a:lstStyle/>
+          <a:p>
+            <a:r>
+              <a:rPr lang="en-US" sz="4000" dirty="0">
+                <a:latin typeface="Helvetica" pitchFamily="2" charset="0"/>
+              </a:rPr>
+              <a:t>Leave us your feedback!</a:t>
+            </a:r>
+          </a:p>
+        </p:txBody>
+      </p:sp>
+      <p:pic>
+        <p:nvPicPr>
+          <p:cNvPr id="7" name="Picture 6" descr="Feedback - Free icons">
+            <a:extLst>
+              <a:ext uri="{FF2B5EF4-FFF2-40B4-BE49-F238E27FC236}">
+                <a16:creationId xmlns:a16="http://schemas.microsoft.com/office/drawing/2014/main" id="{020CDB47-E032-4988-06C4-FF412787737F}"/>
+              </a:ext>
+            </a:extLst>
+          </p:cNvPr>
+          <p:cNvPicPr>
+            <a:picLocks noChangeAspect="1"/>
+          </p:cNvPicPr>
+          <p:nvPr/>
+        </p:nvPicPr>
+        <p:blipFill>
+          <a:blip r:embed="rId3"/>
+          <a:stretch>
+            <a:fillRect/>
+          </a:stretch>
+        </p:blipFill>
+        <p:spPr>
+          <a:xfrm>
+            <a:off x="1510471" y="3429000"/>
+            <a:ext cx="3429000" cy="3429000"/>
+          </a:xfrm>
+          <a:prstGeom prst="rect">
+            <a:avLst/>
+          </a:prstGeom>
+        </p:spPr>
+      </p:pic>
+    </p:spTree>
+    <p:extLst>
+      <p:ext uri="{BB962C8B-B14F-4D97-AF65-F5344CB8AC3E}">
+        <p14:creationId xmlns:p14="http://schemas.microsoft.com/office/powerpoint/2010/main" val="3239728250"/>
       </p:ext>
     </p:extLst>
   </p:cSld>
